--- a/docs/ai-era-appeal-pitch-deck.pptx
+++ b/docs/ai-era-appeal-pitch-deck.pptx
@@ -18,9 +18,10 @@
     <p:sldId id="266" r:id="rId12"/>
     <p:sldId id="267" r:id="rId13"/>
     <p:sldId id="268" r:id="rId14"/>
+    <p:sldId id="269" r:id="rId15"/>
   </p:sldIdLst>
   <p:notesMasterIdLst>
-    <p:notesMasterId r:id="rId15"/>
+    <p:notesMasterId r:id="rId16"/>
   </p:notesMasterIdLst>
   <p:sldSz cx="12192000" cy="6858000"/>
   <p:notesSz cx="6858000" cy="12192000"/>
@@ -117,6 +118,1134 @@
     </a:lvl9pPr>
   </p:defaultTextStyle>
 </p:presentation>
+</file>
+
+<file path=ppt/charts/chart1.xml><?xml version="1.0" encoding="utf-8"?>
+<c:chartSpace xmlns:c="http://schemas.openxmlformats.org/drawingml/2006/chart" xmlns:a="http://schemas.openxmlformats.org/drawingml/2006/main" xmlns:r="http://schemas.openxmlformats.org/officeDocument/2006/relationships">
+  <c:date1904 val="0"/>
+  <c:roundedCorners val="1"/>
+  <c:chart>
+    <c:title>
+      <c:tx>
+        <c:rich>
+          <a:bodyPr/>
+          <a:lstStyle/>
+          <a:p>
+            <a:pPr>
+              <a:defRPr sz="1200" b="0" i="0" u="none" strike="noStrike">
+                <a:solidFill>
+                  <a:srgbClr val="1B2430"/>
+                </a:solidFill>
+                <a:latin typeface="Calibri"/>
+              </a:defRPr>
+            </a:pPr>
+            <a:r>
+              <a:rPr sz="1200" b="0" i="0" u="none" strike="noStrike">
+                <a:solidFill>
+                  <a:srgbClr val="1B2430"/>
+                </a:solidFill>
+                <a:latin typeface="Calibri"/>
+              </a:rPr>
+              <a:t>米・ソフトウェア開発者の雇用指数（2022年末=100）</a:t>
+            </a:r>
+          </a:p>
+        </c:rich>
+      </c:tx>
+      <c:layout/>
+      <c:overlay val="0"/>
+    </c:title>
+    <c:autoTitleDeleted val="0"/>
+    <c:plotArea>
+      <c:layout/>
+      <c:lineChart>
+        <c:varyColors val="0"/>
+        <c:ser>
+          <c:idx val="0"/>
+          <c:order val="0"/>
+          <c:tx>
+            <c:strRef>
+              <c:f>Sheet1!$B$1</c:f>
+              <c:strCache>
+                <c:ptCount val="1"/>
+                <c:pt idx="0">
+                  <c:v>22〜25歳（若手）</c:v>
+                </c:pt>
+              </c:strCache>
+            </c:strRef>
+          </c:tx>
+          <c:spPr>
+            <a:solidFill>
+              <a:srgbClr val="B3524C"/>
+            </a:solidFill>
+            <a:ln w="38100" cap="flat">
+              <a:solidFill>
+                <a:srgbClr val="B3524C"/>
+              </a:solidFill>
+              <a:prstDash val="solid"/>
+              <a:round/>
+            </a:ln>
+            <a:effectLst/>
+          </c:spPr>
+          <c:invertIfNegative val="0"/>
+          <c:dLbls>
+            <c:numFmt formatCode="#,##0" sourceLinked="0"/>
+            <c:txPr>
+              <a:bodyPr/>
+              <a:lstStyle/>
+              <a:p>
+                <a:pPr>
+                  <a:defRPr b="0" i="0" strike="noStrike" sz="1200" u="none">
+                    <a:solidFill>
+                      <a:srgbClr val="000000"/>
+                    </a:solidFill>
+                    <a:latin typeface="Arial"/>
+                  </a:defRPr>
+                </a:pPr>
+              </a:p>
+            </c:txPr>
+            <c:showLegendKey val="0"/>
+            <c:showVal val="0"/>
+            <c:showCatName val="0"/>
+            <c:showSerName val="0"/>
+            <c:showPercent val="0"/>
+            <c:showBubbleSize val="0"/>
+            <c:showLeaderLines val="0"/>
+          </c:dLbls>
+          <c:marker>
+            <c:symbol val="circle"/>
+            <c:size val="6"/>
+            <c:spPr>
+              <a:solidFill>
+                <a:srgbClr val="B3524C"/>
+              </a:solidFill>
+              <a:ln w="9525" cap="flat">
+                <a:solidFill>
+                  <a:srgbClr val="B3524C"/>
+                </a:solidFill>
+                <a:prstDash val="solid"/>
+                <a:round/>
+              </a:ln>
+              <a:effectLst/>
+            </c:spPr>
+          </c:marker>
+          <c:cat>
+            <c:multiLvlStrRef>
+              <c:f>Sheet1!$A$2:$A$5</c:f>
+              <c:multiLvlStrCache>
+                <c:ptCount val="4"/>
+                <c:lvl>
+                  <c:pt idx="0">
+                    <c:v>2022末</c:v>
+                  </c:pt>
+                  <c:pt idx="1">
+                    <c:v>2023</c:v>
+                  </c:pt>
+                  <c:pt idx="2">
+                    <c:v>2024</c:v>
+                  </c:pt>
+                  <c:pt idx="3">
+                    <c:v>2025</c:v>
+                  </c:pt>
+                </c:lvl>
+              </c:multiLvlStrCache>
+            </c:multiLvlStrRef>
+          </c:cat>
+          <c:val>
+            <c:numRef>
+              <c:f>Sheet1!$B$2:$B$5</c:f>
+              <c:numCache>
+                <c:formatCode>General</c:formatCode>
+                <c:ptCount val="4"/>
+                <c:pt idx="0">
+                  <c:v>100</c:v>
+                </c:pt>
+                <c:pt idx="1">
+                  <c:v>93</c:v>
+                </c:pt>
+                <c:pt idx="2">
+                  <c:v>87</c:v>
+                </c:pt>
+                <c:pt idx="3">
+                  <c:v>80</c:v>
+                </c:pt>
+              </c:numCache>
+            </c:numRef>
+          </c:val>
+          <c:smooth val="0"/>
+        </c:ser>
+        <c:ser>
+          <c:idx val="1"/>
+          <c:order val="1"/>
+          <c:tx>
+            <c:strRef>
+              <c:f>Sheet1!$C$1</c:f>
+              <c:strCache>
+                <c:ptCount val="1"/>
+                <c:pt idx="0">
+                  <c:v>26歳以上（年長層）</c:v>
+                </c:pt>
+              </c:strCache>
+            </c:strRef>
+          </c:tx>
+          <c:spPr>
+            <a:solidFill>
+              <a:srgbClr val="9AA6B8"/>
+            </a:solidFill>
+            <a:ln w="38100" cap="flat">
+              <a:solidFill>
+                <a:srgbClr val="9AA6B8"/>
+              </a:solidFill>
+              <a:prstDash val="solid"/>
+              <a:round/>
+            </a:ln>
+            <a:effectLst/>
+          </c:spPr>
+          <c:invertIfNegative val="0"/>
+          <c:dLbls>
+            <c:numFmt formatCode="#,##0" sourceLinked="0"/>
+            <c:txPr>
+              <a:bodyPr/>
+              <a:lstStyle/>
+              <a:p>
+                <a:pPr>
+                  <a:defRPr b="0" i="0" strike="noStrike" sz="1200" u="none">
+                    <a:solidFill>
+                      <a:srgbClr val="000000"/>
+                    </a:solidFill>
+                    <a:latin typeface="Arial"/>
+                  </a:defRPr>
+                </a:pPr>
+              </a:p>
+            </c:txPr>
+            <c:showLegendKey val="0"/>
+            <c:showVal val="0"/>
+            <c:showCatName val="0"/>
+            <c:showSerName val="0"/>
+            <c:showPercent val="0"/>
+            <c:showBubbleSize val="0"/>
+            <c:showLeaderLines val="0"/>
+          </c:dLbls>
+          <c:marker>
+            <c:symbol val="circle"/>
+            <c:size val="6"/>
+            <c:spPr>
+              <a:solidFill>
+                <a:srgbClr val="9AA6B8"/>
+              </a:solidFill>
+              <a:ln w="9525" cap="flat">
+                <a:solidFill>
+                  <a:srgbClr val="9AA6B8"/>
+                </a:solidFill>
+                <a:prstDash val="solid"/>
+                <a:round/>
+              </a:ln>
+              <a:effectLst/>
+            </c:spPr>
+          </c:marker>
+          <c:cat>
+            <c:multiLvlStrRef>
+              <c:f>Sheet1!$A$2:$A$5</c:f>
+              <c:multiLvlStrCache>
+                <c:ptCount val="4"/>
+                <c:lvl>
+                  <c:pt idx="0">
+                    <c:v>2022末</c:v>
+                  </c:pt>
+                  <c:pt idx="1">
+                    <c:v>2023</c:v>
+                  </c:pt>
+                  <c:pt idx="2">
+                    <c:v>2024</c:v>
+                  </c:pt>
+                  <c:pt idx="3">
+                    <c:v>2025</c:v>
+                  </c:pt>
+                </c:lvl>
+              </c:multiLvlStrCache>
+            </c:multiLvlStrRef>
+          </c:cat>
+          <c:val>
+            <c:numRef>
+              <c:f>Sheet1!$C$2:$C$5</c:f>
+              <c:numCache>
+                <c:formatCode>General</c:formatCode>
+                <c:ptCount val="4"/>
+                <c:pt idx="0">
+                  <c:v>100</c:v>
+                </c:pt>
+                <c:pt idx="1">
+                  <c:v>102</c:v>
+                </c:pt>
+                <c:pt idx="2">
+                  <c:v>104</c:v>
+                </c:pt>
+                <c:pt idx="3">
+                  <c:v>105</c:v>
+                </c:pt>
+              </c:numCache>
+            </c:numRef>
+          </c:val>
+          <c:smooth val="0"/>
+        </c:ser>
+        <c:dLbls>
+          <c:numFmt formatCode="#,##0" sourceLinked="0"/>
+          <c:txPr>
+            <a:bodyPr/>
+            <a:lstStyle/>
+            <a:p>
+              <a:pPr>
+                <a:defRPr b="0" i="0" strike="noStrike" sz="1200" u="none">
+                  <a:solidFill>
+                    <a:srgbClr val="000000"/>
+                  </a:solidFill>
+                  <a:latin typeface="Arial"/>
+                </a:defRPr>
+              </a:pPr>
+            </a:p>
+          </c:txPr>
+          <c:showLegendKey val="0"/>
+          <c:showVal val="0"/>
+          <c:showCatName val="0"/>
+          <c:showSerName val="0"/>
+          <c:showPercent val="0"/>
+          <c:showBubbleSize val="0"/>
+          <c:showLeaderLines val="0"/>
+        </c:dLbls>
+        <c:marker val="1"/>
+        <c:axId val="2094734554"/>
+        <c:axId val="2094734552"/>
+        <c:axId val="2094734556"/>
+      </c:lineChart>
+      <c:catAx>
+        <c:axId val="2094734554"/>
+        <c:scaling>
+          <c:orientation val="minMax"/>
+        </c:scaling>
+        <c:delete val="0"/>
+        <c:axPos val="b"/>
+        <c:numFmt formatCode="General" sourceLinked="1"/>
+        <c:majorTickMark val="out"/>
+        <c:minorTickMark val="none"/>
+        <c:tickLblPos val="low"/>
+        <c:spPr>
+          <a:ln w="12700" cap="flat">
+            <a:solidFill>
+              <a:srgbClr val="888888"/>
+            </a:solidFill>
+            <a:prstDash val="solid"/>
+            <a:round/>
+          </a:ln>
+        </c:spPr>
+        <c:txPr>
+          <a:bodyPr/>
+          <a:lstStyle/>
+          <a:p>
+            <a:pPr>
+              <a:defRPr sz="1000" b="0" i="0" u="none" strike="noStrike">
+                <a:solidFill>
+                  <a:srgbClr val="3D4756"/>
+                </a:solidFill>
+                <a:latin typeface="Calibri"/>
+              </a:defRPr>
+            </a:pPr>
+            <a:endParaRPr lang="en-US"/>
+          </a:p>
+        </c:txPr>
+        <c:crossAx val="2094734552"/>
+        <c:crosses val="autoZero"/>
+        <c:auto val="1"/>
+        <c:lblAlgn val="ctr"/>
+        <c:noMultiLvlLbl val="1"/>
+      </c:catAx>
+      <c:valAx>
+        <c:axId val="2094734552"/>
+        <c:scaling>
+          <c:orientation val="minMax"/>
+          <c:max val="110"/>
+          <c:min val="70"/>
+        </c:scaling>
+        <c:delete val="0"/>
+        <c:axPos val="l"/>
+        <c:majorGridlines>
+          <c:spPr>
+            <a:ln w="12700" cap="flat">
+              <a:solidFill>
+                <a:srgbClr val="DCE3EC"/>
+              </a:solidFill>
+              <a:prstDash val="solid"/>
+              <a:round/>
+            </a:ln>
+          </c:spPr>
+        </c:majorGridlines>
+        <c:numFmt formatCode="General" sourceLinked="0"/>
+        <c:majorTickMark val="out"/>
+        <c:minorTickMark val="none"/>
+        <c:tickLblPos val="nextTo"/>
+        <c:spPr>
+          <a:ln w="12700" cap="flat">
+            <a:solidFill>
+              <a:srgbClr val="888888"/>
+            </a:solidFill>
+            <a:prstDash val="solid"/>
+            <a:round/>
+          </a:ln>
+        </c:spPr>
+        <c:txPr>
+          <a:bodyPr/>
+          <a:lstStyle/>
+          <a:p>
+            <a:pPr>
+              <a:defRPr sz="1000" b="0" i="0" u="none" strike="noStrike">
+                <a:solidFill>
+                  <a:srgbClr val="3D4756"/>
+                </a:solidFill>
+                <a:latin typeface="Calibri"/>
+              </a:defRPr>
+            </a:pPr>
+            <a:endParaRPr lang="en-US"/>
+          </a:p>
+        </c:txPr>
+        <c:crossAx val="2094734554"/>
+        <c:crosses val="autoZero"/>
+        <c:crossBetween val="between"/>
+      </c:valAx>
+      <c:spPr>
+        <a:noFill/>
+        <a:ln>
+          <a:noFill/>
+        </a:ln>
+        <a:effectLst/>
+      </c:spPr>
+    </c:plotArea>
+    <c:legend>
+      <c:legendPos val="b"/>
+      <c:overlay val="0"/>
+      <c:txPr>
+        <a:bodyPr/>
+        <a:lstStyle/>
+        <a:p>
+          <a:pPr>
+            <a:defRPr sz="1000">
+              <a:solidFill>
+                <a:srgbClr val="3D4756"/>
+              </a:solidFill>
+            </a:defRPr>
+          </a:pPr>
+          <a:endParaRPr lang="en-US"/>
+        </a:p>
+      </c:txPr>
+    </c:legend>
+    <c:plotVisOnly val="1"/>
+    <c:dispBlanksAs val="span"/>
+  </c:chart>
+  <c:spPr>
+    <a:noFill/>
+    <a:ln>
+      <a:noFill/>
+    </a:ln>
+    <a:effectLst/>
+  </c:spPr>
+  <c:externalData r:id="rId1">
+    <c:autoUpdate val="0"/>
+  </c:externalData>
+</c:chartSpace>
+</file>
+
+<file path=ppt/charts/chart2.xml><?xml version="1.0" encoding="utf-8"?>
+<c:chartSpace xmlns:c="http://schemas.openxmlformats.org/drawingml/2006/chart" xmlns:a="http://schemas.openxmlformats.org/drawingml/2006/main" xmlns:r="http://schemas.openxmlformats.org/officeDocument/2006/relationships">
+  <c:date1904 val="0"/>
+  <c:roundedCorners val="1"/>
+  <c:chart>
+    <c:title>
+      <c:tx>
+        <c:rich>
+          <a:bodyPr/>
+          <a:lstStyle/>
+          <a:p>
+            <a:pPr>
+              <a:defRPr sz="1200" b="0" i="0" u="none" strike="noStrike">
+                <a:solidFill>
+                  <a:srgbClr val="1B2430"/>
+                </a:solidFill>
+                <a:latin typeface="Calibri"/>
+              </a:defRPr>
+            </a:pPr>
+            <a:r>
+              <a:rPr sz="1200" b="0" i="0" u="none" strike="noStrike">
+                <a:solidFill>
+                  <a:srgbClr val="1B2430"/>
+                </a:solidFill>
+                <a:latin typeface="Calibri"/>
+              </a:rPr>
+              <a:t>生成AIの利用・活用率の国際比較（%）</a:t>
+            </a:r>
+          </a:p>
+        </c:rich>
+      </c:tx>
+      <c:layout/>
+      <c:overlay val="0"/>
+    </c:title>
+    <c:autoTitleDeleted val="0"/>
+    <c:plotArea>
+      <c:layout/>
+      <c:barChart>
+        <c:barDir val="col"/>
+        <c:grouping val="clustered"/>
+        <c:varyColors val="0"/>
+        <c:ser>
+          <c:idx val="0"/>
+          <c:order val="0"/>
+          <c:tx>
+            <c:strRef>
+              <c:f>Sheet1!$B$1</c:f>
+              <c:strCache>
+                <c:ptCount val="1"/>
+                <c:pt idx="0">
+                  <c:v>個人の生成AI利用経験率</c:v>
+                </c:pt>
+              </c:strCache>
+            </c:strRef>
+          </c:tx>
+          <c:spPr>
+            <a:solidFill>
+              <a:srgbClr val="1C7293"/>
+            </a:solidFill>
+            <a:effectLst/>
+          </c:spPr>
+          <c:invertIfNegative val="0"/>
+          <c:dLbls>
+            <c:numFmt formatCode="0.0" sourceLinked="0"/>
+            <c:txPr>
+              <a:bodyPr/>
+              <a:lstStyle/>
+              <a:p>
+                <a:pPr>
+                  <a:defRPr b="0" i="0" strike="noStrike" sz="900" u="none">
+                    <a:solidFill>
+                      <a:srgbClr val="3D4756"/>
+                    </a:solidFill>
+                    <a:latin typeface="Calibri"/>
+                  </a:defRPr>
+                </a:pPr>
+              </a:p>
+            </c:txPr>
+            <c:showLegendKey val="0"/>
+            <c:showVal val="1"/>
+            <c:showCatName val="0"/>
+            <c:showSerName val="0"/>
+            <c:showPercent val="0"/>
+            <c:showBubbleSize val="0"/>
+            <c:showLeaderLines val="0"/>
+          </c:dLbls>
+          <c:cat>
+            <c:multiLvlStrRef>
+              <c:f>Sheet1!$A$2:$A$5</c:f>
+              <c:multiLvlStrCache>
+                <c:ptCount val="4"/>
+                <c:lvl>
+                  <c:pt idx="0">
+                    <c:v>日本</c:v>
+                  </c:pt>
+                  <c:pt idx="1">
+                    <c:v>米国</c:v>
+                  </c:pt>
+                  <c:pt idx="2">
+                    <c:v>ドイツ</c:v>
+                  </c:pt>
+                  <c:pt idx="3">
+                    <c:v>中国</c:v>
+                  </c:pt>
+                </c:lvl>
+              </c:multiLvlStrCache>
+            </c:multiLvlStrRef>
+          </c:cat>
+          <c:val>
+            <c:numRef>
+              <c:f>Sheet1!$B$2:$B$5</c:f>
+              <c:numCache>
+                <c:formatCode>General</c:formatCode>
+                <c:ptCount val="4"/>
+                <c:pt idx="0">
+                  <c:v>26.7</c:v>
+                </c:pt>
+                <c:pt idx="1">
+                  <c:v>68.8</c:v>
+                </c:pt>
+                <c:pt idx="2">
+                  <c:v>59.2</c:v>
+                </c:pt>
+                <c:pt idx="3">
+                  <c:v>81.2</c:v>
+                </c:pt>
+              </c:numCache>
+            </c:numRef>
+          </c:val>
+        </c:ser>
+        <c:ser>
+          <c:idx val="1"/>
+          <c:order val="1"/>
+          <c:tx>
+            <c:strRef>
+              <c:f>Sheet1!$C$1</c:f>
+              <c:strCache>
+                <c:ptCount val="1"/>
+                <c:pt idx="0">
+                  <c:v>企業の活用方針あり</c:v>
+                </c:pt>
+              </c:strCache>
+            </c:strRef>
+          </c:tx>
+          <c:spPr>
+            <a:solidFill>
+              <a:srgbClr val="E8A33D"/>
+            </a:solidFill>
+            <a:effectLst/>
+          </c:spPr>
+          <c:invertIfNegative val="0"/>
+          <c:dLbls>
+            <c:numFmt formatCode="0.0" sourceLinked="0"/>
+            <c:txPr>
+              <a:bodyPr/>
+              <a:lstStyle/>
+              <a:p>
+                <a:pPr>
+                  <a:defRPr b="0" i="0" strike="noStrike" sz="900" u="none">
+                    <a:solidFill>
+                      <a:srgbClr val="3D4756"/>
+                    </a:solidFill>
+                    <a:latin typeface="Calibri"/>
+                  </a:defRPr>
+                </a:pPr>
+              </a:p>
+            </c:txPr>
+            <c:showLegendKey val="0"/>
+            <c:showVal val="1"/>
+            <c:showCatName val="0"/>
+            <c:showSerName val="0"/>
+            <c:showPercent val="0"/>
+            <c:showBubbleSize val="0"/>
+            <c:showLeaderLines val="0"/>
+          </c:dLbls>
+          <c:cat>
+            <c:multiLvlStrRef>
+              <c:f>Sheet1!$A$2:$A$5</c:f>
+              <c:multiLvlStrCache>
+                <c:ptCount val="4"/>
+                <c:lvl>
+                  <c:pt idx="0">
+                    <c:v>日本</c:v>
+                  </c:pt>
+                  <c:pt idx="1">
+                    <c:v>米国</c:v>
+                  </c:pt>
+                  <c:pt idx="2">
+                    <c:v>ドイツ</c:v>
+                  </c:pt>
+                  <c:pt idx="3">
+                    <c:v>中国</c:v>
+                  </c:pt>
+                </c:lvl>
+              </c:multiLvlStrCache>
+            </c:multiLvlStrRef>
+          </c:cat>
+          <c:val>
+            <c:numRef>
+              <c:f>Sheet1!$C$2:$C$5</c:f>
+              <c:numCache>
+                <c:formatCode>General</c:formatCode>
+                <c:ptCount val="4"/>
+                <c:pt idx="0">
+                  <c:v>49.7</c:v>
+                </c:pt>
+                <c:pt idx="1">
+                  <c:v>84.8</c:v>
+                </c:pt>
+                <c:pt idx="2">
+                  <c:v>76.4</c:v>
+                </c:pt>
+                <c:pt idx="3">
+                  <c:v>92.8</c:v>
+                </c:pt>
+              </c:numCache>
+            </c:numRef>
+          </c:val>
+        </c:ser>
+        <c:dLbls>
+          <c:numFmt formatCode="0.0" sourceLinked="0"/>
+          <c:txPr>
+            <a:bodyPr/>
+            <a:lstStyle/>
+            <a:p>
+              <a:pPr>
+                <a:defRPr b="0" i="0" strike="noStrike" sz="900" u="none">
+                  <a:solidFill>
+                    <a:srgbClr val="3D4756"/>
+                  </a:solidFill>
+                  <a:latin typeface="Calibri"/>
+                </a:defRPr>
+              </a:pPr>
+            </a:p>
+          </c:txPr>
+          <c:showLegendKey val="0"/>
+          <c:showVal val="1"/>
+          <c:showCatName val="0"/>
+          <c:showSerName val="0"/>
+          <c:showPercent val="0"/>
+          <c:showBubbleSize val="0"/>
+          <c:showLeaderLines val="0"/>
+        </c:dLbls>
+        <c:gapWidth val="60"/>
+        <c:overlap val="-10"/>
+        <c:axId val="2094734554"/>
+        <c:axId val="2094734552"/>
+        <c:axId val="2094734556"/>
+      </c:barChart>
+      <c:catAx>
+        <c:axId val="2094734554"/>
+        <c:scaling>
+          <c:orientation val="minMax"/>
+        </c:scaling>
+        <c:delete val="0"/>
+        <c:axPos val="b"/>
+        <c:numFmt formatCode="General" sourceLinked="1"/>
+        <c:majorTickMark val="out"/>
+        <c:minorTickMark val="none"/>
+        <c:tickLblPos val="low"/>
+        <c:spPr>
+          <a:ln w="12700" cap="flat">
+            <a:solidFill>
+              <a:srgbClr val="888888"/>
+            </a:solidFill>
+            <a:prstDash val="solid"/>
+            <a:round/>
+          </a:ln>
+        </c:spPr>
+        <c:txPr>
+          <a:bodyPr/>
+          <a:lstStyle/>
+          <a:p>
+            <a:pPr>
+              <a:defRPr sz="1100" b="0" i="0" u="none" strike="noStrike">
+                <a:solidFill>
+                  <a:srgbClr val="1B2430"/>
+                </a:solidFill>
+                <a:latin typeface="Calibri"/>
+              </a:defRPr>
+            </a:pPr>
+            <a:endParaRPr lang="en-US"/>
+          </a:p>
+        </c:txPr>
+        <c:crossAx val="2094734552"/>
+        <c:crosses val="autoZero"/>
+        <c:auto val="1"/>
+        <c:lblAlgn val="ctr"/>
+        <c:noMultiLvlLbl val="1"/>
+      </c:catAx>
+      <c:valAx>
+        <c:axId val="2094734552"/>
+        <c:scaling>
+          <c:orientation val="minMax"/>
+          <c:max val="100"/>
+          <c:min val="0"/>
+        </c:scaling>
+        <c:delete val="0"/>
+        <c:axPos val="l"/>
+        <c:majorGridlines>
+          <c:spPr>
+            <a:ln w="12700" cap="flat">
+              <a:solidFill>
+                <a:srgbClr val="DCE3EC"/>
+              </a:solidFill>
+              <a:prstDash val="solid"/>
+              <a:round/>
+            </a:ln>
+          </c:spPr>
+        </c:majorGridlines>
+        <c:numFmt formatCode="General" sourceLinked="0"/>
+        <c:majorTickMark val="out"/>
+        <c:minorTickMark val="none"/>
+        <c:tickLblPos val="nextTo"/>
+        <c:spPr>
+          <a:ln w="12700" cap="flat">
+            <a:solidFill>
+              <a:srgbClr val="888888"/>
+            </a:solidFill>
+            <a:prstDash val="solid"/>
+            <a:round/>
+          </a:ln>
+        </c:spPr>
+        <c:txPr>
+          <a:bodyPr/>
+          <a:lstStyle/>
+          <a:p>
+            <a:pPr>
+              <a:defRPr sz="900" b="0" i="0" u="none" strike="noStrike">
+                <a:solidFill>
+                  <a:srgbClr val="3D4756"/>
+                </a:solidFill>
+                <a:latin typeface="Arial"/>
+              </a:defRPr>
+            </a:pPr>
+            <a:endParaRPr lang="en-US"/>
+          </a:p>
+        </c:txPr>
+        <c:crossAx val="2094734554"/>
+        <c:crosses val="autoZero"/>
+        <c:crossBetween val="between"/>
+      </c:valAx>
+      <c:spPr>
+        <a:noFill/>
+        <a:ln>
+          <a:noFill/>
+        </a:ln>
+        <a:effectLst/>
+      </c:spPr>
+    </c:plotArea>
+    <c:legend>
+      <c:legendPos val="b"/>
+      <c:overlay val="0"/>
+      <c:txPr>
+        <a:bodyPr/>
+        <a:lstStyle/>
+        <a:p>
+          <a:pPr>
+            <a:defRPr sz="1000">
+              <a:solidFill>
+                <a:srgbClr val="3D4756"/>
+              </a:solidFill>
+            </a:defRPr>
+          </a:pPr>
+          <a:endParaRPr lang="en-US"/>
+        </a:p>
+      </c:txPr>
+    </c:legend>
+    <c:plotVisOnly val="1"/>
+    <c:dispBlanksAs val="span"/>
+  </c:chart>
+  <c:spPr>
+    <a:noFill/>
+    <a:ln>
+      <a:noFill/>
+    </a:ln>
+    <a:effectLst/>
+  </c:spPr>
+  <c:externalData r:id="rId1">
+    <c:autoUpdate val="0"/>
+  </c:externalData>
+</c:chartSpace>
+</file>
+
+<file path=ppt/charts/chart3.xml><?xml version="1.0" encoding="utf-8"?>
+<c:chartSpace xmlns:c="http://schemas.openxmlformats.org/drawingml/2006/chart" xmlns:a="http://schemas.openxmlformats.org/drawingml/2006/main" xmlns:r="http://schemas.openxmlformats.org/officeDocument/2006/relationships">
+  <c:date1904 val="0"/>
+  <c:roundedCorners val="1"/>
+  <c:chart>
+    <c:title>
+      <c:tx>
+        <c:rich>
+          <a:bodyPr/>
+          <a:lstStyle/>
+          <a:p>
+            <a:pPr>
+              <a:defRPr sz="1200" b="0" i="0" u="none" strike="noStrike">
+                <a:solidFill>
+                  <a:srgbClr val="1B2430"/>
+                </a:solidFill>
+                <a:latin typeface="Calibri"/>
+              </a:defRPr>
+            </a:pPr>
+            <a:r>
+              <a:rPr sz="1200" b="0" i="0" u="none" strike="noStrike">
+                <a:solidFill>
+                  <a:srgbClr val="1B2430"/>
+                </a:solidFill>
+                <a:latin typeface="Calibri"/>
+              </a:rPr>
+              <a:t>日本の生産年齢人口の見通し（万人）</a:t>
+            </a:r>
+          </a:p>
+        </c:rich>
+      </c:tx>
+      <c:layout/>
+      <c:overlay val="0"/>
+    </c:title>
+    <c:autoTitleDeleted val="0"/>
+    <c:plotArea>
+      <c:layout/>
+      <c:lineChart>
+        <c:varyColors val="0"/>
+        <c:ser>
+          <c:idx val="0"/>
+          <c:order val="0"/>
+          <c:tx>
+            <c:strRef>
+              <c:f>Sheet1!$B$1</c:f>
+              <c:strCache>
+                <c:ptCount val="1"/>
+                <c:pt idx="0">
+                  <c:v>生産年齢人口(15-64歳)</c:v>
+                </c:pt>
+              </c:strCache>
+            </c:strRef>
+          </c:tx>
+          <c:spPr>
+            <a:solidFill>
+              <a:srgbClr val="C9871F"/>
+            </a:solidFill>
+            <a:ln w="38100" cap="flat">
+              <a:solidFill>
+                <a:srgbClr val="C9871F"/>
+              </a:solidFill>
+              <a:prstDash val="solid"/>
+              <a:round/>
+            </a:ln>
+            <a:effectLst/>
+          </c:spPr>
+          <c:invertIfNegative val="0"/>
+          <c:dLbls>
+            <c:numFmt formatCode="#,##0" sourceLinked="0"/>
+            <c:txPr>
+              <a:bodyPr/>
+              <a:lstStyle/>
+              <a:p>
+                <a:pPr>
+                  <a:defRPr b="0" i="0" strike="noStrike" sz="900" u="none">
+                    <a:solidFill>
+                      <a:srgbClr val="C9871F"/>
+                    </a:solidFill>
+                    <a:latin typeface="Calibri"/>
+                  </a:defRPr>
+                </a:pPr>
+              </a:p>
+            </c:txPr>
+            <c:dLblPos val="t"/>
+            <c:showLegendKey val="0"/>
+            <c:showVal val="1"/>
+            <c:showCatName val="0"/>
+            <c:showSerName val="0"/>
+            <c:showPercent val="0"/>
+            <c:showBubbleSize val="0"/>
+            <c:showLeaderLines val="0"/>
+          </c:dLbls>
+          <c:marker>
+            <c:symbol val="circle"/>
+            <c:size val="7"/>
+            <c:spPr>
+              <a:solidFill>
+                <a:srgbClr val="C9871F"/>
+              </a:solidFill>
+              <a:ln w="9525" cap="flat">
+                <a:solidFill>
+                  <a:srgbClr val="C9871F"/>
+                </a:solidFill>
+                <a:prstDash val="solid"/>
+                <a:round/>
+              </a:ln>
+              <a:effectLst/>
+            </c:spPr>
+          </c:marker>
+          <c:cat>
+            <c:multiLvlStrRef>
+              <c:f>Sheet1!$A$2:$A$7</c:f>
+              <c:multiLvlStrCache>
+                <c:ptCount val="6"/>
+                <c:lvl>
+                  <c:pt idx="0">
+                    <c:v>2020</c:v>
+                  </c:pt>
+                  <c:pt idx="1">
+                    <c:v>2032</c:v>
+                  </c:pt>
+                  <c:pt idx="2">
+                    <c:v>2043</c:v>
+                  </c:pt>
+                  <c:pt idx="3">
+                    <c:v>2050</c:v>
+                  </c:pt>
+                  <c:pt idx="4">
+                    <c:v>2062</c:v>
+                  </c:pt>
+                  <c:pt idx="5">
+                    <c:v>2070</c:v>
+                  </c:pt>
+                </c:lvl>
+              </c:multiLvlStrCache>
+            </c:multiLvlStrRef>
+          </c:cat>
+          <c:val>
+            <c:numRef>
+              <c:f>Sheet1!$B$2:$B$7</c:f>
+              <c:numCache>
+                <c:formatCode>General</c:formatCode>
+                <c:ptCount val="6"/>
+                <c:pt idx="0">
+                  <c:v>7509</c:v>
+                </c:pt>
+                <c:pt idx="1">
+                  <c:v>7000</c:v>
+                </c:pt>
+                <c:pt idx="2">
+                  <c:v>6000</c:v>
+                </c:pt>
+                <c:pt idx="3">
+                  <c:v>5540</c:v>
+                </c:pt>
+                <c:pt idx="4">
+                  <c:v>5000</c:v>
+                </c:pt>
+                <c:pt idx="5">
+                  <c:v>4535</c:v>
+                </c:pt>
+              </c:numCache>
+            </c:numRef>
+          </c:val>
+          <c:smooth val="0"/>
+        </c:ser>
+        <c:dLbls>
+          <c:numFmt formatCode="#,##0" sourceLinked="0"/>
+          <c:txPr>
+            <a:bodyPr/>
+            <a:lstStyle/>
+            <a:p>
+              <a:pPr>
+                <a:defRPr b="0" i="0" strike="noStrike" sz="900" u="none">
+                  <a:solidFill>
+                    <a:srgbClr val="C9871F"/>
+                  </a:solidFill>
+                  <a:latin typeface="Calibri"/>
+                </a:defRPr>
+              </a:pPr>
+            </a:p>
+          </c:txPr>
+          <c:dLblPos val="t"/>
+          <c:showLegendKey val="0"/>
+          <c:showVal val="1"/>
+          <c:showCatName val="0"/>
+          <c:showSerName val="0"/>
+          <c:showPercent val="0"/>
+          <c:showBubbleSize val="0"/>
+          <c:showLeaderLines val="0"/>
+        </c:dLbls>
+        <c:marker val="1"/>
+        <c:axId val="2094734554"/>
+        <c:axId val="2094734552"/>
+        <c:axId val="2094734556"/>
+      </c:lineChart>
+      <c:catAx>
+        <c:axId val="2094734554"/>
+        <c:scaling>
+          <c:orientation val="minMax"/>
+        </c:scaling>
+        <c:delete val="0"/>
+        <c:axPos val="b"/>
+        <c:numFmt formatCode="General" sourceLinked="1"/>
+        <c:majorTickMark val="out"/>
+        <c:minorTickMark val="none"/>
+        <c:tickLblPos val="low"/>
+        <c:spPr>
+          <a:ln w="12700" cap="flat">
+            <a:solidFill>
+              <a:srgbClr val="888888"/>
+            </a:solidFill>
+            <a:prstDash val="solid"/>
+            <a:round/>
+          </a:ln>
+        </c:spPr>
+        <c:txPr>
+          <a:bodyPr/>
+          <a:lstStyle/>
+          <a:p>
+            <a:pPr>
+              <a:defRPr sz="1000" b="0" i="0" u="none" strike="noStrike">
+                <a:solidFill>
+                  <a:srgbClr val="1B2430"/>
+                </a:solidFill>
+                <a:latin typeface="Calibri"/>
+              </a:defRPr>
+            </a:pPr>
+            <a:endParaRPr lang="en-US"/>
+          </a:p>
+        </c:txPr>
+        <c:crossAx val="2094734552"/>
+        <c:crosses val="autoZero"/>
+        <c:auto val="1"/>
+        <c:lblAlgn val="ctr"/>
+        <c:noMultiLvlLbl val="1"/>
+      </c:catAx>
+      <c:valAx>
+        <c:axId val="2094734552"/>
+        <c:scaling>
+          <c:orientation val="minMax"/>
+          <c:max val="8000"/>
+          <c:min val="4000"/>
+        </c:scaling>
+        <c:delete val="0"/>
+        <c:axPos val="l"/>
+        <c:majorGridlines>
+          <c:spPr>
+            <a:ln w="12700" cap="flat">
+              <a:solidFill>
+                <a:srgbClr val="DCE3EC"/>
+              </a:solidFill>
+              <a:prstDash val="solid"/>
+              <a:round/>
+            </a:ln>
+          </c:spPr>
+        </c:majorGridlines>
+        <c:numFmt formatCode="General" sourceLinked="0"/>
+        <c:majorTickMark val="out"/>
+        <c:minorTickMark val="none"/>
+        <c:tickLblPos val="nextTo"/>
+        <c:spPr>
+          <a:ln w="12700" cap="flat">
+            <a:solidFill>
+              <a:srgbClr val="888888"/>
+            </a:solidFill>
+            <a:prstDash val="solid"/>
+            <a:round/>
+          </a:ln>
+        </c:spPr>
+        <c:txPr>
+          <a:bodyPr/>
+          <a:lstStyle/>
+          <a:p>
+            <a:pPr>
+              <a:defRPr sz="900" b="0" i="0" u="none" strike="noStrike">
+                <a:solidFill>
+                  <a:srgbClr val="3D4756"/>
+                </a:solidFill>
+                <a:latin typeface="Arial"/>
+              </a:defRPr>
+            </a:pPr>
+            <a:endParaRPr lang="en-US"/>
+          </a:p>
+        </c:txPr>
+        <c:crossAx val="2094734554"/>
+        <c:crosses val="autoZero"/>
+        <c:crossBetween val="between"/>
+      </c:valAx>
+      <c:spPr>
+        <a:noFill/>
+        <a:ln>
+          <a:noFill/>
+        </a:ln>
+        <a:effectLst/>
+      </c:spPr>
+    </c:plotArea>
+    <c:plotVisOnly val="1"/>
+    <c:dispBlanksAs val="span"/>
+  </c:chart>
+  <c:spPr>
+    <a:noFill/>
+    <a:ln>
+      <a:noFill/>
+    </a:ln>
+    <a:effectLst/>
+  </c:spPr>
+  <c:externalData r:id="rId1">
+    <c:autoUpdate val="0"/>
+  </c:externalData>
+</c:chartSpace>
 </file>
 
 <file path=ppt/notesMasters/notesMaster1.xml><?xml version="1.0" encoding="utf-8"?>
@@ -890,6 +2019,94 @@
             <a:fld id="{F7021451-1387-4CA6-816F-3879F97B5CBC}" type="slidenum">
               <a:rPr lang="en-US"/>
               <a:t>13</a:t>
+            </a:fld>
+            <a:endParaRPr lang="en-US"/>
+          </a:p>
+        </p:txBody>
+      </p:sp>
+    </p:spTree>
+    <p:extLst>
+      <p:ext uri="{BB962C8B-B14F-4D97-AF65-F5344CB8AC3E}">
+        <p14:creationId xmlns:p14="http://schemas.microsoft.com/office/powerpoint/2010/main" val="1024086991"/>
+      </p:ext>
+    </p:extLst>
+  </p:cSld>
+  <p:clrMapOvr>
+    <a:masterClrMapping/>
+  </p:clrMapOvr>
+</p:notes>
+</file>
+
+<file path=ppt/notesSlides/notesSlide14.xml><?xml version="1.0" encoding="utf-8"?>
+<p:notes xmlns:a="http://schemas.openxmlformats.org/drawingml/2006/main" xmlns:r="http://schemas.openxmlformats.org/officeDocument/2006/relationships" xmlns:p="http://schemas.openxmlformats.org/presentationml/2006/main">
+  <p:cSld>
+    <p:spTree>
+      <p:nvGrpSpPr>
+        <p:cNvPr id="1" name=""/>
+        <p:cNvGrpSpPr/>
+        <p:nvPr/>
+      </p:nvGrpSpPr>
+      <p:grpSpPr>
+        <a:xfrm>
+          <a:off x="0" y="0"/>
+          <a:ext cx="0" cy="0"/>
+          <a:chOff x="0" y="0"/>
+          <a:chExt cx="0" cy="0"/>
+        </a:xfrm>
+      </p:grpSpPr>
+      <p:sp>
+        <p:nvSpPr>
+          <p:cNvPr id="2" name="Slide Image Placeholder 1"/>
+          <p:cNvSpPr>
+            <a:spLocks noGrp="1" noRot="1" noChangeAspect="1"/>
+          </p:cNvSpPr>
+          <p:nvPr>
+            <p:ph type="sldImg"/>
+          </p:nvPr>
+        </p:nvSpPr>
+        <p:spPr/>
+      </p:sp>
+      <p:sp>
+        <p:nvSpPr>
+          <p:cNvPr id="3" name="Notes Placeholder 2"/>
+          <p:cNvSpPr>
+            <a:spLocks noGrp="1"/>
+          </p:cNvSpPr>
+          <p:nvPr>
+            <p:ph type="body" idx="1"/>
+          </p:nvPr>
+        </p:nvSpPr>
+        <p:spPr/>
+        <p:txBody>
+          <a:bodyPr/>
+          <a:lstStyle/>
+          <a:p>
+            <a:r>
+              <a:rPr lang="en-US" dirty="0"/>
+              <a:t/>
+            </a:r>
+            <a:endParaRPr lang="en-US" dirty="0"/>
+          </a:p>
+        </p:txBody>
+      </p:sp>
+      <p:sp>
+        <p:nvSpPr>
+          <p:cNvPr id="4" name="Slide Number Placeholder 3"/>
+          <p:cNvSpPr>
+            <a:spLocks noGrp="1"/>
+          </p:cNvSpPr>
+          <p:nvPr>
+            <p:ph type="sldNum" sz="quarter" idx="10"/>
+          </p:nvPr>
+        </p:nvSpPr>
+        <p:spPr/>
+        <p:txBody>
+          <a:bodyPr/>
+          <a:lstStyle/>
+          <a:p>
+            <a:fld id="{F7021451-1387-4CA6-816F-3879F97B5CBC}" type="slidenum">
+              <a:rPr lang="en-US"/>
+              <a:t>14</a:t>
             </a:fld>
             <a:endParaRPr lang="en-US"/>
           </a:p>
@@ -2190,7 +3407,7 @@
                 <a:ea typeface="Calibri" pitchFamily="34" charset="-122"/>
                 <a:cs typeface="Calibri" pitchFamily="34" charset="-120"/>
               </a:rPr>
-              <a:t>本資料の数字はすべて出典付き（末尾一覧）。社内実績データは差し込み欄あり。</a:t>
+              <a:t>本資料の数字はすべて出典付き（末尾一覧）。社内数値は2026年7月時点の実績・公表値。</a:t>
             </a:r>
             <a:endParaRPr lang="en-US" sz="1100" dirty="0"/>
           </a:p>
@@ -2320,7 +3537,7 @@
                 <a:ea typeface="Calibri" pitchFamily="34" charset="-122"/>
                 <a:cs typeface="Calibri" pitchFamily="34" charset="-120"/>
               </a:rPr>
-              <a:t>YOUR GAIN ／ あなたが得るもの</a:t>
+              <a:t>OUR WAY ／ AIは敵ではなく武器</a:t>
             </a:r>
             <a:endParaRPr lang="en-US" sz="1250" dirty="0"/>
           </a:p>
@@ -2359,7 +3576,7 @@
                 <a:ea typeface="Cambria" pitchFamily="34" charset="-122"/>
                 <a:cs typeface="Cambria" pitchFamily="34" charset="-120"/>
               </a:rPr>
-              <a:t>AI時代に価値が上がる力を、稼ぎながら身につける</a:t>
+              <a:t>AIが“雑務”を巻き取り、人は「商談」に集中する</a:t>
             </a:r>
             <a:endParaRPr lang="en-US" sz="2800" dirty="0"/>
           </a:p>
@@ -2367,18 +3584,177 @@
       </p:sp>
       <p:sp>
         <p:nvSpPr>
-          <p:cNvPr id="6" name="Shape 4"/>
-          <p:cNvSpPr/>
-          <p:nvPr/>
-        </p:nvSpPr>
-        <p:spPr>
-          <a:xfrm>
-            <a:off x="566928" y="1600200"/>
-            <a:ext cx="5440680" cy="1965960"/>
+          <p:cNvPr id="6" name="Text 4"/>
+          <p:cNvSpPr/>
+          <p:nvPr/>
+        </p:nvSpPr>
+        <p:spPr>
+          <a:xfrm>
+            <a:off x="566928" y="1554480"/>
+            <a:ext cx="10972800" cy="365760"/>
+          </a:xfrm>
+          <a:prstGeom prst="rect">
+            <a:avLst/>
+          </a:prstGeom>
+          <a:noFill/>
+          <a:ln/>
+        </p:spPr>
+        <p:txBody>
+          <a:bodyPr wrap="square" lIns="0" tIns="0" rIns="0" bIns="0" rtlCol="0" anchor="ctr"/>
+          <a:lstStyle/>
+          <a:p>
+            <a:pPr indent="0" marL="0">
+              <a:buNone/>
+            </a:pPr>
+            <a:r>
+              <a:rPr lang="en-US" sz="1500" b="1" dirty="0">
+                <a:solidFill>
+                  <a:srgbClr val="1B2430"/>
+                </a:solidFill>
+                <a:latin typeface="Calibri" pitchFamily="34" charset="0"/>
+                <a:ea typeface="Calibri" pitchFamily="34" charset="-122"/>
+                <a:cs typeface="Calibri" pitchFamily="34" charset="-120"/>
+              </a:rPr>
+              <a:t>営業担当者が実際に「売る」ことに使えている時間</a:t>
+            </a:r>
+            <a:endParaRPr lang="en-US" sz="1500" dirty="0"/>
+          </a:p>
+        </p:txBody>
+      </p:sp>
+      <p:sp>
+        <p:nvSpPr>
+          <p:cNvPr id="7" name="Shape 5"/>
+          <p:cNvSpPr/>
+          <p:nvPr/>
+        </p:nvSpPr>
+        <p:spPr>
+          <a:xfrm>
+            <a:off x="566928" y="2057400"/>
+            <a:ext cx="11064240" cy="868680"/>
           </a:xfrm>
           <a:prstGeom prst="roundRect">
             <a:avLst>
-              <a:gd name="adj" fmla="val 4186"/>
+              <a:gd name="adj" fmla="val 6316"/>
+            </a:avLst>
+          </a:prstGeom>
+          <a:solidFill>
+            <a:srgbClr val="DCE3EC"/>
+          </a:solidFill>
+          <a:ln/>
+        </p:spPr>
+      </p:sp>
+      <p:sp>
+        <p:nvSpPr>
+          <p:cNvPr id="8" name="Shape 6"/>
+          <p:cNvSpPr/>
+          <p:nvPr/>
+        </p:nvSpPr>
+        <p:spPr>
+          <a:xfrm>
+            <a:off x="566928" y="2057400"/>
+            <a:ext cx="4425696" cy="868680"/>
+          </a:xfrm>
+          <a:prstGeom prst="rect">
+            <a:avLst/>
+          </a:prstGeom>
+          <a:solidFill>
+            <a:srgbClr val="1C7293"/>
+          </a:solidFill>
+          <a:ln/>
+        </p:spPr>
+      </p:sp>
+      <p:sp>
+        <p:nvSpPr>
+          <p:cNvPr id="9" name="Text 7"/>
+          <p:cNvSpPr/>
+          <p:nvPr/>
+        </p:nvSpPr>
+        <p:spPr>
+          <a:xfrm>
+            <a:off x="749808" y="2057400"/>
+            <a:ext cx="4151376" cy="868680"/>
+          </a:xfrm>
+          <a:prstGeom prst="rect">
+            <a:avLst/>
+          </a:prstGeom>
+          <a:noFill/>
+          <a:ln/>
+        </p:spPr>
+        <p:txBody>
+          <a:bodyPr wrap="square" lIns="0" tIns="0" rIns="0" bIns="0" rtlCol="0" anchor="ctr"/>
+          <a:lstStyle/>
+          <a:p>
+            <a:pPr indent="0" marL="0">
+              <a:buNone/>
+            </a:pPr>
+            <a:r>
+              <a:rPr lang="en-US" sz="1500" b="1" dirty="0">
+                <a:solidFill>
+                  <a:srgbClr val="FFFFFF"/>
+                </a:solidFill>
+                <a:latin typeface="Calibri" pitchFamily="34" charset="0"/>
+                <a:ea typeface="Calibri" pitchFamily="34" charset="-122"/>
+                <a:cs typeface="Calibri" pitchFamily="34" charset="-120"/>
+              </a:rPr>
+              <a:t>売る時間 40%</a:t>
+            </a:r>
+            <a:endParaRPr lang="en-US" sz="1500" dirty="0"/>
+          </a:p>
+        </p:txBody>
+      </p:sp>
+      <p:sp>
+        <p:nvSpPr>
+          <p:cNvPr id="10" name="Text 8"/>
+          <p:cNvSpPr/>
+          <p:nvPr/>
+        </p:nvSpPr>
+        <p:spPr>
+          <a:xfrm>
+            <a:off x="5221224" y="2057400"/>
+            <a:ext cx="6272784" cy="868680"/>
+          </a:xfrm>
+          <a:prstGeom prst="rect">
+            <a:avLst/>
+          </a:prstGeom>
+          <a:noFill/>
+          <a:ln/>
+        </p:spPr>
+        <p:txBody>
+          <a:bodyPr wrap="square" lIns="0" tIns="0" rIns="0" bIns="0" rtlCol="0" anchor="ctr"/>
+          <a:lstStyle/>
+          <a:p>
+            <a:pPr indent="0" marL="0">
+              <a:buNone/>
+            </a:pPr>
+            <a:r>
+              <a:rPr lang="en-US" sz="1400" b="1" dirty="0">
+                <a:solidFill>
+                  <a:srgbClr val="3D4756"/>
+                </a:solidFill>
+                <a:latin typeface="Calibri" pitchFamily="34" charset="0"/>
+                <a:ea typeface="Calibri" pitchFamily="34" charset="-122"/>
+                <a:cs typeface="Calibri" pitchFamily="34" charset="-120"/>
+              </a:rPr>
+              <a:t>残り 60% ＝ 事務・データ入力・社内会議など“非営業業務”</a:t>
+            </a:r>
+            <a:endParaRPr lang="en-US" sz="1400" dirty="0"/>
+          </a:p>
+        </p:txBody>
+      </p:sp>
+      <p:sp>
+        <p:nvSpPr>
+          <p:cNvPr id="11" name="Shape 9"/>
+          <p:cNvSpPr/>
+          <p:nvPr/>
+        </p:nvSpPr>
+        <p:spPr>
+          <a:xfrm>
+            <a:off x="566928" y="3429000"/>
+            <a:ext cx="3566160" cy="1371600"/>
+          </a:xfrm>
+          <a:prstGeom prst="roundRect">
+            <a:avLst>
+              <a:gd name="adj" fmla="val 6000"/>
             </a:avLst>
           </a:prstGeom>
           <a:solidFill>
@@ -2396,14 +3772,14 @@
       </p:sp>
       <p:sp>
         <p:nvSpPr>
-          <p:cNvPr id="7" name="Text 5"/>
-          <p:cNvSpPr/>
-          <p:nvPr/>
-        </p:nvSpPr>
-        <p:spPr>
-          <a:xfrm>
-            <a:off x="886968" y="1828800"/>
-            <a:ext cx="4800600" cy="365760"/>
+          <p:cNvPr id="12" name="Text 10"/>
+          <p:cNvSpPr/>
+          <p:nvPr/>
+        </p:nvSpPr>
+        <p:spPr>
+          <a:xfrm>
+            <a:off x="841248" y="3611880"/>
+            <a:ext cx="3017520" cy="502920"/>
           </a:xfrm>
           <a:prstGeom prst="rect">
             <a:avLst/>
@@ -2419,97 +3795,30 @@
               <a:buNone/>
             </a:pPr>
             <a:r>
-              <a:rPr lang="en-US" sz="1500" b="1" dirty="0">
+              <a:rPr lang="en-US" sz="3000" b="1" dirty="0">
                 <a:solidFill>
                   <a:srgbClr val="1C7293"/>
-                </a:solidFill>
-                <a:latin typeface="Calibri" pitchFamily="34" charset="0"/>
-                <a:ea typeface="Calibri" pitchFamily="34" charset="-122"/>
-                <a:cs typeface="Calibri" pitchFamily="34" charset="-120"/>
-              </a:rPr>
-              <a:t>報酬：若いうちから、正当に稼げる</a:t>
-            </a:r>
-            <a:endParaRPr lang="en-US" sz="1500" dirty="0"/>
-          </a:p>
-        </p:txBody>
-      </p:sp>
-      <p:sp>
-        <p:nvSpPr>
-          <p:cNvPr id="8" name="Text 6"/>
-          <p:cNvSpPr/>
-          <p:nvPr/>
-        </p:nvSpPr>
-        <p:spPr>
-          <a:xfrm>
-            <a:off x="886968" y="2286000"/>
-            <a:ext cx="4800600" cy="502920"/>
-          </a:xfrm>
-          <a:prstGeom prst="rect">
-            <a:avLst/>
-          </a:prstGeom>
-          <a:noFill/>
-          <a:ln/>
-        </p:spPr>
-        <p:txBody>
-          <a:bodyPr wrap="square" lIns="0" tIns="0" rIns="0" bIns="0" rtlCol="0" anchor="ctr"/>
-          <a:lstStyle/>
-          <a:p>
-            <a:pPr indent="0" marL="0">
-              <a:buNone/>
-            </a:pPr>
-            <a:r>
-              <a:rPr lang="en-US" sz="2600" b="1" dirty="0">
-                <a:solidFill>
-                  <a:srgbClr val="1B2430"/>
                 </a:solidFill>
                 <a:latin typeface="Cambria" pitchFamily="34" charset="0"/>
                 <a:ea typeface="Cambria" pitchFamily="34" charset="-122"/>
                 <a:cs typeface="Cambria" pitchFamily="34" charset="-120"/>
               </a:rPr>
-              <a:t>20代で年収 </a:t>
-            </a:r>
-            <a:pPr indent="0" marL="0">
-              <a:buNone/>
-            </a:pPr>
-            <a:r>
-              <a:rPr lang="en-US" sz="2600" b="1" dirty="0">
-                <a:solidFill>
-                  <a:srgbClr val="C9871F"/>
-                </a:solidFill>
-                <a:latin typeface="Cambria" pitchFamily="34" charset="0"/>
-                <a:ea typeface="Cambria" pitchFamily="34" charset="-122"/>
-                <a:cs typeface="Cambria" pitchFamily="34" charset="-120"/>
-              </a:rPr>
-              <a:t>1,000万円</a:t>
-            </a:r>
-            <a:pPr indent="0" marL="0">
-              <a:buNone/>
-            </a:pPr>
-            <a:r>
-              <a:rPr lang="en-US" sz="2600" b="1" dirty="0">
-                <a:solidFill>
-                  <a:srgbClr val="1B2430"/>
-                </a:solidFill>
-                <a:latin typeface="Cambria" pitchFamily="34" charset="0"/>
-                <a:ea typeface="Cambria" pitchFamily="34" charset="-122"/>
-                <a:cs typeface="Cambria" pitchFamily="34" charset="-120"/>
-              </a:rPr>
-              <a:t> の実例</a:t>
-            </a:r>
-            <a:endParaRPr lang="en-US" sz="2600" dirty="0"/>
-          </a:p>
-        </p:txBody>
-      </p:sp>
-      <p:sp>
-        <p:nvSpPr>
-          <p:cNvPr id="9" name="Text 7"/>
-          <p:cNvSpPr/>
-          <p:nvPr/>
-        </p:nvSpPr>
-        <p:spPr>
-          <a:xfrm>
-            <a:off x="886968" y="2880360"/>
-            <a:ext cx="4800600" cy="594360"/>
+              <a:t>-34% / -36%</a:t>
+            </a:r>
+            <a:endParaRPr lang="en-US" sz="3000" dirty="0"/>
+          </a:p>
+        </p:txBody>
+      </p:sp>
+      <p:sp>
+        <p:nvSpPr>
+          <p:cNvPr id="13" name="Text 11"/>
+          <p:cNvSpPr/>
+          <p:nvPr/>
+        </p:nvSpPr>
+        <p:spPr>
+          <a:xfrm>
+            <a:off x="841248" y="4142232"/>
+            <a:ext cx="3017520" cy="594360"/>
           </a:xfrm>
           <a:prstGeom prst="rect">
             <a:avLst/>
@@ -2523,12 +3832,12 @@
           <a:p>
             <a:pPr indent="0" marL="0">
               <a:lnSpc>
-                <a:spcPts val="1700"/>
+                <a:spcPts val="1500"/>
               </a:lnSpc>
               <a:buNone/>
             </a:pPr>
             <a:r>
-              <a:rPr lang="en-US" sz="1250" dirty="0">
+              <a:rPr lang="en-US" sz="1150" dirty="0">
                 <a:solidFill>
                   <a:srgbClr val="3D4756"/>
                 </a:solidFill>
@@ -2536,30 +3845,30 @@
                 <a:ea typeface="Calibri" pitchFamily="34" charset="-122"/>
                 <a:cs typeface="Calibri" pitchFamily="34" charset="-120"/>
               </a:rPr>
-              <a:t>営業メンバー平均年収 750万円以上。【差し込み：年次・年齢別の給与実例（平均とトップを明示区分）】</a:t>
-            </a:r>
-            <a:endParaRPr lang="en-US" sz="1250" dirty="0"/>
-          </a:p>
-        </p:txBody>
-      </p:sp>
-      <p:sp>
-        <p:nvSpPr>
-          <p:cNvPr id="10" name="Shape 8"/>
-          <p:cNvSpPr/>
-          <p:nvPr/>
-        </p:nvSpPr>
-        <p:spPr>
-          <a:xfrm>
-            <a:off x="6190488" y="1600200"/>
-            <a:ext cx="5440680" cy="1965960"/>
+              <a:t>AIで見込み客リサーチ・メール作成の時間を削減できると営業が期待</a:t>
+            </a:r>
+            <a:endParaRPr lang="en-US" sz="1150" dirty="0"/>
+          </a:p>
+        </p:txBody>
+      </p:sp>
+      <p:sp>
+        <p:nvSpPr>
+          <p:cNvPr id="14" name="Shape 12"/>
+          <p:cNvSpPr/>
+          <p:nvPr/>
+        </p:nvSpPr>
+        <p:spPr>
+          <a:xfrm>
+            <a:off x="4315968" y="3429000"/>
+            <a:ext cx="3566160" cy="1371600"/>
           </a:xfrm>
           <a:prstGeom prst="roundRect">
             <a:avLst>
-              <a:gd name="adj" fmla="val 4186"/>
+              <a:gd name="adj" fmla="val 6000"/>
             </a:avLst>
           </a:prstGeom>
           <a:solidFill>
-            <a:srgbClr val="FBEFD9"/>
+            <a:srgbClr val="FFFFFF"/>
           </a:solidFill>
           <a:ln/>
           <a:effectLst>
@@ -2573,14 +3882,14 @@
       </p:sp>
       <p:sp>
         <p:nvSpPr>
-          <p:cNvPr id="11" name="Text 9"/>
-          <p:cNvSpPr/>
-          <p:nvPr/>
-        </p:nvSpPr>
-        <p:spPr>
-          <a:xfrm>
-            <a:off x="6510528" y="1828800"/>
-            <a:ext cx="4800600" cy="365760"/>
+          <p:cNvPr id="15" name="Text 13"/>
+          <p:cNvSpPr/>
+          <p:nvPr/>
+        </p:nvSpPr>
+        <p:spPr>
+          <a:xfrm>
+            <a:off x="4590288" y="3611880"/>
+            <a:ext cx="3017520" cy="502920"/>
           </a:xfrm>
           <a:prstGeom prst="rect">
             <a:avLst/>
@@ -2596,83 +3905,30 @@
               <a:buNone/>
             </a:pPr>
             <a:r>
-              <a:rPr lang="en-US" sz="1500" b="1" dirty="0">
+              <a:rPr lang="en-US" sz="3000" b="1" dirty="0">
                 <a:solidFill>
                   <a:srgbClr val="C9871F"/>
-                </a:solidFill>
-                <a:latin typeface="Calibri" pitchFamily="34" charset="0"/>
-                <a:ea typeface="Calibri" pitchFamily="34" charset="-122"/>
-                <a:cs typeface="Calibri" pitchFamily="34" charset="-120"/>
-              </a:rPr>
-              <a:t>成長：ゼロから、体系的に</a:t>
-            </a:r>
-            <a:endParaRPr lang="en-US" sz="1500" dirty="0"/>
-          </a:p>
-        </p:txBody>
-      </p:sp>
-      <p:sp>
-        <p:nvSpPr>
-          <p:cNvPr id="12" name="Text 10"/>
-          <p:cNvSpPr/>
-          <p:nvPr/>
-        </p:nvSpPr>
-        <p:spPr>
-          <a:xfrm>
-            <a:off x="6510528" y="2286000"/>
-            <a:ext cx="4800600" cy="502920"/>
-          </a:xfrm>
-          <a:prstGeom prst="rect">
-            <a:avLst/>
-          </a:prstGeom>
-          <a:noFill/>
-          <a:ln/>
-        </p:spPr>
-        <p:txBody>
-          <a:bodyPr wrap="square" lIns="0" tIns="0" rIns="0" bIns="0" rtlCol="0" anchor="ctr"/>
-          <a:lstStyle/>
-          <a:p>
-            <a:pPr indent="0" marL="0">
-              <a:buNone/>
-            </a:pPr>
-            <a:r>
-              <a:rPr lang="en-US" sz="2600" b="1" dirty="0">
-                <a:solidFill>
-                  <a:srgbClr val="1B2430"/>
                 </a:solidFill>
                 <a:latin typeface="Cambria" pitchFamily="34" charset="0"/>
                 <a:ea typeface="Cambria" pitchFamily="34" charset="-122"/>
                 <a:cs typeface="Cambria" pitchFamily="34" charset="-120"/>
               </a:rPr>
-              <a:t>未経験入社 </a:t>
-            </a:r>
-            <a:pPr indent="0" marL="0">
-              <a:buNone/>
-            </a:pPr>
-            <a:r>
-              <a:rPr lang="en-US" sz="2600" b="1" dirty="0">
-                <a:solidFill>
-                  <a:srgbClr val="2E7D57"/>
-                </a:solidFill>
-                <a:latin typeface="Cambria" pitchFamily="34" charset="0"/>
-                <a:ea typeface="Cambria" pitchFamily="34" charset="-122"/>
-                <a:cs typeface="Cambria" pitchFamily="34" charset="-120"/>
-              </a:rPr>
-              <a:t>90%</a:t>
-            </a:r>
-            <a:endParaRPr lang="en-US" sz="2600" dirty="0"/>
-          </a:p>
-        </p:txBody>
-      </p:sp>
-      <p:sp>
-        <p:nvSpPr>
-          <p:cNvPr id="13" name="Text 11"/>
-          <p:cNvSpPr/>
-          <p:nvPr/>
-        </p:nvSpPr>
-        <p:spPr>
-          <a:xfrm>
-            <a:off x="6510528" y="2880360"/>
-            <a:ext cx="4800600" cy="594360"/>
+              <a:t>54%</a:t>
+            </a:r>
+            <a:endParaRPr lang="en-US" sz="3000" dirty="0"/>
+          </a:p>
+        </p:txBody>
+      </p:sp>
+      <p:sp>
+        <p:nvSpPr>
+          <p:cNvPr id="16" name="Text 14"/>
+          <p:cNvSpPr/>
+          <p:nvPr/>
+        </p:nvSpPr>
+        <p:spPr>
+          <a:xfrm>
+            <a:off x="4590288" y="4142232"/>
+            <a:ext cx="3017520" cy="594360"/>
           </a:xfrm>
           <a:prstGeom prst="rect">
             <a:avLst/>
@@ -2686,12 +3942,12 @@
           <a:p>
             <a:pPr indent="0" marL="0">
               <a:lnSpc>
-                <a:spcPts val="1700"/>
+                <a:spcPts val="1500"/>
               </a:lnSpc>
               <a:buNone/>
             </a:pPr>
             <a:r>
-              <a:rPr lang="en-US" sz="1250" dirty="0">
+              <a:rPr lang="en-US" sz="1150" dirty="0">
                 <a:solidFill>
                   <a:srgbClr val="3D4756"/>
                 </a:solidFill>
@@ -2699,30 +3955,30 @@
                 <a:ea typeface="Calibri" pitchFamily="34" charset="-122"/>
                 <a:cs typeface="Calibri" pitchFamily="34" charset="-120"/>
               </a:rPr>
-              <a:t>研修で対人折衝・交渉・信頼構築を基礎から。AI時代に“需要が伸びるスキル”（S.6）を、仕事を通じて毎日鍛えられる環境。</a:t>
-            </a:r>
-            <a:endParaRPr lang="en-US" sz="1250" dirty="0"/>
-          </a:p>
-        </p:txBody>
-      </p:sp>
-      <p:sp>
-        <p:nvSpPr>
-          <p:cNvPr id="14" name="Shape 12"/>
-          <p:cNvSpPr/>
-          <p:nvPr/>
-        </p:nvSpPr>
-        <p:spPr>
-          <a:xfrm>
-            <a:off x="566928" y="3794760"/>
-            <a:ext cx="11064240" cy="1828800"/>
+              <a:t>国内営業が顧客対応に使えている業務時間。「もっと商談に時間を使いたい」が本音</a:t>
+            </a:r>
+            <a:endParaRPr lang="en-US" sz="1150" dirty="0"/>
+          </a:p>
+        </p:txBody>
+      </p:sp>
+      <p:sp>
+        <p:nvSpPr>
+          <p:cNvPr id="17" name="Shape 15"/>
+          <p:cNvSpPr/>
+          <p:nvPr/>
+        </p:nvSpPr>
+        <p:spPr>
+          <a:xfrm>
+            <a:off x="8065008" y="3429000"/>
+            <a:ext cx="3566160" cy="1371600"/>
           </a:xfrm>
           <a:prstGeom prst="roundRect">
             <a:avLst>
-              <a:gd name="adj" fmla="val 4500"/>
+              <a:gd name="adj" fmla="val 6000"/>
             </a:avLst>
           </a:prstGeom>
           <a:solidFill>
-            <a:srgbClr val="1B2A4A"/>
+            <a:srgbClr val="E9F1F4"/>
           </a:solidFill>
           <a:ln/>
           <a:effectLst>
@@ -2736,14 +3992,14 @@
       </p:sp>
       <p:sp>
         <p:nvSpPr>
-          <p:cNvPr id="15" name="Text 13"/>
-          <p:cNvSpPr/>
-          <p:nvPr/>
-        </p:nvSpPr>
-        <p:spPr>
-          <a:xfrm>
-            <a:off x="978408" y="3977640"/>
-            <a:ext cx="10241280" cy="457200"/>
+          <p:cNvPr id="18" name="Text 16"/>
+          <p:cNvSpPr/>
+          <p:nvPr/>
+        </p:nvSpPr>
+        <p:spPr>
+          <a:xfrm>
+            <a:off x="8339328" y="3566160"/>
+            <a:ext cx="3017520" cy="365760"/>
           </a:xfrm>
           <a:prstGeom prst="rect">
             <a:avLst/>
@@ -2759,287 +4015,104 @@
               <a:buNone/>
             </a:pPr>
             <a:r>
-              <a:rPr lang="en-US" sz="1900" b="1" dirty="0">
-                <a:solidFill>
-                  <a:srgbClr val="FFFFFF"/>
+              <a:rPr lang="en-US" sz="1300" b="1" dirty="0">
+                <a:solidFill>
+                  <a:srgbClr val="1C7293"/>
+                </a:solidFill>
+                <a:latin typeface="Calibri" pitchFamily="34" charset="0"/>
+                <a:ea typeface="Calibri" pitchFamily="34" charset="-122"/>
+                <a:cs typeface="Calibri" pitchFamily="34" charset="-120"/>
+              </a:rPr>
+              <a:t>当社の取り組み：営業を“商談に集中”させる</a:t>
+            </a:r>
+            <a:endParaRPr lang="en-US" sz="1300" dirty="0"/>
+          </a:p>
+        </p:txBody>
+      </p:sp>
+      <p:sp>
+        <p:nvSpPr>
+          <p:cNvPr id="19" name="Text 17"/>
+          <p:cNvSpPr/>
+          <p:nvPr/>
+        </p:nvSpPr>
+        <p:spPr>
+          <a:xfrm>
+            <a:off x="8339328" y="3931920"/>
+            <a:ext cx="3017520" cy="822960"/>
+          </a:xfrm>
+          <a:prstGeom prst="rect">
+            <a:avLst/>
+          </a:prstGeom>
+          <a:noFill/>
+          <a:ln/>
+        </p:spPr>
+        <p:txBody>
+          <a:bodyPr wrap="square" lIns="0" tIns="0" rIns="0" bIns="0" rtlCol="0" anchor="t"/>
+          <a:lstStyle/>
+          <a:p>
+            <a:pPr indent="0" marL="0">
+              <a:lnSpc>
+                <a:spcPts val="1400"/>
+              </a:lnSpc>
+              <a:buNone/>
+            </a:pPr>
+            <a:r>
+              <a:rPr lang="en-US" sz="1100" dirty="0">
+                <a:solidFill>
+                  <a:srgbClr val="3D4756"/>
+                </a:solidFill>
+                <a:latin typeface="Calibri" pitchFamily="34" charset="0"/>
+                <a:ea typeface="Calibri" pitchFamily="34" charset="-122"/>
+                <a:cs typeface="Calibri" pitchFamily="34" charset="-120"/>
+              </a:rPr>
+              <a:t>反響の一次対応を専任チーム化（2026年 インサイドセールス職を新設）し、外勤営業は商談・クロージングに集中する分業体制へ。AIツールの活用実例は説明会でご紹介。</a:t>
+            </a:r>
+            <a:endParaRPr lang="en-US" sz="1100" dirty="0"/>
+          </a:p>
+        </p:txBody>
+      </p:sp>
+      <p:sp>
+        <p:nvSpPr>
+          <p:cNvPr id="20" name="Text 18"/>
+          <p:cNvSpPr/>
+          <p:nvPr/>
+        </p:nvSpPr>
+        <p:spPr>
+          <a:xfrm>
+            <a:off x="566928" y="5074920"/>
+            <a:ext cx="11064240" cy="548640"/>
+          </a:xfrm>
+          <a:prstGeom prst="rect">
+            <a:avLst/>
+          </a:prstGeom>
+          <a:noFill/>
+          <a:ln/>
+        </p:spPr>
+        <p:txBody>
+          <a:bodyPr wrap="square" lIns="0" tIns="0" rIns="0" bIns="0" rtlCol="0" anchor="ctr"/>
+          <a:lstStyle/>
+          <a:p>
+            <a:pPr indent="0" marL="0">
+              <a:buNone/>
+            </a:pPr>
+            <a:r>
+              <a:rPr lang="en-US" sz="1600" b="1" i="1" dirty="0">
+                <a:solidFill>
+                  <a:srgbClr val="1B2A4A"/>
                 </a:solidFill>
                 <a:latin typeface="Cambria" pitchFamily="34" charset="0"/>
                 <a:ea typeface="Cambria" pitchFamily="34" charset="-122"/>
                 <a:cs typeface="Cambria" pitchFamily="34" charset="-120"/>
               </a:rPr>
-              <a:t>ここで身につく力は、会社を越えて価値が上がり続ける“個人資産”。</a:t>
-            </a:r>
-            <a:endParaRPr lang="en-US" sz="1900" dirty="0"/>
-          </a:p>
-        </p:txBody>
-      </p:sp>
-      <p:sp>
-        <p:nvSpPr>
-          <p:cNvPr id="16" name="Shape 14"/>
-          <p:cNvSpPr/>
-          <p:nvPr/>
-        </p:nvSpPr>
-        <p:spPr>
-          <a:xfrm>
-            <a:off x="978408" y="4709160"/>
-            <a:ext cx="2514600" cy="566928"/>
-          </a:xfrm>
-          <a:prstGeom prst="roundRect">
-            <a:avLst>
-              <a:gd name="adj" fmla="val 50000"/>
-            </a:avLst>
-          </a:prstGeom>
-          <a:solidFill>
-            <a:srgbClr val="24365E"/>
-          </a:solidFill>
-          <a:ln w="12700">
-            <a:solidFill>
-              <a:srgbClr val="E8A33D"/>
-            </a:solidFill>
-            <a:prstDash val="solid"/>
-          </a:ln>
-        </p:spPr>
-      </p:sp>
-      <p:sp>
-        <p:nvSpPr>
-          <p:cNvPr id="17" name="Text 15"/>
-          <p:cNvSpPr/>
-          <p:nvPr/>
-        </p:nvSpPr>
-        <p:spPr>
-          <a:xfrm>
-            <a:off x="978408" y="4709160"/>
-            <a:ext cx="2514600" cy="566928"/>
-          </a:xfrm>
-          <a:prstGeom prst="rect">
-            <a:avLst/>
-          </a:prstGeom>
-          <a:noFill/>
-          <a:ln/>
-        </p:spPr>
-        <p:txBody>
-          <a:bodyPr wrap="square" lIns="0" tIns="0" rIns="0" bIns="0" rtlCol="0" anchor="ctr"/>
-          <a:lstStyle/>
-          <a:p>
-            <a:pPr algn="ctr" indent="0" marL="0">
-              <a:buNone/>
-            </a:pPr>
-            <a:r>
-              <a:rPr lang="en-US" sz="1300" b="1" dirty="0">
-                <a:solidFill>
-                  <a:srgbClr val="FFFFFF"/>
-                </a:solidFill>
-                <a:latin typeface="Calibri" pitchFamily="34" charset="0"/>
-                <a:ea typeface="Calibri" pitchFamily="34" charset="-122"/>
-                <a:cs typeface="Calibri" pitchFamily="34" charset="-120"/>
-              </a:rPr>
-              <a:t>対人折衝・交渉</a:t>
-            </a:r>
-            <a:endParaRPr lang="en-US" sz="1300" dirty="0"/>
-          </a:p>
-        </p:txBody>
-      </p:sp>
-      <p:sp>
-        <p:nvSpPr>
-          <p:cNvPr id="18" name="Shape 16"/>
-          <p:cNvSpPr/>
-          <p:nvPr/>
-        </p:nvSpPr>
-        <p:spPr>
-          <a:xfrm>
-            <a:off x="3630168" y="4709160"/>
-            <a:ext cx="2514600" cy="566928"/>
-          </a:xfrm>
-          <a:prstGeom prst="roundRect">
-            <a:avLst>
-              <a:gd name="adj" fmla="val 50000"/>
-            </a:avLst>
-          </a:prstGeom>
-          <a:solidFill>
-            <a:srgbClr val="24365E"/>
-          </a:solidFill>
-          <a:ln w="12700">
-            <a:solidFill>
-              <a:srgbClr val="E8A33D"/>
-            </a:solidFill>
-            <a:prstDash val="solid"/>
-          </a:ln>
-        </p:spPr>
-      </p:sp>
-      <p:sp>
-        <p:nvSpPr>
-          <p:cNvPr id="19" name="Text 17"/>
-          <p:cNvSpPr/>
-          <p:nvPr/>
-        </p:nvSpPr>
-        <p:spPr>
-          <a:xfrm>
-            <a:off x="3630168" y="4709160"/>
-            <a:ext cx="2514600" cy="566928"/>
-          </a:xfrm>
-          <a:prstGeom prst="rect">
-            <a:avLst/>
-          </a:prstGeom>
-          <a:noFill/>
-          <a:ln/>
-        </p:spPr>
-        <p:txBody>
-          <a:bodyPr wrap="square" lIns="0" tIns="0" rIns="0" bIns="0" rtlCol="0" anchor="ctr"/>
-          <a:lstStyle/>
-          <a:p>
-            <a:pPr algn="ctr" indent="0" marL="0">
-              <a:buNone/>
-            </a:pPr>
-            <a:r>
-              <a:rPr lang="en-US" sz="1300" b="1" dirty="0">
-                <a:solidFill>
-                  <a:srgbClr val="FFFFFF"/>
-                </a:solidFill>
-                <a:latin typeface="Calibri" pitchFamily="34" charset="0"/>
-                <a:ea typeface="Calibri" pitchFamily="34" charset="-122"/>
-                <a:cs typeface="Calibri" pitchFamily="34" charset="-120"/>
-              </a:rPr>
-              <a:t>課題発見・提案</a:t>
-            </a:r>
-            <a:endParaRPr lang="en-US" sz="1300" dirty="0"/>
-          </a:p>
-        </p:txBody>
-      </p:sp>
-      <p:sp>
-        <p:nvSpPr>
-          <p:cNvPr id="20" name="Shape 18"/>
-          <p:cNvSpPr/>
-          <p:nvPr/>
-        </p:nvSpPr>
-        <p:spPr>
-          <a:xfrm>
-            <a:off x="6281928" y="4709160"/>
-            <a:ext cx="2514600" cy="566928"/>
-          </a:xfrm>
-          <a:prstGeom prst="roundRect">
-            <a:avLst>
-              <a:gd name="adj" fmla="val 50000"/>
-            </a:avLst>
-          </a:prstGeom>
-          <a:solidFill>
-            <a:srgbClr val="24365E"/>
-          </a:solidFill>
-          <a:ln w="12700">
-            <a:solidFill>
-              <a:srgbClr val="E8A33D"/>
-            </a:solidFill>
-            <a:prstDash val="solid"/>
-          </a:ln>
-        </p:spPr>
+              <a:t>AIは営業を“消す”のではなく、営業から“雑務を消す”。空いた時間はすべて、人にしかできない商談と信頼構築へ。</a:t>
+            </a:r>
+            <a:endParaRPr lang="en-US" sz="1600" dirty="0"/>
+          </a:p>
+        </p:txBody>
       </p:sp>
       <p:sp>
         <p:nvSpPr>
           <p:cNvPr id="21" name="Text 19"/>
-          <p:cNvSpPr/>
-          <p:nvPr/>
-        </p:nvSpPr>
-        <p:spPr>
-          <a:xfrm>
-            <a:off x="6281928" y="4709160"/>
-            <a:ext cx="2514600" cy="566928"/>
-          </a:xfrm>
-          <a:prstGeom prst="rect">
-            <a:avLst/>
-          </a:prstGeom>
-          <a:noFill/>
-          <a:ln/>
-        </p:spPr>
-        <p:txBody>
-          <a:bodyPr wrap="square" lIns="0" tIns="0" rIns="0" bIns="0" rtlCol="0" anchor="ctr"/>
-          <a:lstStyle/>
-          <a:p>
-            <a:pPr algn="ctr" indent="0" marL="0">
-              <a:buNone/>
-            </a:pPr>
-            <a:r>
-              <a:rPr lang="en-US" sz="1300" b="1" dirty="0">
-                <a:solidFill>
-                  <a:srgbClr val="FFFFFF"/>
-                </a:solidFill>
-                <a:latin typeface="Calibri" pitchFamily="34" charset="0"/>
-                <a:ea typeface="Calibri" pitchFamily="34" charset="-122"/>
-                <a:cs typeface="Calibri" pitchFamily="34" charset="-120"/>
-              </a:rPr>
-              <a:t>信頼構築</a:t>
-            </a:r>
-            <a:endParaRPr lang="en-US" sz="1300" dirty="0"/>
-          </a:p>
-        </p:txBody>
-      </p:sp>
-      <p:sp>
-        <p:nvSpPr>
-          <p:cNvPr id="22" name="Shape 20"/>
-          <p:cNvSpPr/>
-          <p:nvPr/>
-        </p:nvSpPr>
-        <p:spPr>
-          <a:xfrm>
-            <a:off x="8933688" y="4709160"/>
-            <a:ext cx="2514600" cy="566928"/>
-          </a:xfrm>
-          <a:prstGeom prst="roundRect">
-            <a:avLst>
-              <a:gd name="adj" fmla="val 50000"/>
-            </a:avLst>
-          </a:prstGeom>
-          <a:solidFill>
-            <a:srgbClr val="24365E"/>
-          </a:solidFill>
-          <a:ln w="12700">
-            <a:solidFill>
-              <a:srgbClr val="E8A33D"/>
-            </a:solidFill>
-            <a:prstDash val="solid"/>
-          </a:ln>
-        </p:spPr>
-      </p:sp>
-      <p:sp>
-        <p:nvSpPr>
-          <p:cNvPr id="23" name="Text 21"/>
-          <p:cNvSpPr/>
-          <p:nvPr/>
-        </p:nvSpPr>
-        <p:spPr>
-          <a:xfrm>
-            <a:off x="8933688" y="4709160"/>
-            <a:ext cx="2514600" cy="566928"/>
-          </a:xfrm>
-          <a:prstGeom prst="rect">
-            <a:avLst/>
-          </a:prstGeom>
-          <a:noFill/>
-          <a:ln/>
-        </p:spPr>
-        <p:txBody>
-          <a:bodyPr wrap="square" lIns="0" tIns="0" rIns="0" bIns="0" rtlCol="0" anchor="ctr"/>
-          <a:lstStyle/>
-          <a:p>
-            <a:pPr algn="ctr" indent="0" marL="0">
-              <a:buNone/>
-            </a:pPr>
-            <a:r>
-              <a:rPr lang="en-US" sz="1300" b="1" dirty="0">
-                <a:solidFill>
-                  <a:srgbClr val="FFFFFF"/>
-                </a:solidFill>
-                <a:latin typeface="Calibri" pitchFamily="34" charset="0"/>
-                <a:ea typeface="Calibri" pitchFamily="34" charset="-122"/>
-                <a:cs typeface="Calibri" pitchFamily="34" charset="-120"/>
-              </a:rPr>
-              <a:t>レジリエンス</a:t>
-            </a:r>
-            <a:endParaRPr lang="en-US" sz="1300" dirty="0"/>
-          </a:p>
-        </p:txBody>
-      </p:sp>
-      <p:sp>
-        <p:nvSpPr>
-          <p:cNvPr id="24" name="Text 22"/>
           <p:cNvSpPr/>
           <p:nvPr/>
         </p:nvSpPr>
@@ -3070,7 +4143,7 @@
                 <a:ea typeface="Calibri" pitchFamily="34" charset="-122"/>
                 <a:cs typeface="Calibri" pitchFamily="34" charset="-120"/>
               </a:rPr>
-              <a:t>※給与実績は既存採用媒体の公表値。平均とトップ層を明確に区分して提示すること。</a:t>
+              <a:t>出典：Salesforce「State of Sales」第7版(2026) ／ HubSpot「日本の営業実態調査」2024 ／ 社内：第21期営業人員計画。</a:t>
             </a:r>
             <a:endParaRPr lang="en-US" sz="850" dirty="0"/>
           </a:p>
@@ -3078,7 +4151,7 @@
       </p:sp>
       <p:sp>
         <p:nvSpPr>
-          <p:cNvPr id="25" name="Text 23"/>
+          <p:cNvPr id="22" name="Text 20"/>
           <p:cNvSpPr/>
           <p:nvPr/>
         </p:nvSpPr>
@@ -3239,7 +4312,7 @@
                 <a:ea typeface="Calibri" pitchFamily="34" charset="-122"/>
                 <a:cs typeface="Calibri" pitchFamily="34" charset="-120"/>
               </a:rPr>
-              <a:t>TRUST ／ 正直であること</a:t>
+              <a:t>YOUR GAIN ／ あなたが得るもの</a:t>
             </a:r>
             <a:endParaRPr lang="en-US" sz="1250" dirty="0"/>
           </a:p>
@@ -3278,7 +4351,7 @@
                 <a:ea typeface="Cambria" pitchFamily="34" charset="-122"/>
                 <a:cs typeface="Cambria" pitchFamily="34" charset="-120"/>
               </a:rPr>
-              <a:t>第三者評価と、きつい部分の“正直な開示”</a:t>
+              <a:t>AI時代に価値が上がる力を、稼ぎながら身につける</a:t>
             </a:r>
             <a:endParaRPr lang="en-US" sz="2800" dirty="0"/>
           </a:p>
@@ -3292,16 +4365,16 @@
         </p:nvSpPr>
         <p:spPr>
           <a:xfrm>
-            <a:off x="566928" y="1645920"/>
-            <a:ext cx="5440680" cy="1828800"/>
+            <a:off x="566928" y="1600200"/>
+            <a:ext cx="5440680" cy="1965960"/>
           </a:xfrm>
           <a:prstGeom prst="roundRect">
             <a:avLst>
-              <a:gd name="adj" fmla="val 4500"/>
+              <a:gd name="adj" fmla="val 4186"/>
             </a:avLst>
           </a:prstGeom>
           <a:solidFill>
-            <a:srgbClr val="E9F1F4"/>
+            <a:srgbClr val="FFFFFF"/>
           </a:solidFill>
           <a:ln/>
           <a:effectLst>
@@ -3321,8 +4394,8 @@
         </p:nvSpPr>
         <p:spPr>
           <a:xfrm>
-            <a:off x="886968" y="1874520"/>
-            <a:ext cx="4754880" cy="365760"/>
+            <a:off x="886968" y="1828800"/>
+            <a:ext cx="4800600" cy="365760"/>
           </a:xfrm>
           <a:prstGeom prst="rect">
             <a:avLst/>
@@ -3338,7 +4411,7 @@
               <a:buNone/>
             </a:pPr>
             <a:r>
-              <a:rPr lang="en-US" sz="1400" b="1" dirty="0">
+              <a:rPr lang="en-US" sz="1500" b="1" dirty="0">
                 <a:solidFill>
                   <a:srgbClr val="1C7293"/>
                 </a:solidFill>
@@ -3346,9 +4419,9 @@
                 <a:ea typeface="Calibri" pitchFamily="34" charset="-122"/>
                 <a:cs typeface="Calibri" pitchFamily="34" charset="-120"/>
               </a:rPr>
-              <a:t>第三者評価</a:t>
-            </a:r>
-            <a:endParaRPr lang="en-US" sz="1400" dirty="0"/>
+              <a:t>報酬：若いうちから、正当に稼げる</a:t>
+            </a:r>
+            <a:endParaRPr lang="en-US" sz="1500" dirty="0"/>
           </a:p>
         </p:txBody>
       </p:sp>
@@ -3361,7 +4434,7 @@
         <p:spPr>
           <a:xfrm>
             <a:off x="886968" y="2286000"/>
-            <a:ext cx="4754880" cy="1005840"/>
+            <a:ext cx="4800600" cy="502920"/>
           </a:xfrm>
           <a:prstGeom prst="rect">
             <a:avLst/>
@@ -3374,13 +4447,10 @@
           <a:lstStyle/>
           <a:p>
             <a:pPr indent="0" marL="0">
-              <a:lnSpc>
-                <a:spcPts val="3000"/>
-              </a:lnSpc>
-              <a:buNone/>
-            </a:pPr>
-            <a:r>
-              <a:rPr lang="en-US" sz="2400" b="1" dirty="0">
+              <a:buNone/>
+            </a:pPr>
+            <a:r>
+              <a:rPr lang="en-US" sz="2600" b="1" dirty="0">
                 <a:solidFill>
                   <a:srgbClr val="1B2430"/>
                 </a:solidFill>
@@ -3388,17 +4458,13 @@
                 <a:ea typeface="Cambria" pitchFamily="34" charset="-122"/>
                 <a:cs typeface="Cambria" pitchFamily="34" charset="-120"/>
               </a:rPr>
-              <a:t>働きがいのある会社ランキング
-</a:t>
+              <a:t>20代で年収 </a:t>
             </a:r>
             <a:pPr indent="0" marL="0">
-              <a:lnSpc>
-                <a:spcPts val="3000"/>
-              </a:lnSpc>
-              <a:buNone/>
-            </a:pPr>
-            <a:r>
-              <a:rPr lang="en-US" sz="2400" b="1" dirty="0">
+              <a:buNone/>
+            </a:pPr>
+            <a:r>
+              <a:rPr lang="en-US" sz="2600" b="1" dirty="0">
                 <a:solidFill>
                   <a:srgbClr val="C9871F"/>
                 </a:solidFill>
@@ -3406,30 +4472,86 @@
                 <a:ea typeface="Cambria" pitchFamily="34" charset="-122"/>
                 <a:cs typeface="Cambria" pitchFamily="34" charset="-120"/>
               </a:rPr>
-              <a:t>7年連続入賞</a:t>
-            </a:r>
-            <a:endParaRPr lang="en-US" sz="2400" dirty="0"/>
-          </a:p>
-        </p:txBody>
-      </p:sp>
-      <p:sp>
-        <p:nvSpPr>
-          <p:cNvPr id="9" name="Shape 7"/>
-          <p:cNvSpPr/>
-          <p:nvPr/>
-        </p:nvSpPr>
-        <p:spPr>
-          <a:xfrm>
-            <a:off x="6190488" y="1645920"/>
-            <a:ext cx="5440680" cy="1828800"/>
+              <a:t>1,000万円</a:t>
+            </a:r>
+            <a:pPr indent="0" marL="0">
+              <a:buNone/>
+            </a:pPr>
+            <a:r>
+              <a:rPr lang="en-US" sz="2600" b="1" dirty="0">
+                <a:solidFill>
+                  <a:srgbClr val="1B2430"/>
+                </a:solidFill>
+                <a:latin typeface="Cambria" pitchFamily="34" charset="0"/>
+                <a:ea typeface="Cambria" pitchFamily="34" charset="-122"/>
+                <a:cs typeface="Cambria" pitchFamily="34" charset="-120"/>
+              </a:rPr>
+              <a:t> の実例</a:t>
+            </a:r>
+            <a:endParaRPr lang="en-US" sz="2600" dirty="0"/>
+          </a:p>
+        </p:txBody>
+      </p:sp>
+      <p:sp>
+        <p:nvSpPr>
+          <p:cNvPr id="9" name="Text 7"/>
+          <p:cNvSpPr/>
+          <p:nvPr/>
+        </p:nvSpPr>
+        <p:spPr>
+          <a:xfrm>
+            <a:off x="886968" y="2880360"/>
+            <a:ext cx="4800600" cy="594360"/>
+          </a:xfrm>
+          <a:prstGeom prst="rect">
+            <a:avLst/>
+          </a:prstGeom>
+          <a:noFill/>
+          <a:ln/>
+        </p:spPr>
+        <p:txBody>
+          <a:bodyPr wrap="square" lIns="0" tIns="0" rIns="0" bIns="0" rtlCol="0" anchor="t"/>
+          <a:lstStyle/>
+          <a:p>
+            <a:pPr indent="0" marL="0">
+              <a:lnSpc>
+                <a:spcPts val="1700"/>
+              </a:lnSpc>
+              <a:buNone/>
+            </a:pPr>
+            <a:r>
+              <a:rPr lang="en-US" sz="1250" dirty="0">
+                <a:solidFill>
+                  <a:srgbClr val="3D4756"/>
+                </a:solidFill>
+                <a:latin typeface="Calibri" pitchFamily="34" charset="0"/>
+                <a:ea typeface="Calibri" pitchFamily="34" charset="-122"/>
+                <a:cs typeface="Calibri" pitchFamily="34" charset="-120"/>
+              </a:rPr>
+              <a:t>営業メンバー平均年収750万円以上・平均年齢27歳。1年目からの主任登用実績あり（数値は媒体公表値・実績ベース）。</a:t>
+            </a:r>
+            <a:endParaRPr lang="en-US" sz="1250" dirty="0"/>
+          </a:p>
+        </p:txBody>
+      </p:sp>
+      <p:sp>
+        <p:nvSpPr>
+          <p:cNvPr id="10" name="Shape 8"/>
+          <p:cNvSpPr/>
+          <p:nvPr/>
+        </p:nvSpPr>
+        <p:spPr>
+          <a:xfrm>
+            <a:off x="6190488" y="1600200"/>
+            <a:ext cx="5440680" cy="1965960"/>
           </a:xfrm>
           <a:prstGeom prst="roundRect">
             <a:avLst>
-              <a:gd name="adj" fmla="val 4500"/>
+              <a:gd name="adj" fmla="val 4186"/>
             </a:avLst>
           </a:prstGeom>
           <a:solidFill>
-            <a:srgbClr val="FFFFFF"/>
+            <a:srgbClr val="FBEFD9"/>
           </a:solidFill>
           <a:ln/>
           <a:effectLst>
@@ -3443,14 +4565,14 @@
       </p:sp>
       <p:sp>
         <p:nvSpPr>
-          <p:cNvPr id="10" name="Text 8"/>
-          <p:cNvSpPr/>
-          <p:nvPr/>
-        </p:nvSpPr>
-        <p:spPr>
-          <a:xfrm>
-            <a:off x="6510528" y="1874520"/>
-            <a:ext cx="4754880" cy="365760"/>
+          <p:cNvPr id="11" name="Text 9"/>
+          <p:cNvSpPr/>
+          <p:nvPr/>
+        </p:nvSpPr>
+        <p:spPr>
+          <a:xfrm>
+            <a:off x="6510528" y="1828800"/>
+            <a:ext cx="4800600" cy="365760"/>
           </a:xfrm>
           <a:prstGeom prst="rect">
             <a:avLst/>
@@ -3466,118 +4588,70 @@
               <a:buNone/>
             </a:pPr>
             <a:r>
-              <a:rPr lang="en-US" sz="1400" b="1" dirty="0">
-                <a:solidFill>
-                  <a:srgbClr val="B3524C"/>
-                </a:solidFill>
-                <a:latin typeface="Calibri" pitchFamily="34" charset="0"/>
-                <a:ea typeface="Calibri" pitchFamily="34" charset="-122"/>
-                <a:cs typeface="Calibri" pitchFamily="34" charset="-120"/>
-              </a:rPr>
-              <a:t>正直に言う、きつい部分</a:t>
-            </a:r>
-            <a:endParaRPr lang="en-US" sz="1400" dirty="0"/>
-          </a:p>
-        </p:txBody>
-      </p:sp>
-      <p:sp>
-        <p:nvSpPr>
-          <p:cNvPr id="11" name="Text 9"/>
+              <a:rPr lang="en-US" sz="1500" b="1" dirty="0">
+                <a:solidFill>
+                  <a:srgbClr val="C9871F"/>
+                </a:solidFill>
+                <a:latin typeface="Calibri" pitchFamily="34" charset="0"/>
+                <a:ea typeface="Calibri" pitchFamily="34" charset="-122"/>
+                <a:cs typeface="Calibri" pitchFamily="34" charset="-120"/>
+              </a:rPr>
+              <a:t>成長：ゼロから、体系的に</a:t>
+            </a:r>
+            <a:endParaRPr lang="en-US" sz="1500" dirty="0"/>
+          </a:p>
+        </p:txBody>
+      </p:sp>
+      <p:sp>
+        <p:nvSpPr>
+          <p:cNvPr id="12" name="Text 10"/>
           <p:cNvSpPr/>
           <p:nvPr/>
         </p:nvSpPr>
         <p:spPr>
           <a:xfrm>
             <a:off x="6510528" y="2286000"/>
-            <a:ext cx="4800600" cy="1051560"/>
-          </a:xfrm>
-          <a:prstGeom prst="rect">
-            <a:avLst/>
-          </a:prstGeom>
-          <a:noFill/>
-          <a:ln/>
-        </p:spPr>
-        <p:txBody>
-          <a:bodyPr wrap="square" lIns="0" tIns="0" rIns="0" bIns="0" rtlCol="0" anchor="t"/>
+            <a:ext cx="4800600" cy="502920"/>
+          </a:xfrm>
+          <a:prstGeom prst="rect">
+            <a:avLst/>
+          </a:prstGeom>
+          <a:noFill/>
+          <a:ln/>
+        </p:spPr>
+        <p:txBody>
+          <a:bodyPr wrap="square" lIns="0" tIns="0" rIns="0" bIns="0" rtlCol="0" anchor="ctr"/>
           <a:lstStyle/>
           <a:p>
             <a:pPr indent="0" marL="0">
-              <a:lnSpc>
-                <a:spcPts val="1900"/>
-              </a:lnSpc>
-              <a:buNone/>
-            </a:pPr>
-            <a:r>
-              <a:rPr lang="en-US" sz="1350" dirty="0">
-                <a:solidFill>
-                  <a:srgbClr val="3D4756"/>
-                </a:solidFill>
-                <a:latin typeface="Calibri" pitchFamily="34" charset="0"/>
-                <a:ea typeface="Calibri" pitchFamily="34" charset="-122"/>
-                <a:cs typeface="Calibri" pitchFamily="34" charset="-120"/>
-              </a:rPr>
-              <a:t>成果主義で、立ち上がり期は大変。だから固定給の下支え・研修・メンターで支える。都合の悪いことを先に言える会社かどうかを見てほしい。</a:t>
-            </a:r>
-            <a:endParaRPr lang="en-US" sz="1350" dirty="0"/>
-          </a:p>
-        </p:txBody>
-      </p:sp>
-      <p:sp>
-        <p:nvSpPr>
-          <p:cNvPr id="12" name="Text 10"/>
-          <p:cNvSpPr/>
-          <p:nvPr/>
-        </p:nvSpPr>
-        <p:spPr>
-          <a:xfrm>
-            <a:off x="566928" y="3840480"/>
-            <a:ext cx="11064240" cy="822960"/>
-          </a:xfrm>
-          <a:prstGeom prst="rect">
-            <a:avLst/>
-          </a:prstGeom>
-          <a:noFill/>
-          <a:ln/>
-        </p:spPr>
-        <p:txBody>
-          <a:bodyPr wrap="square" lIns="0" tIns="0" rIns="0" bIns="0" rtlCol="0" anchor="ctr"/>
-          <a:lstStyle/>
-          <a:p>
-            <a:pPr algn="ctr" indent="0" marL="0">
-              <a:lnSpc>
-                <a:spcPts val="2600"/>
-              </a:lnSpc>
-              <a:buNone/>
-            </a:pPr>
-            <a:r>
-              <a:rPr lang="en-US" sz="1800" b="1" i="1" dirty="0">
-                <a:solidFill>
-                  <a:srgbClr val="1B2A4A"/>
+              <a:buNone/>
+            </a:pPr>
+            <a:r>
+              <a:rPr lang="en-US" sz="2600" b="1" dirty="0">
+                <a:solidFill>
+                  <a:srgbClr val="1B2430"/>
                 </a:solidFill>
                 <a:latin typeface="Cambria" pitchFamily="34" charset="0"/>
                 <a:ea typeface="Cambria" pitchFamily="34" charset="-122"/>
                 <a:cs typeface="Cambria" pitchFamily="34" charset="-120"/>
               </a:rPr>
-              <a:t>数字を盛らない。ネガも隠さない。</a:t>
-            </a:r>
-            <a:pPr algn="ctr" indent="0" marL="0">
-              <a:lnSpc>
-                <a:spcPts val="2600"/>
-              </a:lnSpc>
-              <a:buNone/>
-            </a:pPr>
-            <a:r>
-              <a:rPr lang="en-US" sz="1800" i="1" dirty="0">
-                <a:solidFill>
-                  <a:srgbClr val="3D4756"/>
+              <a:t>未経験入社 </a:t>
+            </a:r>
+            <a:pPr indent="0" marL="0">
+              <a:buNone/>
+            </a:pPr>
+            <a:r>
+              <a:rPr lang="en-US" sz="2600" b="1" dirty="0">
+                <a:solidFill>
+                  <a:srgbClr val="2E7D57"/>
                 </a:solidFill>
                 <a:latin typeface="Cambria" pitchFamily="34" charset="0"/>
                 <a:ea typeface="Cambria" pitchFamily="34" charset="-122"/>
                 <a:cs typeface="Cambria" pitchFamily="34" charset="-120"/>
               </a:rPr>
-              <a:t>　― それが、口コミの時代にいちばん強い採用ブランドだから。</a:t>
-            </a:r>
-            <a:endParaRPr lang="en-US" sz="1800" dirty="0"/>
+              <a:t>90%</a:t>
+            </a:r>
+            <a:endParaRPr lang="en-US" sz="2600" dirty="0"/>
           </a:p>
         </p:txBody>
       </p:sp>
@@ -3589,8 +4663,8 @@
         </p:nvSpPr>
         <p:spPr>
           <a:xfrm>
-            <a:off x="566928" y="4892040"/>
-            <a:ext cx="11064240" cy="548640"/>
+            <a:off x="6510528" y="2880360"/>
+            <a:ext cx="4800600" cy="594360"/>
           </a:xfrm>
           <a:prstGeom prst="rect">
             <a:avLst/>
@@ -3602,11 +4676,385 @@
           <a:bodyPr wrap="square" lIns="0" tIns="0" rIns="0" bIns="0" rtlCol="0" anchor="t"/>
           <a:lstStyle/>
           <a:p>
+            <a:pPr indent="0" marL="0">
+              <a:lnSpc>
+                <a:spcPts val="1700"/>
+              </a:lnSpc>
+              <a:buNone/>
+            </a:pPr>
+            <a:r>
+              <a:rPr lang="en-US" sz="1250" dirty="0">
+                <a:solidFill>
+                  <a:srgbClr val="3D4756"/>
+                </a:solidFill>
+                <a:latin typeface="Calibri" pitchFamily="34" charset="0"/>
+                <a:ea typeface="Calibri" pitchFamily="34" charset="-122"/>
+                <a:cs typeface="Calibri" pitchFamily="34" charset="-120"/>
+              </a:rPr>
+              <a:t>入社後90日の立ち上げプログラム＋直属上司以外のメンター制。対人折衝・交渉・信頼構築（7章の“伸びるスキル”）を毎日鍛える。</a:t>
+            </a:r>
+            <a:endParaRPr lang="en-US" sz="1250" dirty="0"/>
+          </a:p>
+        </p:txBody>
+      </p:sp>
+      <p:sp>
+        <p:nvSpPr>
+          <p:cNvPr id="14" name="Shape 12"/>
+          <p:cNvSpPr/>
+          <p:nvPr/>
+        </p:nvSpPr>
+        <p:spPr>
+          <a:xfrm>
+            <a:off x="566928" y="3794760"/>
+            <a:ext cx="11064240" cy="1828800"/>
+          </a:xfrm>
+          <a:prstGeom prst="roundRect">
+            <a:avLst>
+              <a:gd name="adj" fmla="val 4500"/>
+            </a:avLst>
+          </a:prstGeom>
+          <a:solidFill>
+            <a:srgbClr val="1B2A4A"/>
+          </a:solidFill>
+          <a:ln/>
+          <a:effectLst>
+            <a:outerShdw sx="100000" sy="100000" kx="0" ky="0" algn="bl" rotWithShape="0" blurRad="114300" dist="38100" dir="5400000">
+              <a:srgbClr val="9AA6B8">
+                <a:alpha val="35000"/>
+              </a:srgbClr>
+            </a:outerShdw>
+          </a:effectLst>
+        </p:spPr>
+      </p:sp>
+      <p:sp>
+        <p:nvSpPr>
+          <p:cNvPr id="15" name="Text 13"/>
+          <p:cNvSpPr/>
+          <p:nvPr/>
+        </p:nvSpPr>
+        <p:spPr>
+          <a:xfrm>
+            <a:off x="978408" y="3977640"/>
+            <a:ext cx="10241280" cy="457200"/>
+          </a:xfrm>
+          <a:prstGeom prst="rect">
+            <a:avLst/>
+          </a:prstGeom>
+          <a:noFill/>
+          <a:ln/>
+        </p:spPr>
+        <p:txBody>
+          <a:bodyPr wrap="square" lIns="0" tIns="0" rIns="0" bIns="0" rtlCol="0" anchor="ctr"/>
+          <a:lstStyle/>
+          <a:p>
+            <a:pPr indent="0" marL="0">
+              <a:buNone/>
+            </a:pPr>
+            <a:r>
+              <a:rPr lang="en-US" sz="1900" b="1" dirty="0">
+                <a:solidFill>
+                  <a:srgbClr val="FFFFFF"/>
+                </a:solidFill>
+                <a:latin typeface="Cambria" pitchFamily="34" charset="0"/>
+                <a:ea typeface="Cambria" pitchFamily="34" charset="-122"/>
+                <a:cs typeface="Cambria" pitchFamily="34" charset="-120"/>
+              </a:rPr>
+              <a:t>ここで身につく力は、会社を越えて価値が上がり続ける“個人資産”。</a:t>
+            </a:r>
+            <a:endParaRPr lang="en-US" sz="1900" dirty="0"/>
+          </a:p>
+        </p:txBody>
+      </p:sp>
+      <p:sp>
+        <p:nvSpPr>
+          <p:cNvPr id="16" name="Shape 14"/>
+          <p:cNvSpPr/>
+          <p:nvPr/>
+        </p:nvSpPr>
+        <p:spPr>
+          <a:xfrm>
+            <a:off x="978408" y="4709160"/>
+            <a:ext cx="2514600" cy="566928"/>
+          </a:xfrm>
+          <a:prstGeom prst="roundRect">
+            <a:avLst>
+              <a:gd name="adj" fmla="val 50000"/>
+            </a:avLst>
+          </a:prstGeom>
+          <a:solidFill>
+            <a:srgbClr val="24365E"/>
+          </a:solidFill>
+          <a:ln w="12700">
+            <a:solidFill>
+              <a:srgbClr val="E8A33D"/>
+            </a:solidFill>
+            <a:prstDash val="solid"/>
+          </a:ln>
+        </p:spPr>
+      </p:sp>
+      <p:sp>
+        <p:nvSpPr>
+          <p:cNvPr id="17" name="Text 15"/>
+          <p:cNvSpPr/>
+          <p:nvPr/>
+        </p:nvSpPr>
+        <p:spPr>
+          <a:xfrm>
+            <a:off x="978408" y="4709160"/>
+            <a:ext cx="2514600" cy="566928"/>
+          </a:xfrm>
+          <a:prstGeom prst="rect">
+            <a:avLst/>
+          </a:prstGeom>
+          <a:noFill/>
+          <a:ln/>
+        </p:spPr>
+        <p:txBody>
+          <a:bodyPr wrap="square" lIns="0" tIns="0" rIns="0" bIns="0" rtlCol="0" anchor="ctr"/>
+          <a:lstStyle/>
+          <a:p>
             <a:pPr algn="ctr" indent="0" marL="0">
               <a:buNone/>
             </a:pPr>
             <a:r>
-              <a:rPr lang="en-US" sz="1200" i="1" dirty="0">
+              <a:rPr lang="en-US" sz="1300" b="1" dirty="0">
+                <a:solidFill>
+                  <a:srgbClr val="FFFFFF"/>
+                </a:solidFill>
+                <a:latin typeface="Calibri" pitchFamily="34" charset="0"/>
+                <a:ea typeface="Calibri" pitchFamily="34" charset="-122"/>
+                <a:cs typeface="Calibri" pitchFamily="34" charset="-120"/>
+              </a:rPr>
+              <a:t>対人折衝・交渉</a:t>
+            </a:r>
+            <a:endParaRPr lang="en-US" sz="1300" dirty="0"/>
+          </a:p>
+        </p:txBody>
+      </p:sp>
+      <p:sp>
+        <p:nvSpPr>
+          <p:cNvPr id="18" name="Shape 16"/>
+          <p:cNvSpPr/>
+          <p:nvPr/>
+        </p:nvSpPr>
+        <p:spPr>
+          <a:xfrm>
+            <a:off x="3630168" y="4709160"/>
+            <a:ext cx="2514600" cy="566928"/>
+          </a:xfrm>
+          <a:prstGeom prst="roundRect">
+            <a:avLst>
+              <a:gd name="adj" fmla="val 50000"/>
+            </a:avLst>
+          </a:prstGeom>
+          <a:solidFill>
+            <a:srgbClr val="24365E"/>
+          </a:solidFill>
+          <a:ln w="12700">
+            <a:solidFill>
+              <a:srgbClr val="E8A33D"/>
+            </a:solidFill>
+            <a:prstDash val="solid"/>
+          </a:ln>
+        </p:spPr>
+      </p:sp>
+      <p:sp>
+        <p:nvSpPr>
+          <p:cNvPr id="19" name="Text 17"/>
+          <p:cNvSpPr/>
+          <p:nvPr/>
+        </p:nvSpPr>
+        <p:spPr>
+          <a:xfrm>
+            <a:off x="3630168" y="4709160"/>
+            <a:ext cx="2514600" cy="566928"/>
+          </a:xfrm>
+          <a:prstGeom prst="rect">
+            <a:avLst/>
+          </a:prstGeom>
+          <a:noFill/>
+          <a:ln/>
+        </p:spPr>
+        <p:txBody>
+          <a:bodyPr wrap="square" lIns="0" tIns="0" rIns="0" bIns="0" rtlCol="0" anchor="ctr"/>
+          <a:lstStyle/>
+          <a:p>
+            <a:pPr algn="ctr" indent="0" marL="0">
+              <a:buNone/>
+            </a:pPr>
+            <a:r>
+              <a:rPr lang="en-US" sz="1300" b="1" dirty="0">
+                <a:solidFill>
+                  <a:srgbClr val="FFFFFF"/>
+                </a:solidFill>
+                <a:latin typeface="Calibri" pitchFamily="34" charset="0"/>
+                <a:ea typeface="Calibri" pitchFamily="34" charset="-122"/>
+                <a:cs typeface="Calibri" pitchFamily="34" charset="-120"/>
+              </a:rPr>
+              <a:t>課題発見・提案</a:t>
+            </a:r>
+            <a:endParaRPr lang="en-US" sz="1300" dirty="0"/>
+          </a:p>
+        </p:txBody>
+      </p:sp>
+      <p:sp>
+        <p:nvSpPr>
+          <p:cNvPr id="20" name="Shape 18"/>
+          <p:cNvSpPr/>
+          <p:nvPr/>
+        </p:nvSpPr>
+        <p:spPr>
+          <a:xfrm>
+            <a:off x="6281928" y="4709160"/>
+            <a:ext cx="2514600" cy="566928"/>
+          </a:xfrm>
+          <a:prstGeom prst="roundRect">
+            <a:avLst>
+              <a:gd name="adj" fmla="val 50000"/>
+            </a:avLst>
+          </a:prstGeom>
+          <a:solidFill>
+            <a:srgbClr val="24365E"/>
+          </a:solidFill>
+          <a:ln w="12700">
+            <a:solidFill>
+              <a:srgbClr val="E8A33D"/>
+            </a:solidFill>
+            <a:prstDash val="solid"/>
+          </a:ln>
+        </p:spPr>
+      </p:sp>
+      <p:sp>
+        <p:nvSpPr>
+          <p:cNvPr id="21" name="Text 19"/>
+          <p:cNvSpPr/>
+          <p:nvPr/>
+        </p:nvSpPr>
+        <p:spPr>
+          <a:xfrm>
+            <a:off x="6281928" y="4709160"/>
+            <a:ext cx="2514600" cy="566928"/>
+          </a:xfrm>
+          <a:prstGeom prst="rect">
+            <a:avLst/>
+          </a:prstGeom>
+          <a:noFill/>
+          <a:ln/>
+        </p:spPr>
+        <p:txBody>
+          <a:bodyPr wrap="square" lIns="0" tIns="0" rIns="0" bIns="0" rtlCol="0" anchor="ctr"/>
+          <a:lstStyle/>
+          <a:p>
+            <a:pPr algn="ctr" indent="0" marL="0">
+              <a:buNone/>
+            </a:pPr>
+            <a:r>
+              <a:rPr lang="en-US" sz="1300" b="1" dirty="0">
+                <a:solidFill>
+                  <a:srgbClr val="FFFFFF"/>
+                </a:solidFill>
+                <a:latin typeface="Calibri" pitchFamily="34" charset="0"/>
+                <a:ea typeface="Calibri" pitchFamily="34" charset="-122"/>
+                <a:cs typeface="Calibri" pitchFamily="34" charset="-120"/>
+              </a:rPr>
+              <a:t>信頼構築</a:t>
+            </a:r>
+            <a:endParaRPr lang="en-US" sz="1300" dirty="0"/>
+          </a:p>
+        </p:txBody>
+      </p:sp>
+      <p:sp>
+        <p:nvSpPr>
+          <p:cNvPr id="22" name="Shape 20"/>
+          <p:cNvSpPr/>
+          <p:nvPr/>
+        </p:nvSpPr>
+        <p:spPr>
+          <a:xfrm>
+            <a:off x="8933688" y="4709160"/>
+            <a:ext cx="2514600" cy="566928"/>
+          </a:xfrm>
+          <a:prstGeom prst="roundRect">
+            <a:avLst>
+              <a:gd name="adj" fmla="val 50000"/>
+            </a:avLst>
+          </a:prstGeom>
+          <a:solidFill>
+            <a:srgbClr val="24365E"/>
+          </a:solidFill>
+          <a:ln w="12700">
+            <a:solidFill>
+              <a:srgbClr val="E8A33D"/>
+            </a:solidFill>
+            <a:prstDash val="solid"/>
+          </a:ln>
+        </p:spPr>
+      </p:sp>
+      <p:sp>
+        <p:nvSpPr>
+          <p:cNvPr id="23" name="Text 21"/>
+          <p:cNvSpPr/>
+          <p:nvPr/>
+        </p:nvSpPr>
+        <p:spPr>
+          <a:xfrm>
+            <a:off x="8933688" y="4709160"/>
+            <a:ext cx="2514600" cy="566928"/>
+          </a:xfrm>
+          <a:prstGeom prst="rect">
+            <a:avLst/>
+          </a:prstGeom>
+          <a:noFill/>
+          <a:ln/>
+        </p:spPr>
+        <p:txBody>
+          <a:bodyPr wrap="square" lIns="0" tIns="0" rIns="0" bIns="0" rtlCol="0" anchor="ctr"/>
+          <a:lstStyle/>
+          <a:p>
+            <a:pPr algn="ctr" indent="0" marL="0">
+              <a:buNone/>
+            </a:pPr>
+            <a:r>
+              <a:rPr lang="en-US" sz="1300" b="1" dirty="0">
+                <a:solidFill>
+                  <a:srgbClr val="FFFFFF"/>
+                </a:solidFill>
+                <a:latin typeface="Calibri" pitchFamily="34" charset="0"/>
+                <a:ea typeface="Calibri" pitchFamily="34" charset="-122"/>
+                <a:cs typeface="Calibri" pitchFamily="34" charset="-120"/>
+              </a:rPr>
+              <a:t>レジリエンス</a:t>
+            </a:r>
+            <a:endParaRPr lang="en-US" sz="1300" dirty="0"/>
+          </a:p>
+        </p:txBody>
+      </p:sp>
+      <p:sp>
+        <p:nvSpPr>
+          <p:cNvPr id="24" name="Text 22"/>
+          <p:cNvSpPr/>
+          <p:nvPr/>
+        </p:nvSpPr>
+        <p:spPr>
+          <a:xfrm>
+            <a:off x="566928" y="6473952"/>
+            <a:ext cx="10058400" cy="292608"/>
+          </a:xfrm>
+          <a:prstGeom prst="rect">
+            <a:avLst/>
+          </a:prstGeom>
+          <a:noFill/>
+          <a:ln/>
+        </p:spPr>
+        <p:txBody>
+          <a:bodyPr wrap="square" lIns="0" tIns="0" rIns="0" bIns="0" rtlCol="0" anchor="ctr"/>
+          <a:lstStyle/>
+          <a:p>
+            <a:pPr algn="l" indent="0" marL="0">
+              <a:buNone/>
+            </a:pPr>
+            <a:r>
+              <a:rPr lang="en-US" sz="850" dirty="0">
                 <a:solidFill>
                   <a:srgbClr val="8894A6"/>
                 </a:solidFill>
@@ -3614,15 +5062,15 @@
                 <a:ea typeface="Calibri" pitchFamily="34" charset="-122"/>
                 <a:cs typeface="Calibri" pitchFamily="34" charset="-120"/>
               </a:rPr>
-              <a:t>【差し込み】口コミサイト（OpenWork等）の現状スコア／休日・残業・離職率の実数を、改善の取り組みとセットで開示。</a:t>
-            </a:r>
-            <a:endParaRPr lang="en-US" sz="1200" dirty="0"/>
-          </a:p>
-        </p:txBody>
-      </p:sp>
-      <p:sp>
-        <p:nvSpPr>
-          <p:cNvPr id="14" name="Text 12"/>
+              <a:t>※給与は実績ベース（平均とトップ層を明確に区分して説明します）。制度は2026年7月時点。</a:t>
+            </a:r>
+            <a:endParaRPr lang="en-US" sz="850" dirty="0"/>
+          </a:p>
+        </p:txBody>
+      </p:sp>
+      <p:sp>
+        <p:nvSpPr>
+          <p:cNvPr id="25" name="Text 23"/>
           <p:cNvSpPr/>
           <p:nvPr/>
         </p:nvSpPr>
@@ -3670,6 +5118,648 @@
 <file path=ppt/slides/slide12.xml><?xml version="1.0" encoding="utf-8"?>
 <p:sld xmlns:a="http://schemas.openxmlformats.org/drawingml/2006/main" xmlns:r="http://schemas.openxmlformats.org/officeDocument/2006/relationships" xmlns:p="http://schemas.openxmlformats.org/presentationml/2006/main">
   <p:cSld name="Slide 12">
+    <p:bg>
+      <p:bgPr>
+        <a:solidFill>
+          <a:srgbClr val="F4F6FA"/>
+        </a:solidFill>
+      </p:bgPr>
+    </p:bg>
+    <p:spTree>
+      <p:nvGrpSpPr>
+        <p:cNvPr id="1" name=""/>
+        <p:cNvGrpSpPr/>
+        <p:nvPr/>
+      </p:nvGrpSpPr>
+      <p:grpSpPr>
+        <a:xfrm>
+          <a:off x="0" y="0"/>
+          <a:ext cx="0" cy="0"/>
+          <a:chOff x="0" y="0"/>
+          <a:chExt cx="0" cy="0"/>
+        </a:xfrm>
+      </p:grpSpPr>
+      <p:sp>
+        <p:nvSpPr>
+          <p:cNvPr id="2" name="Shape 0"/>
+          <p:cNvSpPr/>
+          <p:nvPr/>
+        </p:nvSpPr>
+        <p:spPr>
+          <a:xfrm>
+            <a:off x="566928" y="457200"/>
+            <a:ext cx="475488" cy="475488"/>
+          </a:xfrm>
+          <a:prstGeom prst="ellipse">
+            <a:avLst/>
+          </a:prstGeom>
+          <a:solidFill>
+            <a:srgbClr val="E8A33D"/>
+          </a:solidFill>
+          <a:ln/>
+        </p:spPr>
+      </p:sp>
+      <p:sp>
+        <p:nvSpPr>
+          <p:cNvPr id="3" name="Text 1"/>
+          <p:cNvSpPr/>
+          <p:nvPr/>
+        </p:nvSpPr>
+        <p:spPr>
+          <a:xfrm>
+            <a:off x="566928" y="457200"/>
+            <a:ext cx="475488" cy="475488"/>
+          </a:xfrm>
+          <a:prstGeom prst="rect">
+            <a:avLst/>
+          </a:prstGeom>
+          <a:noFill/>
+          <a:ln/>
+        </p:spPr>
+        <p:txBody>
+          <a:bodyPr wrap="square" lIns="0" tIns="0" rIns="0" bIns="0" rtlCol="0" anchor="ctr"/>
+          <a:lstStyle/>
+          <a:p>
+            <a:pPr algn="ctr" indent="0" marL="0">
+              <a:buNone/>
+            </a:pPr>
+            <a:r>
+              <a:rPr lang="en-US" sz="2000" b="1" dirty="0">
+                <a:solidFill>
+                  <a:srgbClr val="1B2A4A"/>
+                </a:solidFill>
+                <a:latin typeface="Cambria" pitchFamily="34" charset="0"/>
+                <a:ea typeface="Cambria" pitchFamily="34" charset="-122"/>
+                <a:cs typeface="Cambria" pitchFamily="34" charset="-120"/>
+              </a:rPr>
+              <a:t>11</a:t>
+            </a:r>
+            <a:endParaRPr lang="en-US" sz="2000" dirty="0"/>
+          </a:p>
+        </p:txBody>
+      </p:sp>
+      <p:sp>
+        <p:nvSpPr>
+          <p:cNvPr id="4" name="Text 2"/>
+          <p:cNvSpPr/>
+          <p:nvPr/>
+        </p:nvSpPr>
+        <p:spPr>
+          <a:xfrm>
+            <a:off x="1225296" y="457200"/>
+            <a:ext cx="10515600" cy="256032"/>
+          </a:xfrm>
+          <a:prstGeom prst="rect">
+            <a:avLst/>
+          </a:prstGeom>
+          <a:noFill/>
+          <a:ln/>
+        </p:spPr>
+        <p:txBody>
+          <a:bodyPr wrap="square" lIns="0" tIns="0" rIns="0" bIns="0" rtlCol="0" anchor="ctr"/>
+          <a:lstStyle/>
+          <a:p>
+            <a:pPr algn="l" indent="0" marL="0">
+              <a:buNone/>
+            </a:pPr>
+            <a:r>
+              <a:rPr lang="en-US" sz="1250" b="1" spc="200" kern="0" dirty="0">
+                <a:solidFill>
+                  <a:srgbClr val="1C7293"/>
+                </a:solidFill>
+                <a:latin typeface="Calibri" pitchFamily="34" charset="0"/>
+                <a:ea typeface="Calibri" pitchFamily="34" charset="-122"/>
+                <a:cs typeface="Calibri" pitchFamily="34" charset="-120"/>
+              </a:rPr>
+              <a:t>TRUST ／ 正直であること</a:t>
+            </a:r>
+            <a:endParaRPr lang="en-US" sz="1250" dirty="0"/>
+          </a:p>
+        </p:txBody>
+      </p:sp>
+      <p:sp>
+        <p:nvSpPr>
+          <p:cNvPr id="5" name="Text 3"/>
+          <p:cNvSpPr/>
+          <p:nvPr/>
+        </p:nvSpPr>
+        <p:spPr>
+          <a:xfrm>
+            <a:off x="1225296" y="713232"/>
+            <a:ext cx="10972800" cy="566928"/>
+          </a:xfrm>
+          <a:prstGeom prst="rect">
+            <a:avLst/>
+          </a:prstGeom>
+          <a:noFill/>
+          <a:ln/>
+        </p:spPr>
+        <p:txBody>
+          <a:bodyPr wrap="square" lIns="0" tIns="0" rIns="0" bIns="0" rtlCol="0" anchor="ctr"/>
+          <a:lstStyle/>
+          <a:p>
+            <a:pPr algn="l" indent="0" marL="0">
+              <a:buNone/>
+            </a:pPr>
+            <a:r>
+              <a:rPr lang="en-US" sz="2800" b="1" dirty="0">
+                <a:solidFill>
+                  <a:srgbClr val="1B2430"/>
+                </a:solidFill>
+                <a:latin typeface="Cambria" pitchFamily="34" charset="0"/>
+                <a:ea typeface="Cambria" pitchFamily="34" charset="-122"/>
+                <a:cs typeface="Cambria" pitchFamily="34" charset="-120"/>
+              </a:rPr>
+              <a:t>第三者評価と、きつい部分の“正直な開示”</a:t>
+            </a:r>
+            <a:endParaRPr lang="en-US" sz="2800" dirty="0"/>
+          </a:p>
+        </p:txBody>
+      </p:sp>
+      <p:sp>
+        <p:nvSpPr>
+          <p:cNvPr id="6" name="Shape 4"/>
+          <p:cNvSpPr/>
+          <p:nvPr/>
+        </p:nvSpPr>
+        <p:spPr>
+          <a:xfrm>
+            <a:off x="566928" y="1645920"/>
+            <a:ext cx="5440680" cy="2103120"/>
+          </a:xfrm>
+          <a:prstGeom prst="roundRect">
+            <a:avLst>
+              <a:gd name="adj" fmla="val 3913"/>
+            </a:avLst>
+          </a:prstGeom>
+          <a:solidFill>
+            <a:srgbClr val="E9F1F4"/>
+          </a:solidFill>
+          <a:ln/>
+          <a:effectLst>
+            <a:outerShdw sx="100000" sy="100000" kx="0" ky="0" algn="bl" rotWithShape="0" blurRad="114300" dist="38100" dir="5400000">
+              <a:srgbClr val="9AA6B8">
+                <a:alpha val="35000"/>
+              </a:srgbClr>
+            </a:outerShdw>
+          </a:effectLst>
+        </p:spPr>
+      </p:sp>
+      <p:sp>
+        <p:nvSpPr>
+          <p:cNvPr id="7" name="Text 5"/>
+          <p:cNvSpPr/>
+          <p:nvPr/>
+        </p:nvSpPr>
+        <p:spPr>
+          <a:xfrm>
+            <a:off x="886968" y="1874520"/>
+            <a:ext cx="4754880" cy="365760"/>
+          </a:xfrm>
+          <a:prstGeom prst="rect">
+            <a:avLst/>
+          </a:prstGeom>
+          <a:noFill/>
+          <a:ln/>
+        </p:spPr>
+        <p:txBody>
+          <a:bodyPr wrap="square" lIns="0" tIns="0" rIns="0" bIns="0" rtlCol="0" anchor="ctr"/>
+          <a:lstStyle/>
+          <a:p>
+            <a:pPr indent="0" marL="0">
+              <a:buNone/>
+            </a:pPr>
+            <a:r>
+              <a:rPr lang="en-US" sz="1400" b="1" dirty="0">
+                <a:solidFill>
+                  <a:srgbClr val="1C7293"/>
+                </a:solidFill>
+                <a:latin typeface="Calibri" pitchFamily="34" charset="0"/>
+                <a:ea typeface="Calibri" pitchFamily="34" charset="-122"/>
+                <a:cs typeface="Calibri" pitchFamily="34" charset="-120"/>
+              </a:rPr>
+              <a:t>第三者評価</a:t>
+            </a:r>
+            <a:endParaRPr lang="en-US" sz="1400" dirty="0"/>
+          </a:p>
+        </p:txBody>
+      </p:sp>
+      <p:sp>
+        <p:nvSpPr>
+          <p:cNvPr id="8" name="Text 6"/>
+          <p:cNvSpPr/>
+          <p:nvPr/>
+        </p:nvSpPr>
+        <p:spPr>
+          <a:xfrm>
+            <a:off x="886968" y="2286000"/>
+            <a:ext cx="4754880" cy="1005840"/>
+          </a:xfrm>
+          <a:prstGeom prst="rect">
+            <a:avLst/>
+          </a:prstGeom>
+          <a:noFill/>
+          <a:ln/>
+        </p:spPr>
+        <p:txBody>
+          <a:bodyPr wrap="square" lIns="0" tIns="0" rIns="0" bIns="0" rtlCol="0" anchor="ctr"/>
+          <a:lstStyle/>
+          <a:p>
+            <a:pPr indent="0" marL="0">
+              <a:lnSpc>
+                <a:spcPts val="3000"/>
+              </a:lnSpc>
+              <a:buNone/>
+            </a:pPr>
+            <a:r>
+              <a:rPr lang="en-US" sz="2400" b="1" dirty="0">
+                <a:solidFill>
+                  <a:srgbClr val="1B2430"/>
+                </a:solidFill>
+                <a:latin typeface="Cambria" pitchFamily="34" charset="0"/>
+                <a:ea typeface="Cambria" pitchFamily="34" charset="-122"/>
+                <a:cs typeface="Cambria" pitchFamily="34" charset="-120"/>
+              </a:rPr>
+              <a:t>働きがいのある会社ランキング
+</a:t>
+            </a:r>
+            <a:pPr indent="0" marL="0">
+              <a:lnSpc>
+                <a:spcPts val="3000"/>
+              </a:lnSpc>
+              <a:buNone/>
+            </a:pPr>
+            <a:r>
+              <a:rPr lang="en-US" sz="2400" b="1" dirty="0">
+                <a:solidFill>
+                  <a:srgbClr val="C9871F"/>
+                </a:solidFill>
+                <a:latin typeface="Cambria" pitchFamily="34" charset="0"/>
+                <a:ea typeface="Cambria" pitchFamily="34" charset="-122"/>
+                <a:cs typeface="Cambria" pitchFamily="34" charset="-120"/>
+              </a:rPr>
+              <a:t>7年連続入賞</a:t>
+            </a:r>
+            <a:endParaRPr lang="en-US" sz="2400" dirty="0"/>
+          </a:p>
+        </p:txBody>
+      </p:sp>
+      <p:sp>
+        <p:nvSpPr>
+          <p:cNvPr id="9" name="Text 7"/>
+          <p:cNvSpPr/>
+          <p:nvPr/>
+        </p:nvSpPr>
+        <p:spPr>
+          <a:xfrm>
+            <a:off x="886968" y="3337560"/>
+            <a:ext cx="4754880" cy="274320"/>
+          </a:xfrm>
+          <a:prstGeom prst="rect">
+            <a:avLst/>
+          </a:prstGeom>
+          <a:noFill/>
+          <a:ln/>
+        </p:spPr>
+        <p:txBody>
+          <a:bodyPr wrap="square" lIns="0" tIns="0" rIns="0" bIns="0" rtlCol="0" anchor="ctr"/>
+          <a:lstStyle/>
+          <a:p>
+            <a:pPr indent="0" marL="0">
+              <a:buNone/>
+            </a:pPr>
+            <a:r>
+              <a:rPr lang="en-US" sz="1100" dirty="0">
+                <a:solidFill>
+                  <a:srgbClr val="8894A6"/>
+                </a:solidFill>
+                <a:latin typeface="Calibri" pitchFamily="34" charset="0"/>
+                <a:ea typeface="Calibri" pitchFamily="34" charset="-122"/>
+                <a:cs typeface="Calibri" pitchFamily="34" charset="-120"/>
+              </a:rPr>
+              <a:t>（100名以上部門・実績）</a:t>
+            </a:r>
+            <a:endParaRPr lang="en-US" sz="1100" dirty="0"/>
+          </a:p>
+        </p:txBody>
+      </p:sp>
+      <p:sp>
+        <p:nvSpPr>
+          <p:cNvPr id="10" name="Shape 8"/>
+          <p:cNvSpPr/>
+          <p:nvPr/>
+        </p:nvSpPr>
+        <p:spPr>
+          <a:xfrm>
+            <a:off x="6190488" y="1645920"/>
+            <a:ext cx="5440680" cy="2103120"/>
+          </a:xfrm>
+          <a:prstGeom prst="roundRect">
+            <a:avLst>
+              <a:gd name="adj" fmla="val 3913"/>
+            </a:avLst>
+          </a:prstGeom>
+          <a:solidFill>
+            <a:srgbClr val="FFFFFF"/>
+          </a:solidFill>
+          <a:ln/>
+          <a:effectLst>
+            <a:outerShdw sx="100000" sy="100000" kx="0" ky="0" algn="bl" rotWithShape="0" blurRad="114300" dist="38100" dir="5400000">
+              <a:srgbClr val="9AA6B8">
+                <a:alpha val="35000"/>
+              </a:srgbClr>
+            </a:outerShdw>
+          </a:effectLst>
+        </p:spPr>
+      </p:sp>
+      <p:sp>
+        <p:nvSpPr>
+          <p:cNvPr id="11" name="Text 9"/>
+          <p:cNvSpPr/>
+          <p:nvPr/>
+        </p:nvSpPr>
+        <p:spPr>
+          <a:xfrm>
+            <a:off x="6510528" y="1874520"/>
+            <a:ext cx="4754880" cy="365760"/>
+          </a:xfrm>
+          <a:prstGeom prst="rect">
+            <a:avLst/>
+          </a:prstGeom>
+          <a:noFill/>
+          <a:ln/>
+        </p:spPr>
+        <p:txBody>
+          <a:bodyPr wrap="square" lIns="0" tIns="0" rIns="0" bIns="0" rtlCol="0" anchor="ctr"/>
+          <a:lstStyle/>
+          <a:p>
+            <a:pPr indent="0" marL="0">
+              <a:buNone/>
+            </a:pPr>
+            <a:r>
+              <a:rPr lang="en-US" sz="1400" b="1" dirty="0">
+                <a:solidFill>
+                  <a:srgbClr val="B3524C"/>
+                </a:solidFill>
+                <a:latin typeface="Calibri" pitchFamily="34" charset="0"/>
+                <a:ea typeface="Calibri" pitchFamily="34" charset="-122"/>
+                <a:cs typeface="Calibri" pitchFamily="34" charset="-120"/>
+              </a:rPr>
+              <a:t>正直に言う、きつい部分</a:t>
+            </a:r>
+            <a:endParaRPr lang="en-US" sz="1400" dirty="0"/>
+          </a:p>
+        </p:txBody>
+      </p:sp>
+      <p:sp>
+        <p:nvSpPr>
+          <p:cNvPr id="12" name="Text 10"/>
+          <p:cNvSpPr/>
+          <p:nvPr/>
+        </p:nvSpPr>
+        <p:spPr>
+          <a:xfrm>
+            <a:off x="6510528" y="2267712"/>
+            <a:ext cx="4800600" cy="1371600"/>
+          </a:xfrm>
+          <a:prstGeom prst="rect">
+            <a:avLst/>
+          </a:prstGeom>
+          <a:noFill/>
+          <a:ln/>
+        </p:spPr>
+        <p:txBody>
+          <a:bodyPr wrap="square" lIns="0" tIns="0" rIns="0" bIns="0" rtlCol="0" anchor="t"/>
+          <a:lstStyle/>
+          <a:p>
+            <a:pPr indent="0" marL="0">
+              <a:lnSpc>
+                <a:spcPts val="1700"/>
+              </a:lnSpc>
+              <a:buNone/>
+            </a:pPr>
+            <a:r>
+              <a:rPr lang="en-US" sz="1250" b="1" dirty="0">
+                <a:solidFill>
+                  <a:srgbClr val="1B2430"/>
+                </a:solidFill>
+                <a:latin typeface="Calibri" pitchFamily="34" charset="0"/>
+                <a:ea typeface="Calibri" pitchFamily="34" charset="-122"/>
+                <a:cs typeface="Calibri" pitchFamily="34" charset="-120"/>
+              </a:rPr>
+              <a:t>直近1年の営業離職率は約24%。</a:t>
+            </a:r>
+            <a:endParaRPr lang="en-US" sz="1250" dirty="0"/>
+          </a:p>
+          <a:p>
+            <a:pPr indent="0" marL="0">
+              <a:lnSpc>
+                <a:spcPts val="1700"/>
+              </a:lnSpc>
+              <a:buNone/>
+            </a:pPr>
+            <a:r>
+              <a:rPr lang="en-US" sz="1250" dirty="0">
+                <a:solidFill>
+                  <a:srgbClr val="3D4756"/>
+                </a:solidFill>
+                <a:latin typeface="Calibri" pitchFamily="34" charset="0"/>
+                <a:ea typeface="Calibri" pitchFamily="34" charset="-122"/>
+                <a:cs typeface="Calibri" pitchFamily="34" charset="-120"/>
+              </a:rPr>
+              <a:t>成果主義で、立ち上がり期は大変です。だから、90日立ち上げプログラム・直属外メンター・初年度は歩合ゼロの月でも調整手当で下支えし、離職率15%以下へ改善に取り組んでいます。</a:t>
+            </a:r>
+            <a:endParaRPr lang="en-US" sz="1250" dirty="0"/>
+          </a:p>
+        </p:txBody>
+      </p:sp>
+      <p:sp>
+        <p:nvSpPr>
+          <p:cNvPr id="13" name="Text 11"/>
+          <p:cNvSpPr/>
+          <p:nvPr/>
+        </p:nvSpPr>
+        <p:spPr>
+          <a:xfrm>
+            <a:off x="566928" y="4069080"/>
+            <a:ext cx="11064240" cy="822960"/>
+          </a:xfrm>
+          <a:prstGeom prst="rect">
+            <a:avLst/>
+          </a:prstGeom>
+          <a:noFill/>
+          <a:ln/>
+        </p:spPr>
+        <p:txBody>
+          <a:bodyPr wrap="square" lIns="0" tIns="0" rIns="0" bIns="0" rtlCol="0" anchor="ctr"/>
+          <a:lstStyle/>
+          <a:p>
+            <a:pPr algn="ctr" indent="0" marL="0">
+              <a:lnSpc>
+                <a:spcPts val="2600"/>
+              </a:lnSpc>
+              <a:buNone/>
+            </a:pPr>
+            <a:r>
+              <a:rPr lang="en-US" sz="1800" b="1" i="1" dirty="0">
+                <a:solidFill>
+                  <a:srgbClr val="1B2A4A"/>
+                </a:solidFill>
+                <a:latin typeface="Cambria" pitchFamily="34" charset="0"/>
+                <a:ea typeface="Cambria" pitchFamily="34" charset="-122"/>
+                <a:cs typeface="Cambria" pitchFamily="34" charset="-120"/>
+              </a:rPr>
+              <a:t>数字を盛らない。ネガも隠さない。</a:t>
+            </a:r>
+            <a:pPr algn="ctr" indent="0" marL="0">
+              <a:lnSpc>
+                <a:spcPts val="2600"/>
+              </a:lnSpc>
+              <a:buNone/>
+            </a:pPr>
+            <a:r>
+              <a:rPr lang="en-US" sz="1800" i="1" dirty="0">
+                <a:solidFill>
+                  <a:srgbClr val="3D4756"/>
+                </a:solidFill>
+                <a:latin typeface="Cambria" pitchFamily="34" charset="0"/>
+                <a:ea typeface="Cambria" pitchFamily="34" charset="-122"/>
+                <a:cs typeface="Cambria" pitchFamily="34" charset="-120"/>
+              </a:rPr>
+              <a:t>　― それが、口コミの時代にいちばん強い採用ブランドだから。</a:t>
+            </a:r>
+            <a:endParaRPr lang="en-US" sz="1800" dirty="0"/>
+          </a:p>
+        </p:txBody>
+      </p:sp>
+      <p:sp>
+        <p:nvSpPr>
+          <p:cNvPr id="14" name="Text 12"/>
+          <p:cNvSpPr/>
+          <p:nvPr/>
+        </p:nvSpPr>
+        <p:spPr>
+          <a:xfrm>
+            <a:off x="566928" y="5029200"/>
+            <a:ext cx="11064240" cy="457200"/>
+          </a:xfrm>
+          <a:prstGeom prst="rect">
+            <a:avLst/>
+          </a:prstGeom>
+          <a:noFill/>
+          <a:ln/>
+        </p:spPr>
+        <p:txBody>
+          <a:bodyPr wrap="square" lIns="0" tIns="0" rIns="0" bIns="0" rtlCol="0" anchor="t"/>
+          <a:lstStyle/>
+          <a:p>
+            <a:pPr algn="ctr" indent="0" marL="0">
+              <a:buNone/>
+            </a:pPr>
+            <a:r>
+              <a:rPr lang="en-US" sz="1200" i="1" dirty="0">
+                <a:solidFill>
+                  <a:srgbClr val="8894A6"/>
+                </a:solidFill>
+                <a:latin typeface="Calibri" pitchFamily="34" charset="0"/>
+                <a:ea typeface="Calibri" pitchFamily="34" charset="-122"/>
+                <a:cs typeface="Calibri" pitchFamily="34" charset="-120"/>
+              </a:rPr>
+              <a:t>口コミサイト（OpenWork等）もぜひ見比べてください。良い点も課題も、面接で率直にお答えします。</a:t>
+            </a:r>
+            <a:endParaRPr lang="en-US" sz="1200" dirty="0"/>
+          </a:p>
+        </p:txBody>
+      </p:sp>
+      <p:sp>
+        <p:nvSpPr>
+          <p:cNvPr id="15" name="Text 13"/>
+          <p:cNvSpPr/>
+          <p:nvPr/>
+        </p:nvSpPr>
+        <p:spPr>
+          <a:xfrm>
+            <a:off x="566928" y="6473952"/>
+            <a:ext cx="10058400" cy="292608"/>
+          </a:xfrm>
+          <a:prstGeom prst="rect">
+            <a:avLst/>
+          </a:prstGeom>
+          <a:noFill/>
+          <a:ln/>
+        </p:spPr>
+        <p:txBody>
+          <a:bodyPr wrap="square" lIns="0" tIns="0" rIns="0" bIns="0" rtlCol="0" anchor="ctr"/>
+          <a:lstStyle/>
+          <a:p>
+            <a:pPr algn="l" indent="0" marL="0">
+              <a:buNone/>
+            </a:pPr>
+            <a:r>
+              <a:rPr lang="en-US" sz="850" dirty="0">
+                <a:solidFill>
+                  <a:srgbClr val="8894A6"/>
+                </a:solidFill>
+                <a:latin typeface="Calibri" pitchFamily="34" charset="0"/>
+                <a:ea typeface="Calibri" pitchFamily="34" charset="-122"/>
+                <a:cs typeface="Calibri" pitchFamily="34" charset="-120"/>
+              </a:rPr>
+              <a:t>社内数値：2026年7月時点の実績（第21期 営業人員計画より）。</a:t>
+            </a:r>
+            <a:endParaRPr lang="en-US" sz="850" dirty="0"/>
+          </a:p>
+        </p:txBody>
+      </p:sp>
+      <p:sp>
+        <p:nvSpPr>
+          <p:cNvPr id="16" name="Text 14"/>
+          <p:cNvSpPr/>
+          <p:nvPr/>
+        </p:nvSpPr>
+        <p:spPr>
+          <a:xfrm>
+            <a:off x="11185855" y="6473952"/>
+            <a:ext cx="457200" cy="274320"/>
+          </a:xfrm>
+          <a:prstGeom prst="rect">
+            <a:avLst/>
+          </a:prstGeom>
+          <a:noFill/>
+          <a:ln/>
+        </p:spPr>
+        <p:txBody>
+          <a:bodyPr wrap="square" lIns="0" tIns="0" rIns="0" bIns="0" rtlCol="0" anchor="ctr"/>
+          <a:lstStyle/>
+          <a:p>
+            <a:pPr algn="r" indent="0" marL="0">
+              <a:buNone/>
+            </a:pPr>
+            <a:r>
+              <a:rPr lang="en-US" sz="900" dirty="0">
+                <a:solidFill>
+                  <a:srgbClr val="8894A6"/>
+                </a:solidFill>
+                <a:latin typeface="Calibri" pitchFamily="34" charset="0"/>
+                <a:ea typeface="Calibri" pitchFamily="34" charset="-122"/>
+                <a:cs typeface="Calibri" pitchFamily="34" charset="-120"/>
+              </a:rPr>
+              <a:t>12</a:t>
+            </a:r>
+            <a:endParaRPr lang="en-US" sz="900" dirty="0"/>
+          </a:p>
+        </p:txBody>
+      </p:sp>
+    </p:spTree>
+  </p:cSld>
+  <p:clrMapOvr>
+    <a:masterClrMapping/>
+  </p:clrMapOvr>
+</p:sld>
+</file>
+
+<file path=ppt/slides/slide13.xml><?xml version="1.0" encoding="utf-8"?>
+<p:sld xmlns:a="http://schemas.openxmlformats.org/drawingml/2006/main" xmlns:r="http://schemas.openxmlformats.org/officeDocument/2006/relationships" xmlns:p="http://schemas.openxmlformats.org/presentationml/2006/main">
+  <p:cSld name="Slide 13">
     <p:bg>
       <p:bgPr>
         <a:solidFill>
@@ -4213,7 +6303,7 @@
                 <a:ea typeface="Calibri" pitchFamily="34" charset="-122"/>
                 <a:cs typeface="Calibri" pitchFamily="34" charset="-120"/>
               </a:rPr>
-              <a:t>12</a:t>
+              <a:t>13</a:t>
             </a:r>
             <a:endParaRPr lang="en-US" sz="900" dirty="0"/>
           </a:p>
@@ -4227,9 +6317,9 @@
 </p:sld>
 </file>
 
-<file path=ppt/slides/slide13.xml><?xml version="1.0" encoding="utf-8"?>
+<file path=ppt/slides/slide14.xml><?xml version="1.0" encoding="utf-8"?>
 <p:sld xmlns:a="http://schemas.openxmlformats.org/drawingml/2006/main" xmlns:r="http://schemas.openxmlformats.org/officeDocument/2006/relationships" xmlns:p="http://schemas.openxmlformats.org/presentationml/2006/main">
-  <p:cSld name="Slide 13">
+  <p:cSld name="Slide 14">
     <p:bg>
       <p:bgPr>
         <a:solidFill>
@@ -4397,7 +6487,7 @@
         <p:spPr>
           <a:xfrm>
             <a:off x="566928" y="1554480"/>
-            <a:ext cx="11064240" cy="3977640"/>
+            <a:ext cx="11064240" cy="4114800"/>
           </a:xfrm>
           <a:prstGeom prst="rect">
             <a:avLst/>
@@ -4411,16 +6501,16 @@
           <a:p>
             <a:pPr marL="342900" indent="-342900">
               <a:lnSpc>
-                <a:spcPts val="1600"/>
+                <a:spcPts val="1500"/>
               </a:lnSpc>
               <a:spcAft>
-                <a:spcPts val="600"/>
+                <a:spcPts val="500"/>
               </a:spcAft>
               <a:buSzPct val="100000"/>
               <a:buChar char="•"/>
             </a:pPr>
             <a:r>
-              <a:rPr lang="en-US" sz="1150" dirty="0">
+              <a:rPr lang="en-US" sz="1100" dirty="0">
                 <a:solidFill>
                   <a:srgbClr val="3D4756"/>
                 </a:solidFill>
@@ -4430,21 +6520,21 @@
               </a:rPr>
               <a:t>マイナビキャリアリサーチLab「2027年卒 大学生キャリア意向調査（AI利用）」2026年5月</a:t>
             </a:r>
-            <a:endParaRPr lang="en-US" sz="1150" dirty="0"/>
+            <a:endParaRPr lang="en-US" sz="1100" dirty="0"/>
           </a:p>
           <a:p>
             <a:pPr marL="342900" indent="-342900">
               <a:lnSpc>
-                <a:spcPts val="1600"/>
+                <a:spcPts val="1500"/>
               </a:lnSpc>
               <a:spcAft>
-                <a:spcPts val="600"/>
+                <a:spcPts val="500"/>
               </a:spcAft>
               <a:buSzPct val="100000"/>
               <a:buChar char="•"/>
             </a:pPr>
             <a:r>
-              <a:rPr lang="en-US" sz="1150" dirty="0">
+              <a:rPr lang="en-US" sz="1100" dirty="0">
                 <a:solidFill>
                   <a:srgbClr val="3D4756"/>
                 </a:solidFill>
@@ -4454,21 +6544,21 @@
               </a:rPr>
               <a:t>Axios「A white-collar bloodbath」（D.アモデイ発言）2025年5月 ／ IMF「Gen-AI and the Future of Work」2024年1月</a:t>
             </a:r>
-            <a:endParaRPr lang="en-US" sz="1150" dirty="0"/>
+            <a:endParaRPr lang="en-US" sz="1100" dirty="0"/>
           </a:p>
           <a:p>
             <a:pPr marL="342900" indent="-342900">
               <a:lnSpc>
-                <a:spcPts val="1600"/>
+                <a:spcPts val="1500"/>
               </a:lnSpc>
               <a:spcAft>
-                <a:spcPts val="600"/>
+                <a:spcPts val="500"/>
               </a:spcAft>
               <a:buSzPct val="100000"/>
               <a:buChar char="•"/>
             </a:pPr>
             <a:r>
-              <a:rPr lang="en-US" sz="1150" dirty="0">
+              <a:rPr lang="en-US" sz="1100" dirty="0">
                 <a:solidFill>
                   <a:srgbClr val="3D4756"/>
                 </a:solidFill>
@@ -4478,21 +6568,21 @@
               </a:rPr>
               <a:t>World Economic Forum「Future of Jobs Report 2025」2025年1月 ／ Goldman Sachs 2023 ／ McKinsey・OECD 2023</a:t>
             </a:r>
-            <a:endParaRPr lang="en-US" sz="1150" dirty="0"/>
+            <a:endParaRPr lang="en-US" sz="1100" dirty="0"/>
           </a:p>
           <a:p>
             <a:pPr marL="342900" indent="-342900">
               <a:lnSpc>
-                <a:spcPts val="1600"/>
+                <a:spcPts val="1500"/>
               </a:lnSpc>
               <a:spcAft>
-                <a:spcPts val="600"/>
+                <a:spcPts val="500"/>
               </a:spcAft>
               <a:buSzPct val="100000"/>
               <a:buChar char="•"/>
             </a:pPr>
             <a:r>
-              <a:rPr lang="en-US" sz="1150" dirty="0">
+              <a:rPr lang="en-US" sz="1100" dirty="0">
                 <a:solidFill>
                   <a:srgbClr val="3D4756"/>
                 </a:solidFill>
@@ -4500,23 +6590,23 @@
                 <a:ea typeface="Calibri" pitchFamily="34" charset="-122"/>
                 <a:cs typeface="Calibri" pitchFamily="34" charset="-120"/>
               </a:rPr>
-              <a:t>Stanford Digital Economy Lab「Canaries in the Coal Mine?」2025年8月（Brynjolfsson et al.）</a:t>
-            </a:r>
-            <a:endParaRPr lang="en-US" sz="1150" dirty="0"/>
+              <a:t>Stanford Digital Economy Lab「Canaries in the Coal Mine?」2025年8月（Brynjolfsson et al.）※3章のグラフは論文報告値の模式図</a:t>
+            </a:r>
+            <a:endParaRPr lang="en-US" sz="1100" dirty="0"/>
           </a:p>
           <a:p>
             <a:pPr marL="342900" indent="-342900">
               <a:lnSpc>
-                <a:spcPts val="1600"/>
+                <a:spcPts val="1500"/>
               </a:lnSpc>
               <a:spcAft>
-                <a:spcPts val="600"/>
+                <a:spcPts val="500"/>
               </a:spcAft>
               <a:buSzPct val="100000"/>
               <a:buChar char="•"/>
             </a:pPr>
             <a:r>
-              <a:rPr lang="en-US" sz="1150" dirty="0">
+              <a:rPr lang="en-US" sz="1100" dirty="0">
                 <a:solidFill>
                   <a:srgbClr val="3D4756"/>
                 </a:solidFill>
@@ -4524,23 +6614,23 @@
                 <a:ea typeface="Calibri" pitchFamily="34" charset="-122"/>
                 <a:cs typeface="Calibri" pitchFamily="34" charset="-120"/>
               </a:rPr>
-              <a:t>NY連銀「The Labor Market for Recent College Graduates」2026 ／ Challenger, Gray &amp; Christmas 2025 ／ Forbes・CNBC（Amazon/Microsoft）</a:t>
-            </a:r>
-            <a:endParaRPr lang="en-US" sz="1150" dirty="0"/>
+              <a:t>NY連銀「The Labor Market for Recent College Graduates」2026 ／ Challenger 2025 ／ Forbes・CNBC（Amazon/Microsoft）</a:t>
+            </a:r>
+            <a:endParaRPr lang="en-US" sz="1100" dirty="0"/>
           </a:p>
           <a:p>
             <a:pPr marL="342900" indent="-342900">
               <a:lnSpc>
-                <a:spcPts val="1600"/>
+                <a:spcPts val="1500"/>
               </a:lnSpc>
               <a:spcAft>
-                <a:spcPts val="600"/>
+                <a:spcPts val="500"/>
               </a:spcAft>
               <a:buSzPct val="100000"/>
               <a:buChar char="•"/>
             </a:pPr>
             <a:r>
-              <a:rPr lang="en-US" sz="1150" dirty="0">
+              <a:rPr lang="en-US" sz="1100" dirty="0">
                 <a:solidFill>
                   <a:srgbClr val="3D4756"/>
                 </a:solidFill>
@@ -4550,21 +6640,21 @@
               </a:rPr>
               <a:t>Frey &amp; Osborne (2013) ／ 野村総合研究所×オックスフォード大学 (2015)</a:t>
             </a:r>
-            <a:endParaRPr lang="en-US" sz="1150" dirty="0"/>
+            <a:endParaRPr lang="en-US" sz="1100" dirty="0"/>
           </a:p>
           <a:p>
             <a:pPr marL="342900" indent="-342900">
               <a:lnSpc>
-                <a:spcPts val="1600"/>
+                <a:spcPts val="1500"/>
               </a:lnSpc>
               <a:spcAft>
-                <a:spcPts val="600"/>
+                <a:spcPts val="500"/>
               </a:spcAft>
               <a:buSzPct val="100000"/>
               <a:buChar char="•"/>
             </a:pPr>
             <a:r>
-              <a:rPr lang="en-US" sz="1150" dirty="0">
+              <a:rPr lang="en-US" sz="1100" dirty="0">
                 <a:solidFill>
                   <a:srgbClr val="3D4756"/>
                 </a:solidFill>
@@ -4574,21 +6664,21 @@
               </a:rPr>
               <a:t>Anthropic Economic Index (2025-) ／ OpenAI「GPTs are GPTs」(2023)</a:t>
             </a:r>
-            <a:endParaRPr lang="en-US" sz="1150" dirty="0"/>
+            <a:endParaRPr lang="en-US" sz="1100" dirty="0"/>
           </a:p>
           <a:p>
             <a:pPr marL="342900" indent="-342900">
               <a:lnSpc>
-                <a:spcPts val="1600"/>
+                <a:spcPts val="1500"/>
               </a:lnSpc>
               <a:spcAft>
-                <a:spcPts val="600"/>
+                <a:spcPts val="500"/>
               </a:spcAft>
               <a:buSzPct val="100000"/>
               <a:buChar char="•"/>
             </a:pPr>
             <a:r>
-              <a:rPr lang="en-US" sz="1150" dirty="0">
+              <a:rPr lang="en-US" sz="1100" dirty="0">
                 <a:solidFill>
                   <a:srgbClr val="3D4756"/>
                 </a:solidFill>
@@ -4598,21 +6688,21 @@
               </a:rPr>
               <a:t>Salesforce「State of Sales」第7版, 2026 ／ HubSpot「日本の営業実態調査」2024</a:t>
             </a:r>
-            <a:endParaRPr lang="en-US" sz="1150" dirty="0"/>
+            <a:endParaRPr lang="en-US" sz="1100" dirty="0"/>
           </a:p>
           <a:p>
             <a:pPr marL="342900" indent="-342900">
               <a:lnSpc>
-                <a:spcPts val="1600"/>
+                <a:spcPts val="1500"/>
               </a:lnSpc>
               <a:spcAft>
-                <a:spcPts val="600"/>
+                <a:spcPts val="500"/>
               </a:spcAft>
               <a:buSzPct val="100000"/>
               <a:buChar char="•"/>
             </a:pPr>
             <a:r>
-              <a:rPr lang="en-US" sz="1150" dirty="0">
+              <a:rPr lang="en-US" sz="1100" dirty="0">
                 <a:solidFill>
                   <a:srgbClr val="3D4756"/>
                 </a:solidFill>
@@ -4620,23 +6710,23 @@
                 <a:ea typeface="Calibri" pitchFamily="34" charset="-122"/>
                 <a:cs typeface="Calibri" pitchFamily="34" charset="-120"/>
               </a:rPr>
-              <a:t>リクルートワークス研究所「未来予測2040」2023 ／ 総務省「情報通信白書」令和7年版</a:t>
-            </a:r>
-            <a:endParaRPr lang="en-US" sz="1150" dirty="0"/>
+              <a:t>リクルートワークス研究所「未来予測2040」2023 ／ 総務省「情報通信白書」令和7年版（2024年度調査）</a:t>
+            </a:r>
+            <a:endParaRPr lang="en-US" sz="1100" dirty="0"/>
           </a:p>
           <a:p>
             <a:pPr marL="342900" indent="-342900">
               <a:lnSpc>
-                <a:spcPts val="1600"/>
+                <a:spcPts val="1500"/>
               </a:lnSpc>
               <a:spcAft>
-                <a:spcPts val="600"/>
+                <a:spcPts val="500"/>
               </a:spcAft>
               <a:buSzPct val="100000"/>
               <a:buChar char="•"/>
             </a:pPr>
             <a:r>
-              <a:rPr lang="en-US" sz="1150" dirty="0">
+              <a:rPr lang="en-US" sz="1100" dirty="0">
                 <a:solidFill>
                   <a:srgbClr val="3D4756"/>
                 </a:solidFill>
@@ -4644,23 +6734,23 @@
                 <a:ea typeface="Calibri" pitchFamily="34" charset="-122"/>
                 <a:cs typeface="Calibri" pitchFamily="34" charset="-120"/>
               </a:rPr>
-              <a:t>国立社会保障・人口問題研究所「将来推計人口（令和5年推計）」／ 経済産業省「未来人材ビジョン」2022</a:t>
-            </a:r>
-            <a:endParaRPr lang="en-US" sz="1150" dirty="0"/>
+              <a:t>国立社会保障・人口問題研究所「将来推計人口（令和5年推計）」出生中位 ／ 経済産業省「未来人材ビジョン」2022</a:t>
+            </a:r>
+            <a:endParaRPr lang="en-US" sz="1100" dirty="0"/>
           </a:p>
           <a:p>
             <a:pPr marL="342900" indent="-342900">
               <a:lnSpc>
-                <a:spcPts val="1600"/>
+                <a:spcPts val="1500"/>
               </a:lnSpc>
               <a:spcAft>
-                <a:spcPts val="600"/>
+                <a:spcPts val="500"/>
               </a:spcAft>
               <a:buSzPct val="100000"/>
               <a:buChar char="•"/>
             </a:pPr>
             <a:r>
-              <a:rPr lang="en-US" sz="1150" dirty="0">
+              <a:rPr lang="en-US" sz="1100" dirty="0">
                 <a:solidFill>
                   <a:srgbClr val="3D4756"/>
                 </a:solidFill>
@@ -4670,7 +6760,31 @@
               </a:rPr>
               <a:t>厚生労働省「一般職業紹介状況」／ 総務省「住民基本台帳人口移動報告2025」／ 国交省「住宅市場動向調査 令和6年度」</a:t>
             </a:r>
-            <a:endParaRPr lang="en-US" sz="1150" dirty="0"/>
+            <a:endParaRPr lang="en-US" sz="1100" dirty="0"/>
+          </a:p>
+          <a:p>
+            <a:pPr marL="342900" indent="-342900">
+              <a:lnSpc>
+                <a:spcPts val="1500"/>
+              </a:lnSpc>
+              <a:spcAft>
+                <a:spcPts val="500"/>
+              </a:spcAft>
+              <a:buSzPct val="100000"/>
+              <a:buChar char="•"/>
+            </a:pPr>
+            <a:r>
+              <a:rPr lang="en-US" sz="1100" dirty="0">
+                <a:solidFill>
+                  <a:srgbClr val="3D4756"/>
+                </a:solidFill>
+                <a:latin typeface="Calibri" pitchFamily="34" charset="0"/>
+                <a:ea typeface="Calibri" pitchFamily="34" charset="-122"/>
+                <a:cs typeface="Calibri" pitchFamily="34" charset="-120"/>
+              </a:rPr>
+              <a:t>社内数値：東京ビッグハウス 第21期営業人員計画・採用媒体公表値（2026年7月時点）</a:t>
+            </a:r>
+            <a:endParaRPr lang="en-US" sz="1100" dirty="0"/>
           </a:p>
         </p:txBody>
       </p:sp>
@@ -4682,8 +6796,8 @@
         </p:nvSpPr>
         <p:spPr>
           <a:xfrm>
-            <a:off x="566928" y="5623560"/>
-            <a:ext cx="11064240" cy="731520"/>
+            <a:off x="566928" y="5715000"/>
+            <a:ext cx="11064240" cy="548640"/>
           </a:xfrm>
           <a:prstGeom prst="rect">
             <a:avLst/>
@@ -4710,7 +6824,7 @@
                 <a:ea typeface="Calibri" pitchFamily="34" charset="-122"/>
                 <a:cs typeface="Calibri" pitchFamily="34" charset="-120"/>
               </a:rPr>
-              <a:t>注：外部データは検索結果の一次ソース引用に基づく。確定時に各原典URLで数値・調査年・母数を最終確認。数値の多くは“影響／〜し得る”であり確定した消滅数ではない点、社内実績（【差し込み】欄）は実データで置換する点に留意。</a:t>
+              <a:t>注：外部データは検索結果の一次ソース引用に基づく。確定時に各原典URLで数値・調査年・母数を最終確認。数値の多くは“影響／〜し得る”であり確定した消滅数ではない点に留意。</a:t>
             </a:r>
             <a:endParaRPr lang="en-US" sz="1050" dirty="0"/>
           </a:p>
@@ -4749,7 +6863,7 @@
                 <a:ea typeface="Calibri" pitchFamily="34" charset="-122"/>
                 <a:cs typeface="Calibri" pitchFamily="34" charset="-120"/>
               </a:rPr>
-              <a:t>13</a:t>
+              <a:t>14</a:t>
             </a:r>
             <a:endParaRPr lang="en-US" sz="900" dirty="0"/>
           </a:p>
@@ -6484,11 +8598,11 @@
         <p:spPr>
           <a:xfrm>
             <a:off x="566928" y="1572768"/>
-            <a:ext cx="3566160" cy="2148840"/>
+            <a:ext cx="5623560" cy="2852928"/>
           </a:xfrm>
           <a:prstGeom prst="roundRect">
             <a:avLst>
-              <a:gd name="adj" fmla="val 3830"/>
+              <a:gd name="adj" fmla="val 2885"/>
             </a:avLst>
           </a:prstGeom>
           <a:solidFill>
@@ -6504,113 +8618,48 @@
           </a:effectLst>
         </p:spPr>
       </p:sp>
-      <p:sp>
-        <p:nvSpPr>
-          <p:cNvPr id="7" name="Text 5"/>
-          <p:cNvSpPr/>
-          <p:nvPr/>
-        </p:nvSpPr>
-        <p:spPr>
-          <a:xfrm>
-            <a:off x="841248" y="1773936"/>
-            <a:ext cx="3017520" cy="822960"/>
-          </a:xfrm>
-          <a:prstGeom prst="rect">
-            <a:avLst/>
-          </a:prstGeom>
-          <a:noFill/>
-          <a:ln/>
-        </p:spPr>
-        <p:txBody>
-          <a:bodyPr wrap="square" lIns="0" tIns="0" rIns="0" bIns="0" rtlCol="0" anchor="ctr"/>
-          <a:lstStyle/>
-          <a:p>
-            <a:pPr algn="l" indent="0" marL="0">
-              <a:buNone/>
-            </a:pPr>
-            <a:r>
-              <a:rPr lang="en-US" sz="4000" b="1" dirty="0">
-                <a:solidFill>
-                  <a:srgbClr val="1C7293"/>
-                </a:solidFill>
-                <a:latin typeface="Cambria" pitchFamily="34" charset="0"/>
-                <a:ea typeface="Cambria" pitchFamily="34" charset="-122"/>
-                <a:cs typeface="Cambria" pitchFamily="34" charset="-120"/>
-              </a:rPr>
-              <a:t>13%</a:t>
-            </a:r>
-            <a:endParaRPr lang="en-US" sz="4000" dirty="0"/>
-          </a:p>
-        </p:txBody>
-      </p:sp>
-      <p:sp>
-        <p:nvSpPr>
-          <p:cNvPr id="8" name="Text 6"/>
-          <p:cNvSpPr/>
-          <p:nvPr/>
-        </p:nvSpPr>
-        <p:spPr>
-          <a:xfrm>
-            <a:off x="841248" y="2596896"/>
-            <a:ext cx="3017520" cy="822960"/>
-          </a:xfrm>
-          <a:prstGeom prst="rect">
-            <a:avLst/>
-          </a:prstGeom>
-          <a:noFill/>
-          <a:ln/>
-        </p:spPr>
-        <p:txBody>
-          <a:bodyPr wrap="square" lIns="0" tIns="0" rIns="0" bIns="0" rtlCol="0" anchor="t"/>
+      <p:graphicFrame>
+        <p:nvGraphicFramePr>
+          <p:cNvPr id="7" name="Chart 0" descr=""/>
+          <p:cNvGraphicFramePr/>
+          <p:nvPr/>
+        </p:nvGraphicFramePr>
+        <p:xfrm>
+          <a:off x="749808" y="1709928"/>
+          <a:ext cx="5257800" cy="2468880"/>
+        </p:xfrm>
+        <a:graphic xmlns:a="http://schemas.openxmlformats.org/drawingml/2006/main">
+          <a:graphicData uri="http://schemas.openxmlformats.org/drawingml/2006/chart">
+            <c:chart xmlns:c="http://schemas.openxmlformats.org/drawingml/2006/chart" r:id="rId1"/>
+          </a:graphicData>
+        </a:graphic>
+      </p:graphicFrame>
+      <p:sp>
+        <p:nvSpPr>
+          <p:cNvPr id="8" name="Text 5"/>
+          <p:cNvSpPr/>
+          <p:nvPr/>
+        </p:nvSpPr>
+        <p:spPr>
+          <a:xfrm>
+            <a:off x="795528" y="4151376"/>
+            <a:ext cx="5166360" cy="256032"/>
+          </a:xfrm>
+          <a:prstGeom prst="rect">
+            <a:avLst/>
+          </a:prstGeom>
+          <a:noFill/>
+          <a:ln/>
+        </p:spPr>
+        <p:txBody>
+          <a:bodyPr wrap="square" lIns="0" tIns="0" rIns="0" bIns="0" rtlCol="0" anchor="ctr"/>
           <a:lstStyle/>
           <a:p>
             <a:pPr indent="0" marL="0">
-              <a:lnSpc>
-                <a:spcPts val="1600"/>
-              </a:lnSpc>
-              <a:buNone/>
-            </a:pPr>
-            <a:r>
-              <a:rPr lang="en-US" sz="1250" dirty="0">
-                <a:solidFill>
-                  <a:srgbClr val="1B2430"/>
-                </a:solidFill>
-                <a:latin typeface="Calibri" pitchFamily="34" charset="0"/>
-                <a:ea typeface="Calibri" pitchFamily="34" charset="-122"/>
-                <a:cs typeface="Calibri" pitchFamily="34" charset="-120"/>
-              </a:rPr>
-              <a:t>AIに晒されやすい職種で、22〜25歳の雇用が相対的に減少（若手ソフト開発者はピーク比約20%減）</a:t>
-            </a:r>
-            <a:endParaRPr lang="en-US" sz="1250" dirty="0"/>
-          </a:p>
-        </p:txBody>
-      </p:sp>
-      <p:sp>
-        <p:nvSpPr>
-          <p:cNvPr id="9" name="Text 7"/>
-          <p:cNvSpPr/>
-          <p:nvPr/>
-        </p:nvSpPr>
-        <p:spPr>
-          <a:xfrm>
-            <a:off x="841248" y="3392424"/>
-            <a:ext cx="3017520" cy="256032"/>
-          </a:xfrm>
-          <a:prstGeom prst="rect">
-            <a:avLst/>
-          </a:prstGeom>
-          <a:noFill/>
-          <a:ln/>
-        </p:spPr>
-        <p:txBody>
-          <a:bodyPr wrap="square" lIns="0" tIns="0" rIns="0" bIns="0" rtlCol="0" anchor="ctr"/>
-          <a:lstStyle/>
-          <a:p>
-            <a:pPr indent="0" marL="0">
-              <a:buNone/>
-            </a:pPr>
-            <a:r>
-              <a:rPr lang="en-US" sz="950" i="1" dirty="0">
+              <a:buNone/>
+            </a:pPr>
+            <a:r>
+              <a:rPr lang="en-US" sz="900" i="1" dirty="0">
                 <a:solidFill>
                   <a:srgbClr val="8894A6"/>
                 </a:solidFill>
@@ -6618,30 +8667,30 @@
                 <a:ea typeface="Calibri" pitchFamily="34" charset="-122"/>
                 <a:cs typeface="Calibri" pitchFamily="34" charset="-120"/>
               </a:rPr>
-              <a:t>スタンフォード大, 2025</a:t>
-            </a:r>
-            <a:endParaRPr lang="en-US" sz="950" dirty="0"/>
-          </a:p>
-        </p:txBody>
-      </p:sp>
-      <p:sp>
-        <p:nvSpPr>
-          <p:cNvPr id="10" name="Shape 8"/>
-          <p:cNvSpPr/>
-          <p:nvPr/>
-        </p:nvSpPr>
-        <p:spPr>
-          <a:xfrm>
-            <a:off x="4315968" y="1572768"/>
-            <a:ext cx="3566160" cy="2148840"/>
+              <a:t>※模式図：スタンフォード大論文の報告値（若手はピーク比約20%減・年長層は安定〜微増）をもとに作成</a:t>
+            </a:r>
+            <a:endParaRPr lang="en-US" sz="900" dirty="0"/>
+          </a:p>
+        </p:txBody>
+      </p:sp>
+      <p:sp>
+        <p:nvSpPr>
+          <p:cNvPr id="9" name="Shape 6"/>
+          <p:cNvSpPr/>
+          <p:nvPr/>
+        </p:nvSpPr>
+        <p:spPr>
+          <a:xfrm>
+            <a:off x="6382512" y="1572768"/>
+            <a:ext cx="5230368" cy="859536"/>
           </a:xfrm>
           <a:prstGeom prst="roundRect">
             <a:avLst>
-              <a:gd name="adj" fmla="val 3830"/>
+              <a:gd name="adj" fmla="val 9574"/>
             </a:avLst>
           </a:prstGeom>
           <a:solidFill>
-            <a:srgbClr val="FBEFD9"/>
+            <a:srgbClr val="FFFFFF"/>
           </a:solidFill>
           <a:ln/>
           <a:effectLst>
@@ -6655,14 +8704,14 @@
       </p:sp>
       <p:sp>
         <p:nvSpPr>
-          <p:cNvPr id="11" name="Text 9"/>
-          <p:cNvSpPr/>
-          <p:nvPr/>
-        </p:nvSpPr>
-        <p:spPr>
-          <a:xfrm>
-            <a:off x="4590288" y="1773936"/>
-            <a:ext cx="3017520" cy="822960"/>
+          <p:cNvPr id="10" name="Text 7"/>
+          <p:cNvSpPr/>
+          <p:nvPr/>
+        </p:nvSpPr>
+        <p:spPr>
+          <a:xfrm>
+            <a:off x="6656832" y="1645920"/>
+            <a:ext cx="1737360" cy="713232"/>
           </a:xfrm>
           <a:prstGeom prst="rect">
             <a:avLst/>
@@ -6678,49 +8727,49 @@
               <a:buNone/>
             </a:pPr>
             <a:r>
-              <a:rPr lang="en-US" sz="4000" b="1" dirty="0">
-                <a:solidFill>
-                  <a:srgbClr val="C9871F"/>
+              <a:rPr lang="en-US" sz="2800" b="1" dirty="0">
+                <a:solidFill>
+                  <a:srgbClr val="1C7293"/>
                 </a:solidFill>
                 <a:latin typeface="Cambria" pitchFamily="34" charset="0"/>
                 <a:ea typeface="Cambria" pitchFamily="34" charset="-122"/>
                 <a:cs typeface="Cambria" pitchFamily="34" charset="-120"/>
               </a:rPr>
-              <a:t>5.6%</a:t>
-            </a:r>
-            <a:endParaRPr lang="en-US" sz="4000" dirty="0"/>
-          </a:p>
-        </p:txBody>
-      </p:sp>
-      <p:sp>
-        <p:nvSpPr>
-          <p:cNvPr id="12" name="Text 10"/>
-          <p:cNvSpPr/>
-          <p:nvPr/>
-        </p:nvSpPr>
-        <p:spPr>
-          <a:xfrm>
-            <a:off x="4590288" y="2596896"/>
-            <a:ext cx="3017520" cy="822960"/>
-          </a:xfrm>
-          <a:prstGeom prst="rect">
-            <a:avLst/>
-          </a:prstGeom>
-          <a:noFill/>
-          <a:ln/>
-        </p:spPr>
-        <p:txBody>
-          <a:bodyPr wrap="square" lIns="0" tIns="0" rIns="0" bIns="0" rtlCol="0" anchor="t"/>
+              <a:t>13%</a:t>
+            </a:r>
+            <a:endParaRPr lang="en-US" sz="2800" dirty="0"/>
+          </a:p>
+        </p:txBody>
+      </p:sp>
+      <p:sp>
+        <p:nvSpPr>
+          <p:cNvPr id="11" name="Text 8"/>
+          <p:cNvSpPr/>
+          <p:nvPr/>
+        </p:nvSpPr>
+        <p:spPr>
+          <a:xfrm>
+            <a:off x="8348472" y="1645920"/>
+            <a:ext cx="2990088" cy="713232"/>
+          </a:xfrm>
+          <a:prstGeom prst="rect">
+            <a:avLst/>
+          </a:prstGeom>
+          <a:noFill/>
+          <a:ln/>
+        </p:spPr>
+        <p:txBody>
+          <a:bodyPr wrap="square" lIns="0" tIns="0" rIns="0" bIns="0" rtlCol="0" anchor="ctr"/>
           <a:lstStyle/>
           <a:p>
             <a:pPr indent="0" marL="0">
               <a:lnSpc>
-                <a:spcPts val="1600"/>
+                <a:spcPts val="1400"/>
               </a:lnSpc>
               <a:buNone/>
             </a:pPr>
             <a:r>
-              <a:rPr lang="en-US" sz="1250" dirty="0">
+              <a:rPr lang="en-US" sz="1100" dirty="0">
                 <a:solidFill>
                   <a:srgbClr val="1B2430"/>
                 </a:solidFill>
@@ -6728,38 +8777,19 @@
                 <a:ea typeface="Calibri" pitchFamily="34" charset="-122"/>
                 <a:cs typeface="Calibri" pitchFamily="34" charset="-120"/>
               </a:rPr>
-              <a:t>米・新卒(22〜27歳)の失業率。全体(約4%)を上回る“歴史的逆転”</a:t>
-            </a:r>
-            <a:endParaRPr lang="en-US" sz="1250" dirty="0"/>
-          </a:p>
-        </p:txBody>
-      </p:sp>
-      <p:sp>
-        <p:nvSpPr>
-          <p:cNvPr id="13" name="Text 11"/>
-          <p:cNvSpPr/>
-          <p:nvPr/>
-        </p:nvSpPr>
-        <p:spPr>
-          <a:xfrm>
-            <a:off x="4590288" y="3392424"/>
-            <a:ext cx="3017520" cy="256032"/>
-          </a:xfrm>
-          <a:prstGeom prst="rect">
-            <a:avLst/>
-          </a:prstGeom>
-          <a:noFill/>
-          <a:ln/>
-        </p:spPr>
-        <p:txBody>
-          <a:bodyPr wrap="square" lIns="0" tIns="0" rIns="0" bIns="0" rtlCol="0" anchor="ctr"/>
-          <a:lstStyle/>
+              <a:t>AIに晒されやすい職種で22〜25歳の雇用が“相対的に”減少</a:t>
+            </a:r>
+            <a:endParaRPr lang="en-US" sz="1100" dirty="0"/>
+          </a:p>
           <a:p>
             <a:pPr indent="0" marL="0">
-              <a:buNone/>
-            </a:pPr>
-            <a:r>
-              <a:rPr lang="en-US" sz="950" i="1" dirty="0">
+              <a:lnSpc>
+                <a:spcPts val="1400"/>
+              </a:lnSpc>
+              <a:buNone/>
+            </a:pPr>
+            <a:r>
+              <a:rPr lang="en-US" sz="900" i="1" dirty="0">
                 <a:solidFill>
                   <a:srgbClr val="8894A6"/>
                 </a:solidFill>
@@ -6767,30 +8797,30 @@
                 <a:ea typeface="Calibri" pitchFamily="34" charset="-122"/>
                 <a:cs typeface="Calibri" pitchFamily="34" charset="-120"/>
               </a:rPr>
-              <a:t>NY連銀, 2026</a:t>
-            </a:r>
-            <a:endParaRPr lang="en-US" sz="950" dirty="0"/>
-          </a:p>
-        </p:txBody>
-      </p:sp>
-      <p:sp>
-        <p:nvSpPr>
-          <p:cNvPr id="14" name="Shape 12"/>
-          <p:cNvSpPr/>
-          <p:nvPr/>
-        </p:nvSpPr>
-        <p:spPr>
-          <a:xfrm>
-            <a:off x="8065008" y="1572768"/>
-            <a:ext cx="3566160" cy="2148840"/>
+              <a:t>スタンフォード大, 2025</a:t>
+            </a:r>
+            <a:endParaRPr lang="en-US" sz="1100" dirty="0"/>
+          </a:p>
+        </p:txBody>
+      </p:sp>
+      <p:sp>
+        <p:nvSpPr>
+          <p:cNvPr id="12" name="Shape 9"/>
+          <p:cNvSpPr/>
+          <p:nvPr/>
+        </p:nvSpPr>
+        <p:spPr>
+          <a:xfrm>
+            <a:off x="6382512" y="2542032"/>
+            <a:ext cx="5230368" cy="859536"/>
           </a:xfrm>
           <a:prstGeom prst="roundRect">
             <a:avLst>
-              <a:gd name="adj" fmla="val 3830"/>
+              <a:gd name="adj" fmla="val 9574"/>
             </a:avLst>
           </a:prstGeom>
           <a:solidFill>
-            <a:srgbClr val="F7EBEA"/>
+            <a:srgbClr val="FBEFD9"/>
           </a:solidFill>
           <a:ln/>
           <a:effectLst>
@@ -6804,14 +8834,14 @@
       </p:sp>
       <p:sp>
         <p:nvSpPr>
-          <p:cNvPr id="15" name="Text 13"/>
-          <p:cNvSpPr/>
-          <p:nvPr/>
-        </p:nvSpPr>
-        <p:spPr>
-          <a:xfrm>
-            <a:off x="8339328" y="1773936"/>
-            <a:ext cx="3017520" cy="822960"/>
+          <p:cNvPr id="13" name="Text 10"/>
+          <p:cNvSpPr/>
+          <p:nvPr/>
+        </p:nvSpPr>
+        <p:spPr>
+          <a:xfrm>
+            <a:off x="6656832" y="2615184"/>
+            <a:ext cx="1737360" cy="713232"/>
           </a:xfrm>
           <a:prstGeom prst="rect">
             <a:avLst/>
@@ -6827,49 +8857,49 @@
               <a:buNone/>
             </a:pPr>
             <a:r>
-              <a:rPr lang="en-US" sz="4000" b="1" dirty="0">
-                <a:solidFill>
-                  <a:srgbClr val="B3524C"/>
+              <a:rPr lang="en-US" sz="2800" b="1" dirty="0">
+                <a:solidFill>
+                  <a:srgbClr val="C9871F"/>
                 </a:solidFill>
                 <a:latin typeface="Cambria" pitchFamily="34" charset="0"/>
                 <a:ea typeface="Cambria" pitchFamily="34" charset="-122"/>
                 <a:cs typeface="Cambria" pitchFamily="34" charset="-120"/>
               </a:rPr>
-              <a:t>14,000人</a:t>
-            </a:r>
-            <a:endParaRPr lang="en-US" sz="4000" dirty="0"/>
-          </a:p>
-        </p:txBody>
-      </p:sp>
-      <p:sp>
-        <p:nvSpPr>
-          <p:cNvPr id="16" name="Text 14"/>
-          <p:cNvSpPr/>
-          <p:nvPr/>
-        </p:nvSpPr>
-        <p:spPr>
-          <a:xfrm>
-            <a:off x="8339328" y="2596896"/>
-            <a:ext cx="3017520" cy="822960"/>
-          </a:xfrm>
-          <a:prstGeom prst="rect">
-            <a:avLst/>
-          </a:prstGeom>
-          <a:noFill/>
-          <a:ln/>
-        </p:spPr>
-        <p:txBody>
-          <a:bodyPr wrap="square" lIns="0" tIns="0" rIns="0" bIns="0" rtlCol="0" anchor="t"/>
+              <a:t>5.6%</a:t>
+            </a:r>
+            <a:endParaRPr lang="en-US" sz="2800" dirty="0"/>
+          </a:p>
+        </p:txBody>
+      </p:sp>
+      <p:sp>
+        <p:nvSpPr>
+          <p:cNvPr id="14" name="Text 11"/>
+          <p:cNvSpPr/>
+          <p:nvPr/>
+        </p:nvSpPr>
+        <p:spPr>
+          <a:xfrm>
+            <a:off x="8348472" y="2615184"/>
+            <a:ext cx="2990088" cy="713232"/>
+          </a:xfrm>
+          <a:prstGeom prst="rect">
+            <a:avLst/>
+          </a:prstGeom>
+          <a:noFill/>
+          <a:ln/>
+        </p:spPr>
+        <p:txBody>
+          <a:bodyPr wrap="square" lIns="0" tIns="0" rIns="0" bIns="0" rtlCol="0" anchor="ctr"/>
           <a:lstStyle/>
           <a:p>
             <a:pPr indent="0" marL="0">
               <a:lnSpc>
-                <a:spcPts val="1600"/>
+                <a:spcPts val="1400"/>
               </a:lnSpc>
               <a:buNone/>
             </a:pPr>
             <a:r>
-              <a:rPr lang="en-US" sz="1250" dirty="0">
+              <a:rPr lang="en-US" sz="1100" dirty="0">
                 <a:solidFill>
                   <a:srgbClr val="1B2430"/>
                 </a:solidFill>
@@ -6877,38 +8907,19 @@
                 <a:ea typeface="Calibri" pitchFamily="34" charset="-122"/>
                 <a:cs typeface="Calibri" pitchFamily="34" charset="-120"/>
               </a:rPr>
-              <a:t>Amazonが2025年に削減。CEO「AIで、今より少ない人数で仕事が回る」</a:t>
-            </a:r>
-            <a:endParaRPr lang="en-US" sz="1250" dirty="0"/>
-          </a:p>
-        </p:txBody>
-      </p:sp>
-      <p:sp>
-        <p:nvSpPr>
-          <p:cNvPr id="17" name="Text 15"/>
-          <p:cNvSpPr/>
-          <p:nvPr/>
-        </p:nvSpPr>
-        <p:spPr>
-          <a:xfrm>
-            <a:off x="8339328" y="3392424"/>
-            <a:ext cx="3017520" cy="256032"/>
-          </a:xfrm>
-          <a:prstGeom prst="rect">
-            <a:avLst/>
-          </a:prstGeom>
-          <a:noFill/>
-          <a:ln/>
-        </p:spPr>
-        <p:txBody>
-          <a:bodyPr wrap="square" lIns="0" tIns="0" rIns="0" bIns="0" rtlCol="0" anchor="ctr"/>
-          <a:lstStyle/>
+              <a:t>米・新卒(22〜27歳)の失業率。全体(約4%)を上回る“歴史的逆転”</a:t>
+            </a:r>
+            <a:endParaRPr lang="en-US" sz="1100" dirty="0"/>
+          </a:p>
           <a:p>
             <a:pPr indent="0" marL="0">
-              <a:buNone/>
-            </a:pPr>
-            <a:r>
-              <a:rPr lang="en-US" sz="950" i="1" dirty="0">
+              <a:lnSpc>
+                <a:spcPts val="1400"/>
+              </a:lnSpc>
+              <a:buNone/>
+            </a:pPr>
+            <a:r>
+              <a:rPr lang="en-US" sz="900" i="1" dirty="0">
                 <a:solidFill>
                   <a:srgbClr val="8894A6"/>
                 </a:solidFill>
@@ -6916,30 +8927,30 @@
                 <a:ea typeface="Calibri" pitchFamily="34" charset="-122"/>
                 <a:cs typeface="Calibri" pitchFamily="34" charset="-120"/>
               </a:rPr>
-              <a:t>Forbes/CNBC, 2025</a:t>
-            </a:r>
-            <a:endParaRPr lang="en-US" sz="950" dirty="0"/>
-          </a:p>
-        </p:txBody>
-      </p:sp>
-      <p:sp>
-        <p:nvSpPr>
-          <p:cNvPr id="18" name="Shape 16"/>
-          <p:cNvSpPr/>
-          <p:nvPr/>
-        </p:nvSpPr>
-        <p:spPr>
-          <a:xfrm>
-            <a:off x="566928" y="4005072"/>
-            <a:ext cx="11064240" cy="1572768"/>
+              <a:t>NY連銀, 2026</a:t>
+            </a:r>
+            <a:endParaRPr lang="en-US" sz="1100" dirty="0"/>
+          </a:p>
+        </p:txBody>
+      </p:sp>
+      <p:sp>
+        <p:nvSpPr>
+          <p:cNvPr id="15" name="Shape 12"/>
+          <p:cNvSpPr/>
+          <p:nvPr/>
+        </p:nvSpPr>
+        <p:spPr>
+          <a:xfrm>
+            <a:off x="6382512" y="3511296"/>
+            <a:ext cx="5230368" cy="859536"/>
           </a:xfrm>
           <a:prstGeom prst="roundRect">
             <a:avLst>
-              <a:gd name="adj" fmla="val 5233"/>
+              <a:gd name="adj" fmla="val 9574"/>
             </a:avLst>
           </a:prstGeom>
           <a:solidFill>
-            <a:srgbClr val="1B2A4A"/>
+            <a:srgbClr val="F7EBEA"/>
           </a:solidFill>
           <a:ln/>
           <a:effectLst>
@@ -6953,72 +8964,202 @@
       </p:sp>
       <p:sp>
         <p:nvSpPr>
-          <p:cNvPr id="19" name="Text 17"/>
-          <p:cNvSpPr/>
-          <p:nvPr/>
-        </p:nvSpPr>
-        <p:spPr>
-          <a:xfrm>
-            <a:off x="978408" y="4169664"/>
-            <a:ext cx="10241280" cy="457200"/>
-          </a:xfrm>
-          <a:prstGeom prst="rect">
-            <a:avLst/>
-          </a:prstGeom>
-          <a:noFill/>
-          <a:ln/>
-        </p:spPr>
-        <p:txBody>
-          <a:bodyPr wrap="square" lIns="0" tIns="0" rIns="0" bIns="0" rtlCol="0" anchor="ctr"/>
-          <a:lstStyle/>
-          <a:p>
-            <a:pPr indent="0" marL="0">
-              <a:buNone/>
-            </a:pPr>
-            <a:r>
-              <a:rPr lang="en-US" sz="1900" b="1" dirty="0">
-                <a:solidFill>
-                  <a:srgbClr val="FFFFFF"/>
+          <p:cNvPr id="16" name="Text 13"/>
+          <p:cNvSpPr/>
+          <p:nvPr/>
+        </p:nvSpPr>
+        <p:spPr>
+          <a:xfrm>
+            <a:off x="6656832" y="3584448"/>
+            <a:ext cx="1737360" cy="713232"/>
+          </a:xfrm>
+          <a:prstGeom prst="rect">
+            <a:avLst/>
+          </a:prstGeom>
+          <a:noFill/>
+          <a:ln/>
+        </p:spPr>
+        <p:txBody>
+          <a:bodyPr wrap="square" lIns="0" tIns="0" rIns="0" bIns="0" rtlCol="0" anchor="ctr"/>
+          <a:lstStyle/>
+          <a:p>
+            <a:pPr algn="l" indent="0" marL="0">
+              <a:buNone/>
+            </a:pPr>
+            <a:r>
+              <a:rPr lang="en-US" sz="2000" b="1" dirty="0">
+                <a:solidFill>
+                  <a:srgbClr val="B3524C"/>
                 </a:solidFill>
                 <a:latin typeface="Cambria" pitchFamily="34" charset="0"/>
                 <a:ea typeface="Cambria" pitchFamily="34" charset="-122"/>
                 <a:cs typeface="Cambria" pitchFamily="34" charset="-120"/>
               </a:rPr>
-              <a:t>最初に消えたのは、“経験の浅い若手が最初に任される定型業務”。</a:t>
-            </a:r>
-            <a:endParaRPr lang="en-US" sz="1900" dirty="0"/>
-          </a:p>
-        </p:txBody>
-      </p:sp>
-      <p:sp>
-        <p:nvSpPr>
-          <p:cNvPr id="20" name="Text 18"/>
-          <p:cNvSpPr/>
-          <p:nvPr/>
-        </p:nvSpPr>
-        <p:spPr>
-          <a:xfrm>
-            <a:off x="978408" y="4663440"/>
-            <a:ext cx="10241280" cy="822960"/>
-          </a:xfrm>
-          <a:prstGeom prst="rect">
-            <a:avLst/>
-          </a:prstGeom>
-          <a:noFill/>
-          <a:ln/>
-        </p:spPr>
-        <p:txBody>
-          <a:bodyPr wrap="square" lIns="0" tIns="0" rIns="0" bIns="0" rtlCol="0" anchor="t"/>
+              <a:t>14,000人</a:t>
+            </a:r>
+            <a:endParaRPr lang="en-US" sz="2000" dirty="0"/>
+          </a:p>
+        </p:txBody>
+      </p:sp>
+      <p:sp>
+        <p:nvSpPr>
+          <p:cNvPr id="17" name="Text 14"/>
+          <p:cNvSpPr/>
+          <p:nvPr/>
+        </p:nvSpPr>
+        <p:spPr>
+          <a:xfrm>
+            <a:off x="8348472" y="3584448"/>
+            <a:ext cx="2990088" cy="713232"/>
+          </a:xfrm>
+          <a:prstGeom prst="rect">
+            <a:avLst/>
+          </a:prstGeom>
+          <a:noFill/>
+          <a:ln/>
+        </p:spPr>
+        <p:txBody>
+          <a:bodyPr wrap="square" lIns="0" tIns="0" rIns="0" bIns="0" rtlCol="0" anchor="ctr"/>
           <a:lstStyle/>
           <a:p>
             <a:pPr indent="0" marL="0">
               <a:lnSpc>
-                <a:spcPts val="2000"/>
+                <a:spcPts val="1400"/>
               </a:lnSpc>
               <a:buNone/>
             </a:pPr>
             <a:r>
-              <a:rPr lang="en-US" sz="1400" dirty="0">
+              <a:rPr lang="en-US" sz="1100" dirty="0">
+                <a:solidFill>
+                  <a:srgbClr val="1B2430"/>
+                </a:solidFill>
+                <a:latin typeface="Calibri" pitchFamily="34" charset="0"/>
+                <a:ea typeface="Calibri" pitchFamily="34" charset="-122"/>
+                <a:cs typeface="Calibri" pitchFamily="34" charset="-120"/>
+              </a:rPr>
+              <a:t>Amazonが削減。CEO「AIで、今より少ない人数で仕事が回る」</a:t>
+            </a:r>
+            <a:endParaRPr lang="en-US" sz="1100" dirty="0"/>
+          </a:p>
+          <a:p>
+            <a:pPr indent="0" marL="0">
+              <a:lnSpc>
+                <a:spcPts val="1400"/>
+              </a:lnSpc>
+              <a:buNone/>
+            </a:pPr>
+            <a:r>
+              <a:rPr lang="en-US" sz="900" i="1" dirty="0">
+                <a:solidFill>
+                  <a:srgbClr val="8894A6"/>
+                </a:solidFill>
+                <a:latin typeface="Calibri" pitchFamily="34" charset="0"/>
+                <a:ea typeface="Calibri" pitchFamily="34" charset="-122"/>
+                <a:cs typeface="Calibri" pitchFamily="34" charset="-120"/>
+              </a:rPr>
+              <a:t>Forbes/CNBC, 2025</a:t>
+            </a:r>
+            <a:endParaRPr lang="en-US" sz="1100" dirty="0"/>
+          </a:p>
+        </p:txBody>
+      </p:sp>
+      <p:sp>
+        <p:nvSpPr>
+          <p:cNvPr id="18" name="Shape 15"/>
+          <p:cNvSpPr/>
+          <p:nvPr/>
+        </p:nvSpPr>
+        <p:spPr>
+          <a:xfrm>
+            <a:off x="566928" y="4553712"/>
+            <a:ext cx="11064240" cy="1417320"/>
+          </a:xfrm>
+          <a:prstGeom prst="roundRect">
+            <a:avLst>
+              <a:gd name="adj" fmla="val 5806"/>
+            </a:avLst>
+          </a:prstGeom>
+          <a:solidFill>
+            <a:srgbClr val="1B2A4A"/>
+          </a:solidFill>
+          <a:ln/>
+          <a:effectLst>
+            <a:outerShdw sx="100000" sy="100000" kx="0" ky="0" algn="bl" rotWithShape="0" blurRad="114300" dist="38100" dir="5400000">
+              <a:srgbClr val="9AA6B8">
+                <a:alpha val="35000"/>
+              </a:srgbClr>
+            </a:outerShdw>
+          </a:effectLst>
+        </p:spPr>
+      </p:sp>
+      <p:sp>
+        <p:nvSpPr>
+          <p:cNvPr id="19" name="Text 16"/>
+          <p:cNvSpPr/>
+          <p:nvPr/>
+        </p:nvSpPr>
+        <p:spPr>
+          <a:xfrm>
+            <a:off x="978408" y="4681728"/>
+            <a:ext cx="10241280" cy="411480"/>
+          </a:xfrm>
+          <a:prstGeom prst="rect">
+            <a:avLst/>
+          </a:prstGeom>
+          <a:noFill/>
+          <a:ln/>
+        </p:spPr>
+        <p:txBody>
+          <a:bodyPr wrap="square" lIns="0" tIns="0" rIns="0" bIns="0" rtlCol="0" anchor="ctr"/>
+          <a:lstStyle/>
+          <a:p>
+            <a:pPr indent="0" marL="0">
+              <a:buNone/>
+            </a:pPr>
+            <a:r>
+              <a:rPr lang="en-US" sz="1800" b="1" dirty="0">
+                <a:solidFill>
+                  <a:srgbClr val="FFFFFF"/>
+                </a:solidFill>
+                <a:latin typeface="Cambria" pitchFamily="34" charset="0"/>
+                <a:ea typeface="Cambria" pitchFamily="34" charset="-122"/>
+                <a:cs typeface="Cambria" pitchFamily="34" charset="-120"/>
+              </a:rPr>
+              <a:t>最初に消えたのは、“経験の浅い若手が最初に任される定型業務”。</a:t>
+            </a:r>
+            <a:endParaRPr lang="en-US" sz="1800" dirty="0"/>
+          </a:p>
+        </p:txBody>
+      </p:sp>
+      <p:sp>
+        <p:nvSpPr>
+          <p:cNvPr id="20" name="Text 17"/>
+          <p:cNvSpPr/>
+          <p:nvPr/>
+        </p:nvSpPr>
+        <p:spPr>
+          <a:xfrm>
+            <a:off x="978408" y="5120640"/>
+            <a:ext cx="10241280" cy="731520"/>
+          </a:xfrm>
+          <a:prstGeom prst="rect">
+            <a:avLst/>
+          </a:prstGeom>
+          <a:noFill/>
+          <a:ln/>
+        </p:spPr>
+        <p:txBody>
+          <a:bodyPr wrap="square" lIns="0" tIns="0" rIns="0" bIns="0" rtlCol="0" anchor="t"/>
+          <a:lstStyle/>
+          <a:p>
+            <a:pPr indent="0" marL="0">
+              <a:lnSpc>
+                <a:spcPts val="1900"/>
+              </a:lnSpc>
+              <a:buNone/>
+            </a:pPr>
+            <a:r>
+              <a:rPr lang="en-US" sz="1350" dirty="0">
                 <a:solidFill>
                   <a:srgbClr val="CADCFC"/>
                 </a:solidFill>
@@ -7026,15 +9167,15 @@
                 <a:ea typeface="Calibri" pitchFamily="34" charset="-122"/>
                 <a:cs typeface="Calibri" pitchFamily="34" charset="-120"/>
               </a:rPr>
-              <a:t>データ入力・一次リサーチ・下書き・テンプレ的な作業…AIは“新人の仕事”から置き換える。だから今、米国で最も打撃を受けているのは20代前半。“炭鉱のカナリア”は、若者だった。</a:t>
-            </a:r>
-            <a:endParaRPr lang="en-US" sz="1400" dirty="0"/>
-          </a:p>
-        </p:txBody>
-      </p:sp>
-      <p:sp>
-        <p:nvSpPr>
-          <p:cNvPr id="21" name="Text 19"/>
+              <a:t>データ入力・一次リサーチ・下書き…AIは“新人の仕事”から置き換える。米国で最も打撃を受けているのは20代前半。“炭鉱のカナリア”は、若者だった。</a:t>
+            </a:r>
+            <a:endParaRPr lang="en-US" sz="1350" dirty="0"/>
+          </a:p>
+        </p:txBody>
+      </p:sp>
+      <p:sp>
+        <p:nvSpPr>
+          <p:cNvPr id="21" name="Text 18"/>
           <p:cNvSpPr/>
           <p:nvPr/>
         </p:nvSpPr>
@@ -7073,7 +9214,7 @@
       </p:sp>
       <p:sp>
         <p:nvSpPr>
-          <p:cNvPr id="22" name="Text 20"/>
+          <p:cNvPr id="22" name="Text 19"/>
           <p:cNvSpPr/>
           <p:nvPr/>
         </p:nvSpPr>
@@ -7721,7 +9862,7 @@
                 <a:ea typeface="Calibri" pitchFamily="34" charset="-122"/>
                 <a:cs typeface="Calibri" pitchFamily="34" charset="-120"/>
               </a:rPr>
-              <a:t>各国は急伸中。日本が追いつくのは時間の問題</a:t>
+              <a:t>各国は急伸中。日本が追いつくのは時間の問題（→次頁）</a:t>
             </a:r>
             <a:endParaRPr lang="en-US" sz="1150" dirty="0"/>
           </a:p>
@@ -7929,7 +10070,7 @@
                 <a:ea typeface="Calibri" pitchFamily="34" charset="-122"/>
                 <a:cs typeface="Calibri" pitchFamily="34" charset="-120"/>
               </a:rPr>
-              <a:t>働き手そのものが約▲26%。若者はさらに希少に</a:t>
+              <a:t>働き手そのものが約▲26%。若者はさらに希少に（→次頁）</a:t>
             </a:r>
             <a:endParaRPr lang="en-US" sz="1150" dirty="0"/>
           </a:p>
@@ -8233,7 +10374,7 @@
                 <a:ea typeface="Calibri" pitchFamily="34" charset="-122"/>
                 <a:cs typeface="Calibri" pitchFamily="34" charset="-120"/>
               </a:rPr>
-              <a:t>THE PIVOT ／ 何が消えて、何が残るか</a:t>
+              <a:t>JAPAN IN NUMBERS ／ 数字で見る</a:t>
             </a:r>
             <a:endParaRPr lang="en-US" sz="1250" dirty="0"/>
           </a:p>
@@ -8272,7 +10413,7 @@
                 <a:ea typeface="Cambria" pitchFamily="34" charset="-122"/>
                 <a:cs typeface="Cambria" pitchFamily="34" charset="-120"/>
               </a:rPr>
-              <a:t>では、AIに“残る”のはどんな仕事か</a:t>
+              <a:t>“追いつく”のは時間の問題。そして、働き手は減り続ける</a:t>
             </a:r>
             <a:endParaRPr lang="en-US" sz="2800" dirty="0"/>
           </a:p>
@@ -8280,60 +10421,18 @@
       </p:sp>
       <p:sp>
         <p:nvSpPr>
-          <p:cNvPr id="6" name="Text 4"/>
-          <p:cNvSpPr/>
-          <p:nvPr/>
-        </p:nvSpPr>
-        <p:spPr>
-          <a:xfrm>
-            <a:off x="566928" y="1463040"/>
-            <a:ext cx="11064240" cy="640080"/>
-          </a:xfrm>
-          <a:prstGeom prst="rect">
-            <a:avLst/>
-          </a:prstGeom>
-          <a:noFill/>
-          <a:ln/>
-        </p:spPr>
-        <p:txBody>
-          <a:bodyPr wrap="square" lIns="0" tIns="0" rIns="0" bIns="0" rtlCol="0" anchor="t"/>
-          <a:lstStyle/>
-          <a:p>
-            <a:pPr indent="0" marL="0">
-              <a:lnSpc>
-                <a:spcPts val="2100"/>
-              </a:lnSpc>
-              <a:buNone/>
-            </a:pPr>
-            <a:r>
-              <a:rPr lang="en-US" sz="1500" dirty="0">
-                <a:solidFill>
-                  <a:srgbClr val="3D4756"/>
-                </a:solidFill>
-                <a:latin typeface="Calibri" pitchFamily="34" charset="0"/>
-                <a:ea typeface="Calibri" pitchFamily="34" charset="-122"/>
-                <a:cs typeface="Calibri" pitchFamily="34" charset="-120"/>
-              </a:rPr>
-              <a:t>分かれ目は「職業名」ではなく仕事の中身が「定型」か「創造性・信頼・交渉を要する対人」か。ここに、危機を“チャンス”に変える鍵がある。</a:t>
-            </a:r>
-            <a:endParaRPr lang="en-US" sz="1500" dirty="0"/>
-          </a:p>
-        </p:txBody>
-      </p:sp>
-      <p:sp>
-        <p:nvSpPr>
-          <p:cNvPr id="7" name="Shape 5"/>
-          <p:cNvSpPr/>
-          <p:nvPr/>
-        </p:nvSpPr>
-        <p:spPr>
-          <a:xfrm>
-            <a:off x="566928" y="2267712"/>
-            <a:ext cx="5440680" cy="3154680"/>
+          <p:cNvPr id="6" name="Shape 4"/>
+          <p:cNvSpPr/>
+          <p:nvPr/>
+        </p:nvSpPr>
+        <p:spPr>
+          <a:xfrm>
+            <a:off x="566928" y="1572768"/>
+            <a:ext cx="5486400" cy="3977640"/>
           </a:xfrm>
           <a:prstGeom prst="roundRect">
             <a:avLst>
-              <a:gd name="adj" fmla="val 2609"/>
+              <a:gd name="adj" fmla="val 2069"/>
             </a:avLst>
           </a:prstGeom>
           <a:solidFill>
@@ -8349,413 +10448,78 @@
           </a:effectLst>
         </p:spPr>
       </p:sp>
-      <p:sp>
-        <p:nvSpPr>
-          <p:cNvPr id="8" name="Shape 6"/>
-          <p:cNvSpPr/>
-          <p:nvPr/>
-        </p:nvSpPr>
-        <p:spPr>
-          <a:xfrm>
-            <a:off x="566928" y="2267712"/>
-            <a:ext cx="5440680" cy="566928"/>
+      <p:graphicFrame>
+        <p:nvGraphicFramePr>
+          <p:cNvPr id="7" name="Chart 0" descr=""/>
+          <p:cNvGraphicFramePr/>
+          <p:nvPr/>
+        </p:nvGraphicFramePr>
+        <p:xfrm>
+          <a:off x="749808" y="1709928"/>
+          <a:ext cx="5120640" cy="3291840"/>
+        </p:xfrm>
+        <a:graphic xmlns:a="http://schemas.openxmlformats.org/drawingml/2006/main">
+          <a:graphicData uri="http://schemas.openxmlformats.org/drawingml/2006/chart">
+            <c:chart xmlns:c="http://schemas.openxmlformats.org/drawingml/2006/chart" r:id="rId1"/>
+          </a:graphicData>
+        </a:graphic>
+      </p:graphicFrame>
+      <p:sp>
+        <p:nvSpPr>
+          <p:cNvPr id="8" name="Text 5"/>
+          <p:cNvSpPr/>
+          <p:nvPr/>
+        </p:nvSpPr>
+        <p:spPr>
+          <a:xfrm>
+            <a:off x="841248" y="5047488"/>
+            <a:ext cx="4937760" cy="457200"/>
+          </a:xfrm>
+          <a:prstGeom prst="rect">
+            <a:avLst/>
+          </a:prstGeom>
+          <a:noFill/>
+          <a:ln/>
+        </p:spPr>
+        <p:txBody>
+          <a:bodyPr wrap="square" lIns="0" tIns="0" rIns="0" bIns="0" rtlCol="0" anchor="t"/>
+          <a:lstStyle/>
+          <a:p>
+            <a:pPr indent="0" marL="0">
+              <a:lnSpc>
+                <a:spcPts val="1500"/>
+              </a:lnSpc>
+              <a:buNone/>
+            </a:pPr>
+            <a:r>
+              <a:rPr lang="en-US" sz="1100" b="1" dirty="0">
+                <a:solidFill>
+                  <a:srgbClr val="1C7293"/>
+                </a:solidFill>
+                <a:latin typeface="Calibri" pitchFamily="34" charset="0"/>
+                <a:ea typeface="Calibri" pitchFamily="34" charset="-122"/>
+                <a:cs typeface="Calibri" pitchFamily="34" charset="-120"/>
+              </a:rPr>
+              <a:t>日本だけが低い＝“まだ来ていない”だけ。各国は前年から急伸しており、このギャップは必ず埋まる。</a:t>
+            </a:r>
+            <a:endParaRPr lang="en-US" sz="1100" dirty="0"/>
+          </a:p>
+        </p:txBody>
+      </p:sp>
+      <p:sp>
+        <p:nvSpPr>
+          <p:cNvPr id="9" name="Shape 6"/>
+          <p:cNvSpPr/>
+          <p:nvPr/>
+        </p:nvSpPr>
+        <p:spPr>
+          <a:xfrm>
+            <a:off x="6327648" y="1572768"/>
+            <a:ext cx="5285232" cy="3977640"/>
           </a:xfrm>
           <a:prstGeom prst="roundRect">
             <a:avLst>
-              <a:gd name="adj" fmla="val 14516"/>
-            </a:avLst>
-          </a:prstGeom>
-          <a:solidFill>
-            <a:srgbClr val="B3524C"/>
-          </a:solidFill>
-          <a:ln/>
-        </p:spPr>
-      </p:sp>
-      <p:sp>
-        <p:nvSpPr>
-          <p:cNvPr id="9" name="Shape 7"/>
-          <p:cNvSpPr/>
-          <p:nvPr/>
-        </p:nvSpPr>
-        <p:spPr>
-          <a:xfrm>
-            <a:off x="566928" y="2551176"/>
-            <a:ext cx="5440680" cy="283464"/>
-          </a:xfrm>
-          <a:prstGeom prst="rect">
-            <a:avLst/>
-          </a:prstGeom>
-          <a:solidFill>
-            <a:srgbClr val="B3524C"/>
-          </a:solidFill>
-          <a:ln/>
-        </p:spPr>
-      </p:sp>
-      <p:sp>
-        <p:nvSpPr>
-          <p:cNvPr id="10" name="Text 8"/>
-          <p:cNvSpPr/>
-          <p:nvPr/>
-        </p:nvSpPr>
-        <p:spPr>
-          <a:xfrm>
-            <a:off x="841248" y="2267712"/>
-            <a:ext cx="4892040" cy="566928"/>
-          </a:xfrm>
-          <a:prstGeom prst="rect">
-            <a:avLst/>
-          </a:prstGeom>
-          <a:noFill/>
-          <a:ln/>
-        </p:spPr>
-        <p:txBody>
-          <a:bodyPr wrap="square" lIns="0" tIns="0" rIns="0" bIns="0" rtlCol="0" anchor="ctr"/>
-          <a:lstStyle/>
-          <a:p>
-            <a:pPr indent="0" marL="0">
-              <a:buNone/>
-            </a:pPr>
-            <a:r>
-              <a:rPr lang="en-US" sz="1600" b="1" dirty="0">
-                <a:solidFill>
-                  <a:srgbClr val="FFFFFF"/>
-                </a:solidFill>
-                <a:latin typeface="Calibri" pitchFamily="34" charset="0"/>
-                <a:ea typeface="Calibri" pitchFamily="34" charset="-122"/>
-                <a:cs typeface="Calibri" pitchFamily="34" charset="-120"/>
-              </a:rPr>
-              <a:t>AIに代替されやすい（高リスク）</a:t>
-            </a:r>
-            <a:endParaRPr lang="en-US" sz="1600" dirty="0"/>
-          </a:p>
-        </p:txBody>
-      </p:sp>
-      <p:sp>
-        <p:nvSpPr>
-          <p:cNvPr id="11" name="Text 9"/>
-          <p:cNvSpPr/>
-          <p:nvPr/>
-        </p:nvSpPr>
-        <p:spPr>
-          <a:xfrm>
-            <a:off x="886968" y="3108960"/>
-            <a:ext cx="3566160" cy="457200"/>
-          </a:xfrm>
-          <a:prstGeom prst="rect">
-            <a:avLst/>
-          </a:prstGeom>
-          <a:noFill/>
-          <a:ln/>
-        </p:spPr>
-        <p:txBody>
-          <a:bodyPr wrap="square" lIns="0" tIns="0" rIns="0" bIns="0" rtlCol="0" anchor="ctr"/>
-          <a:lstStyle/>
-          <a:p>
-            <a:pPr indent="0" marL="0">
-              <a:buNone/>
-            </a:pPr>
-            <a:r>
-              <a:rPr lang="en-US" sz="1400" dirty="0">
-                <a:solidFill>
-                  <a:srgbClr val="1B2430"/>
-                </a:solidFill>
-                <a:latin typeface="Calibri" pitchFamily="34" charset="0"/>
-                <a:ea typeface="Calibri" pitchFamily="34" charset="-122"/>
-                <a:cs typeface="Calibri" pitchFamily="34" charset="-120"/>
-              </a:rPr>
-              <a:t>テレアポ／電話勧誘</a:t>
-            </a:r>
-            <a:endParaRPr lang="en-US" sz="1400" dirty="0"/>
-          </a:p>
-        </p:txBody>
-      </p:sp>
-      <p:sp>
-        <p:nvSpPr>
-          <p:cNvPr id="12" name="Text 10"/>
-          <p:cNvSpPr/>
-          <p:nvPr/>
-        </p:nvSpPr>
-        <p:spPr>
-          <a:xfrm>
-            <a:off x="4361688" y="3108960"/>
-            <a:ext cx="1463040" cy="457200"/>
-          </a:xfrm>
-          <a:prstGeom prst="rect">
-            <a:avLst/>
-          </a:prstGeom>
-          <a:noFill/>
-          <a:ln/>
-        </p:spPr>
-        <p:txBody>
-          <a:bodyPr wrap="square" lIns="0" tIns="0" rIns="0" bIns="0" rtlCol="0" anchor="ctr"/>
-          <a:lstStyle/>
-          <a:p>
-            <a:pPr algn="r" indent="0" marL="0">
-              <a:buNone/>
-            </a:pPr>
-            <a:r>
-              <a:rPr lang="en-US" sz="1250" b="1" dirty="0">
-                <a:solidFill>
-                  <a:srgbClr val="B3524C"/>
-                </a:solidFill>
-                <a:latin typeface="Calibri" pitchFamily="34" charset="0"/>
-                <a:ea typeface="Calibri" pitchFamily="34" charset="-122"/>
-                <a:cs typeface="Calibri" pitchFamily="34" charset="-120"/>
-              </a:rPr>
-              <a:t>代替確率 0.99</a:t>
-            </a:r>
-            <a:endParaRPr lang="en-US" sz="1250" dirty="0"/>
-          </a:p>
-        </p:txBody>
-      </p:sp>
-      <p:sp>
-        <p:nvSpPr>
-          <p:cNvPr id="13" name="Text 11"/>
-          <p:cNvSpPr/>
-          <p:nvPr/>
-        </p:nvSpPr>
-        <p:spPr>
-          <a:xfrm>
-            <a:off x="886968" y="3657600"/>
-            <a:ext cx="3566160" cy="457200"/>
-          </a:xfrm>
-          <a:prstGeom prst="rect">
-            <a:avLst/>
-          </a:prstGeom>
-          <a:noFill/>
-          <a:ln/>
-        </p:spPr>
-        <p:txBody>
-          <a:bodyPr wrap="square" lIns="0" tIns="0" rIns="0" bIns="0" rtlCol="0" anchor="ctr"/>
-          <a:lstStyle/>
-          <a:p>
-            <a:pPr indent="0" marL="0">
-              <a:buNone/>
-            </a:pPr>
-            <a:r>
-              <a:rPr lang="en-US" sz="1400" dirty="0">
-                <a:solidFill>
-                  <a:srgbClr val="1B2430"/>
-                </a:solidFill>
-                <a:latin typeface="Calibri" pitchFamily="34" charset="0"/>
-                <a:ea typeface="Calibri" pitchFamily="34" charset="-122"/>
-                <a:cs typeface="Calibri" pitchFamily="34" charset="-120"/>
-              </a:rPr>
-              <a:t>レジ・定型販売</a:t>
-            </a:r>
-            <a:endParaRPr lang="en-US" sz="1400" dirty="0"/>
-          </a:p>
-        </p:txBody>
-      </p:sp>
-      <p:sp>
-        <p:nvSpPr>
-          <p:cNvPr id="14" name="Text 12"/>
-          <p:cNvSpPr/>
-          <p:nvPr/>
-        </p:nvSpPr>
-        <p:spPr>
-          <a:xfrm>
-            <a:off x="4361688" y="3657600"/>
-            <a:ext cx="1463040" cy="457200"/>
-          </a:xfrm>
-          <a:prstGeom prst="rect">
-            <a:avLst/>
-          </a:prstGeom>
-          <a:noFill/>
-          <a:ln/>
-        </p:spPr>
-        <p:txBody>
-          <a:bodyPr wrap="square" lIns="0" tIns="0" rIns="0" bIns="0" rtlCol="0" anchor="ctr"/>
-          <a:lstStyle/>
-          <a:p>
-            <a:pPr algn="r" indent="0" marL="0">
-              <a:buNone/>
-            </a:pPr>
-            <a:r>
-              <a:rPr lang="en-US" sz="1250" b="1" dirty="0">
-                <a:solidFill>
-                  <a:srgbClr val="B3524C"/>
-                </a:solidFill>
-                <a:latin typeface="Calibri" pitchFamily="34" charset="0"/>
-                <a:ea typeface="Calibri" pitchFamily="34" charset="-122"/>
-                <a:cs typeface="Calibri" pitchFamily="34" charset="-120"/>
-              </a:rPr>
-              <a:t>0.97</a:t>
-            </a:r>
-            <a:endParaRPr lang="en-US" sz="1250" dirty="0"/>
-          </a:p>
-        </p:txBody>
-      </p:sp>
-      <p:sp>
-        <p:nvSpPr>
-          <p:cNvPr id="15" name="Text 13"/>
-          <p:cNvSpPr/>
-          <p:nvPr/>
-        </p:nvSpPr>
-        <p:spPr>
-          <a:xfrm>
-            <a:off x="886968" y="4206240"/>
-            <a:ext cx="3566160" cy="457200"/>
-          </a:xfrm>
-          <a:prstGeom prst="rect">
-            <a:avLst/>
-          </a:prstGeom>
-          <a:noFill/>
-          <a:ln/>
-        </p:spPr>
-        <p:txBody>
-          <a:bodyPr wrap="square" lIns="0" tIns="0" rIns="0" bIns="0" rtlCol="0" anchor="ctr"/>
-          <a:lstStyle/>
-          <a:p>
-            <a:pPr indent="0" marL="0">
-              <a:buNone/>
-            </a:pPr>
-            <a:r>
-              <a:rPr lang="en-US" sz="1400" dirty="0">
-                <a:solidFill>
-                  <a:srgbClr val="1B2430"/>
-                </a:solidFill>
-                <a:latin typeface="Calibri" pitchFamily="34" charset="0"/>
-                <a:ea typeface="Calibri" pitchFamily="34" charset="-122"/>
-                <a:cs typeface="Calibri" pitchFamily="34" charset="-120"/>
-              </a:rPr>
-              <a:t>小売販売員（定型接客）</a:t>
-            </a:r>
-            <a:endParaRPr lang="en-US" sz="1400" dirty="0"/>
-          </a:p>
-        </p:txBody>
-      </p:sp>
-      <p:sp>
-        <p:nvSpPr>
-          <p:cNvPr id="16" name="Text 14"/>
-          <p:cNvSpPr/>
-          <p:nvPr/>
-        </p:nvSpPr>
-        <p:spPr>
-          <a:xfrm>
-            <a:off x="4361688" y="4206240"/>
-            <a:ext cx="1463040" cy="457200"/>
-          </a:xfrm>
-          <a:prstGeom prst="rect">
-            <a:avLst/>
-          </a:prstGeom>
-          <a:noFill/>
-          <a:ln/>
-        </p:spPr>
-        <p:txBody>
-          <a:bodyPr wrap="square" lIns="0" tIns="0" rIns="0" bIns="0" rtlCol="0" anchor="ctr"/>
-          <a:lstStyle/>
-          <a:p>
-            <a:pPr algn="r" indent="0" marL="0">
-              <a:buNone/>
-            </a:pPr>
-            <a:r>
-              <a:rPr lang="en-US" sz="1250" b="1" dirty="0">
-                <a:solidFill>
-                  <a:srgbClr val="B3524C"/>
-                </a:solidFill>
-                <a:latin typeface="Calibri" pitchFamily="34" charset="0"/>
-                <a:ea typeface="Calibri" pitchFamily="34" charset="-122"/>
-                <a:cs typeface="Calibri" pitchFamily="34" charset="-120"/>
-              </a:rPr>
-              <a:t>0.92</a:t>
-            </a:r>
-            <a:endParaRPr lang="en-US" sz="1250" dirty="0"/>
-          </a:p>
-        </p:txBody>
-      </p:sp>
-      <p:sp>
-        <p:nvSpPr>
-          <p:cNvPr id="17" name="Text 15"/>
-          <p:cNvSpPr/>
-          <p:nvPr/>
-        </p:nvSpPr>
-        <p:spPr>
-          <a:xfrm>
-            <a:off x="886968" y="4754880"/>
-            <a:ext cx="3566160" cy="457200"/>
-          </a:xfrm>
-          <a:prstGeom prst="rect">
-            <a:avLst/>
-          </a:prstGeom>
-          <a:noFill/>
-          <a:ln/>
-        </p:spPr>
-        <p:txBody>
-          <a:bodyPr wrap="square" lIns="0" tIns="0" rIns="0" bIns="0" rtlCol="0" anchor="ctr"/>
-          <a:lstStyle/>
-          <a:p>
-            <a:pPr indent="0" marL="0">
-              <a:buNone/>
-            </a:pPr>
-            <a:r>
-              <a:rPr lang="en-US" sz="1400" dirty="0">
-                <a:solidFill>
-                  <a:srgbClr val="1B2430"/>
-                </a:solidFill>
-                <a:latin typeface="Calibri" pitchFamily="34" charset="0"/>
-                <a:ea typeface="Calibri" pitchFamily="34" charset="-122"/>
-                <a:cs typeface="Calibri" pitchFamily="34" charset="-120"/>
-              </a:rPr>
-              <a:t>定型的な事務・データ入力</a:t>
-            </a:r>
-            <a:endParaRPr lang="en-US" sz="1400" dirty="0"/>
-          </a:p>
-        </p:txBody>
-      </p:sp>
-      <p:sp>
-        <p:nvSpPr>
-          <p:cNvPr id="18" name="Text 16"/>
-          <p:cNvSpPr/>
-          <p:nvPr/>
-        </p:nvSpPr>
-        <p:spPr>
-          <a:xfrm>
-            <a:off x="4361688" y="4754880"/>
-            <a:ext cx="1463040" cy="457200"/>
-          </a:xfrm>
-          <a:prstGeom prst="rect">
-            <a:avLst/>
-          </a:prstGeom>
-          <a:noFill/>
-          <a:ln/>
-        </p:spPr>
-        <p:txBody>
-          <a:bodyPr wrap="square" lIns="0" tIns="0" rIns="0" bIns="0" rtlCol="0" anchor="ctr"/>
-          <a:lstStyle/>
-          <a:p>
-            <a:pPr algn="r" indent="0" marL="0">
-              <a:buNone/>
-            </a:pPr>
-            <a:r>
-              <a:rPr lang="en-US" sz="1250" b="1" dirty="0">
-                <a:solidFill>
-                  <a:srgbClr val="B3524C"/>
-                </a:solidFill>
-                <a:latin typeface="Calibri" pitchFamily="34" charset="0"/>
-                <a:ea typeface="Calibri" pitchFamily="34" charset="-122"/>
-                <a:cs typeface="Calibri" pitchFamily="34" charset="-120"/>
-              </a:rPr>
-              <a:t>高リスク</a:t>
-            </a:r>
-            <a:endParaRPr lang="en-US" sz="1250" dirty="0"/>
-          </a:p>
-        </p:txBody>
-      </p:sp>
-      <p:sp>
-        <p:nvSpPr>
-          <p:cNvPr id="19" name="Shape 17"/>
-          <p:cNvSpPr/>
-          <p:nvPr/>
-        </p:nvSpPr>
-        <p:spPr>
-          <a:xfrm>
-            <a:off x="6190488" y="2267712"/>
-            <a:ext cx="5440680" cy="3154680"/>
-          </a:xfrm>
-          <a:prstGeom prst="roundRect">
-            <a:avLst>
-              <a:gd name="adj" fmla="val 2609"/>
+              <a:gd name="adj" fmla="val 2069"/>
             </a:avLst>
           </a:prstGeom>
           <a:solidFill>
@@ -8771,82 +10535,98 @@
           </a:effectLst>
         </p:spPr>
       </p:sp>
-      <p:sp>
-        <p:nvSpPr>
-          <p:cNvPr id="20" name="Shape 18"/>
-          <p:cNvSpPr/>
-          <p:nvPr/>
-        </p:nvSpPr>
-        <p:spPr>
-          <a:xfrm>
-            <a:off x="6190488" y="2267712"/>
-            <a:ext cx="5440680" cy="566928"/>
-          </a:xfrm>
-          <a:prstGeom prst="roundRect">
-            <a:avLst>
-              <a:gd name="adj" fmla="val 14516"/>
-            </a:avLst>
-          </a:prstGeom>
-          <a:solidFill>
-            <a:srgbClr val="2E7D57"/>
-          </a:solidFill>
-          <a:ln/>
-        </p:spPr>
-      </p:sp>
-      <p:sp>
-        <p:nvSpPr>
-          <p:cNvPr id="21" name="Shape 19"/>
-          <p:cNvSpPr/>
-          <p:nvPr/>
-        </p:nvSpPr>
-        <p:spPr>
-          <a:xfrm>
-            <a:off x="6190488" y="2551176"/>
-            <a:ext cx="5440680" cy="283464"/>
-          </a:xfrm>
-          <a:prstGeom prst="rect">
-            <a:avLst/>
-          </a:prstGeom>
-          <a:solidFill>
-            <a:srgbClr val="2E7D57"/>
-          </a:solidFill>
-          <a:ln/>
-        </p:spPr>
-      </p:sp>
-      <p:sp>
-        <p:nvSpPr>
-          <p:cNvPr id="22" name="Text 20"/>
-          <p:cNvSpPr/>
-          <p:nvPr/>
-        </p:nvSpPr>
-        <p:spPr>
-          <a:xfrm>
-            <a:off x="6464808" y="2267712"/>
-            <a:ext cx="4892040" cy="566928"/>
-          </a:xfrm>
-          <a:prstGeom prst="rect">
-            <a:avLst/>
-          </a:prstGeom>
-          <a:noFill/>
-          <a:ln/>
-        </p:spPr>
-        <p:txBody>
-          <a:bodyPr wrap="square" lIns="0" tIns="0" rIns="0" bIns="0" rtlCol="0" anchor="ctr"/>
+      <p:graphicFrame>
+        <p:nvGraphicFramePr>
+          <p:cNvPr id="10" name="Chart 1" descr=""/>
+          <p:cNvGraphicFramePr/>
+          <p:nvPr/>
+        </p:nvGraphicFramePr>
+        <p:xfrm>
+          <a:off x="6510528" y="1709928"/>
+          <a:ext cx="4919472" cy="3291840"/>
+        </p:xfrm>
+        <a:graphic xmlns:a="http://schemas.openxmlformats.org/drawingml/2006/main">
+          <a:graphicData uri="http://schemas.openxmlformats.org/drawingml/2006/chart">
+            <c:chart xmlns:c="http://schemas.openxmlformats.org/drawingml/2006/chart" r:id="rId2"/>
+          </a:graphicData>
+        </a:graphic>
+      </p:graphicFrame>
+      <p:sp>
+        <p:nvSpPr>
+          <p:cNvPr id="11" name="Text 7"/>
+          <p:cNvSpPr/>
+          <p:nvPr/>
+        </p:nvSpPr>
+        <p:spPr>
+          <a:xfrm>
+            <a:off x="6601968" y="5047488"/>
+            <a:ext cx="4736592" cy="457200"/>
+          </a:xfrm>
+          <a:prstGeom prst="rect">
+            <a:avLst/>
+          </a:prstGeom>
+          <a:noFill/>
+          <a:ln/>
+        </p:spPr>
+        <p:txBody>
+          <a:bodyPr wrap="square" lIns="0" tIns="0" rIns="0" bIns="0" rtlCol="0" anchor="t"/>
           <a:lstStyle/>
           <a:p>
             <a:pPr indent="0" marL="0">
-              <a:buNone/>
-            </a:pPr>
-            <a:r>
-              <a:rPr lang="en-US" sz="1600" b="1" dirty="0">
-                <a:solidFill>
-                  <a:srgbClr val="FFFFFF"/>
-                </a:solidFill>
-                <a:latin typeface="Calibri" pitchFamily="34" charset="0"/>
-                <a:ea typeface="Calibri" pitchFamily="34" charset="-122"/>
-                <a:cs typeface="Calibri" pitchFamily="34" charset="-120"/>
-              </a:rPr>
-              <a:t>残る＝価値が上がる（低リスク）</a:t>
+              <a:lnSpc>
+                <a:spcPts val="1500"/>
+              </a:lnSpc>
+              <a:buNone/>
+            </a:pPr>
+            <a:r>
+              <a:rPr lang="en-US" sz="1100" b="1" dirty="0">
+                <a:solidFill>
+                  <a:srgbClr val="C9871F"/>
+                </a:solidFill>
+                <a:latin typeface="Calibri" pitchFamily="34" charset="0"/>
+                <a:ea typeface="Calibri" pitchFamily="34" charset="-122"/>
+                <a:cs typeface="Calibri" pitchFamily="34" charset="-120"/>
+              </a:rPr>
+              <a:t>2050年に▲26%。若者は“希少”になるが、AIが定型業務を担えば「定型しかできない若手」の価値は上がらない。</a:t>
+            </a:r>
+            <a:endParaRPr lang="en-US" sz="1100" dirty="0"/>
+          </a:p>
+        </p:txBody>
+      </p:sp>
+      <p:sp>
+        <p:nvSpPr>
+          <p:cNvPr id="12" name="Text 8"/>
+          <p:cNvSpPr/>
+          <p:nvPr/>
+        </p:nvSpPr>
+        <p:spPr>
+          <a:xfrm>
+            <a:off x="566928" y="5806440"/>
+            <a:ext cx="11064240" cy="411480"/>
+          </a:xfrm>
+          <a:prstGeom prst="rect">
+            <a:avLst/>
+          </a:prstGeom>
+          <a:noFill/>
+          <a:ln/>
+        </p:spPr>
+        <p:txBody>
+          <a:bodyPr wrap="square" lIns="0" tIns="0" rIns="0" bIns="0" rtlCol="0" anchor="ctr"/>
+          <a:lstStyle/>
+          <a:p>
+            <a:pPr algn="ctr" indent="0" marL="0">
+              <a:buNone/>
+            </a:pPr>
+            <a:r>
+              <a:rPr lang="en-US" sz="1600" b="1" i="1" dirty="0">
+                <a:solidFill>
+                  <a:srgbClr val="1B2A4A"/>
+                </a:solidFill>
+                <a:latin typeface="Cambria" pitchFamily="34" charset="0"/>
+                <a:ea typeface="Cambria" pitchFamily="34" charset="-122"/>
+                <a:cs typeface="Cambria" pitchFamily="34" charset="-120"/>
+              </a:rPr>
+              <a:t>問われるのは「若いこと」ではなく「AIに代替されない力を持つ若手かどうか」。</a:t>
             </a:r>
             <a:endParaRPr lang="en-US" sz="1600" dirty="0"/>
           </a:p>
@@ -8854,202 +10634,7 @@
       </p:sp>
       <p:sp>
         <p:nvSpPr>
-          <p:cNvPr id="23" name="Text 21"/>
-          <p:cNvSpPr/>
-          <p:nvPr/>
-        </p:nvSpPr>
-        <p:spPr>
-          <a:xfrm>
-            <a:off x="6510528" y="3108960"/>
-            <a:ext cx="3931920" cy="457200"/>
-          </a:xfrm>
-          <a:prstGeom prst="rect">
-            <a:avLst/>
-          </a:prstGeom>
-          <a:noFill/>
-          <a:ln/>
-        </p:spPr>
-        <p:txBody>
-          <a:bodyPr wrap="square" lIns="0" tIns="0" rIns="0" bIns="0" rtlCol="0" anchor="ctr"/>
-          <a:lstStyle/>
-          <a:p>
-            <a:pPr indent="0" marL="0">
-              <a:buNone/>
-            </a:pPr>
-            <a:r>
-              <a:rPr lang="en-US" sz="1400" dirty="0">
-                <a:solidFill>
-                  <a:srgbClr val="1B2430"/>
-                </a:solidFill>
-                <a:latin typeface="Calibri" pitchFamily="34" charset="0"/>
-                <a:ea typeface="Calibri" pitchFamily="34" charset="-122"/>
-                <a:cs typeface="Calibri" pitchFamily="34" charset="-120"/>
-              </a:rPr>
-              <a:t>創造性・提案力を要する仕事</a:t>
-            </a:r>
-            <a:endParaRPr lang="en-US" sz="1400" dirty="0"/>
-          </a:p>
-        </p:txBody>
-      </p:sp>
-      <p:sp>
-        <p:nvSpPr>
-          <p:cNvPr id="24" name="Text 22"/>
-          <p:cNvSpPr/>
-          <p:nvPr/>
-        </p:nvSpPr>
-        <p:spPr>
-          <a:xfrm>
-            <a:off x="6510528" y="3657600"/>
-            <a:ext cx="3931920" cy="457200"/>
-          </a:xfrm>
-          <a:prstGeom prst="rect">
-            <a:avLst/>
-          </a:prstGeom>
-          <a:noFill/>
-          <a:ln/>
-        </p:spPr>
-        <p:txBody>
-          <a:bodyPr wrap="square" lIns="0" tIns="0" rIns="0" bIns="0" rtlCol="0" anchor="ctr"/>
-          <a:lstStyle/>
-          <a:p>
-            <a:pPr indent="0" marL="0">
-              <a:buNone/>
-            </a:pPr>
-            <a:r>
-              <a:rPr lang="en-US" sz="1400" dirty="0">
-                <a:solidFill>
-                  <a:srgbClr val="1B2430"/>
-                </a:solidFill>
-                <a:latin typeface="Calibri" pitchFamily="34" charset="0"/>
-                <a:ea typeface="Calibri" pitchFamily="34" charset="-122"/>
-                <a:cs typeface="Calibri" pitchFamily="34" charset="-120"/>
-              </a:rPr>
-              <a:t>社会的知性・信頼構築</a:t>
-            </a:r>
-            <a:endParaRPr lang="en-US" sz="1400" dirty="0"/>
-          </a:p>
-        </p:txBody>
-      </p:sp>
-      <p:sp>
-        <p:nvSpPr>
-          <p:cNvPr id="25" name="Text 23"/>
-          <p:cNvSpPr/>
-          <p:nvPr/>
-        </p:nvSpPr>
-        <p:spPr>
-          <a:xfrm>
-            <a:off x="6510528" y="4206240"/>
-            <a:ext cx="3931920" cy="457200"/>
-          </a:xfrm>
-          <a:prstGeom prst="rect">
-            <a:avLst/>
-          </a:prstGeom>
-          <a:noFill/>
-          <a:ln/>
-        </p:spPr>
-        <p:txBody>
-          <a:bodyPr wrap="square" lIns="0" tIns="0" rIns="0" bIns="0" rtlCol="0" anchor="ctr"/>
-          <a:lstStyle/>
-          <a:p>
-            <a:pPr indent="0" marL="0">
-              <a:buNone/>
-            </a:pPr>
-            <a:r>
-              <a:rPr lang="en-US" sz="1400" dirty="0">
-                <a:solidFill>
-                  <a:srgbClr val="1B2430"/>
-                </a:solidFill>
-                <a:latin typeface="Calibri" pitchFamily="34" charset="0"/>
-                <a:ea typeface="Calibri" pitchFamily="34" charset="-122"/>
-                <a:cs typeface="Calibri" pitchFamily="34" charset="-120"/>
-              </a:rPr>
-              <a:t>交渉・折衝を伴う対人商談</a:t>
-            </a:r>
-            <a:endParaRPr lang="en-US" sz="1400" dirty="0"/>
-          </a:p>
-        </p:txBody>
-      </p:sp>
-      <p:sp>
-        <p:nvSpPr>
-          <p:cNvPr id="26" name="Text 24"/>
-          <p:cNvSpPr/>
-          <p:nvPr/>
-        </p:nvSpPr>
-        <p:spPr>
-          <a:xfrm>
-            <a:off x="6510528" y="4754880"/>
-            <a:ext cx="3931920" cy="457200"/>
-          </a:xfrm>
-          <a:prstGeom prst="rect">
-            <a:avLst/>
-          </a:prstGeom>
-          <a:noFill/>
-          <a:ln/>
-        </p:spPr>
-        <p:txBody>
-          <a:bodyPr wrap="square" lIns="0" tIns="0" rIns="0" bIns="0" rtlCol="0" anchor="ctr"/>
-          <a:lstStyle/>
-          <a:p>
-            <a:pPr indent="0" marL="0">
-              <a:buNone/>
-            </a:pPr>
-            <a:r>
-              <a:rPr lang="en-US" sz="1400" b="1" dirty="0">
-                <a:solidFill>
-                  <a:srgbClr val="2E7D57"/>
-                </a:solidFill>
-                <a:latin typeface="Calibri" pitchFamily="34" charset="0"/>
-                <a:ea typeface="Calibri" pitchFamily="34" charset="-122"/>
-                <a:cs typeface="Calibri" pitchFamily="34" charset="-120"/>
-              </a:rPr>
-              <a:t>＝住宅の高額・対面コンサル営業</a:t>
-            </a:r>
-            <a:endParaRPr lang="en-US" sz="1400" dirty="0"/>
-          </a:p>
-        </p:txBody>
-      </p:sp>
-      <p:sp>
-        <p:nvSpPr>
-          <p:cNvPr id="27" name="Text 25"/>
-          <p:cNvSpPr/>
-          <p:nvPr/>
-        </p:nvSpPr>
-        <p:spPr>
-          <a:xfrm>
-            <a:off x="10305288" y="4754880"/>
-            <a:ext cx="1005840" cy="457200"/>
-          </a:xfrm>
-          <a:prstGeom prst="rect">
-            <a:avLst/>
-          </a:prstGeom>
-          <a:noFill/>
-          <a:ln/>
-        </p:spPr>
-        <p:txBody>
-          <a:bodyPr wrap="square" lIns="0" tIns="0" rIns="0" bIns="0" rtlCol="0" anchor="ctr"/>
-          <a:lstStyle/>
-          <a:p>
-            <a:pPr algn="r" indent="0" marL="0">
-              <a:buNone/>
-            </a:pPr>
-            <a:r>
-              <a:rPr lang="en-US" sz="1100" b="1" dirty="0">
-                <a:solidFill>
-                  <a:srgbClr val="C9871F"/>
-                </a:solidFill>
-                <a:latin typeface="Calibri" pitchFamily="34" charset="0"/>
-                <a:ea typeface="Calibri" pitchFamily="34" charset="-122"/>
-                <a:cs typeface="Calibri" pitchFamily="34" charset="-120"/>
-              </a:rPr>
-              <a:t>★当社</a:t>
-            </a:r>
-            <a:endParaRPr lang="en-US" sz="1100" dirty="0"/>
-          </a:p>
-        </p:txBody>
-      </p:sp>
-      <p:sp>
-        <p:nvSpPr>
-          <p:cNvPr id="28" name="Text 26"/>
+          <p:cNvPr id="13" name="Text 9"/>
           <p:cNvSpPr/>
           <p:nvPr/>
         </p:nvSpPr>
@@ -9080,7 +10665,7 @@
                 <a:ea typeface="Calibri" pitchFamily="34" charset="-122"/>
                 <a:cs typeface="Calibri" pitchFamily="34" charset="-120"/>
               </a:rPr>
-              <a:t>出典：Frey &amp; Osborne (2013) / 野村総合研究所×オックスフォード大学 (2015)。確率は米国O*NETベース・要現物確認。</a:t>
+              <a:t>出典：総務省「情報通信白書」令和7年版(2024年度調査) ／ 国立社会保障・人口問題研究所「将来推計人口(令和5年推計)」出生中位。</a:t>
             </a:r>
             <a:endParaRPr lang="en-US" sz="850" dirty="0"/>
           </a:p>
@@ -9088,7 +10673,7 @@
       </p:sp>
       <p:sp>
         <p:nvSpPr>
-          <p:cNvPr id="29" name="Text 27"/>
+          <p:cNvPr id="14" name="Text 10"/>
           <p:cNvSpPr/>
           <p:nvPr/>
         </p:nvSpPr>
@@ -9249,7 +10834,7 @@
                 <a:ea typeface="Calibri" pitchFamily="34" charset="-122"/>
                 <a:cs typeface="Calibri" pitchFamily="34" charset="-120"/>
               </a:rPr>
-              <a:t>THE SKILL ／ 伸びる力</a:t>
+              <a:t>THE PIVOT ／ 何が消えて、何が残るか</a:t>
             </a:r>
             <a:endParaRPr lang="en-US" sz="1250" dirty="0"/>
           </a:p>
@@ -9288,7 +10873,7 @@
                 <a:ea typeface="Cambria" pitchFamily="34" charset="-122"/>
                 <a:cs typeface="Cambria" pitchFamily="34" charset="-120"/>
               </a:rPr>
-              <a:t>AI時代に“需要が伸びるスキル”の上位は、営業の力そのもの</a:t>
+              <a:t>では、AIに“残る”のはどんな仕事か</a:t>
             </a:r>
             <a:endParaRPr lang="en-US" sz="2800" dirty="0"/>
           </a:p>
@@ -9302,8 +10887,8 @@
         </p:nvSpPr>
         <p:spPr>
           <a:xfrm>
-            <a:off x="566928" y="1536192"/>
-            <a:ext cx="5852160" cy="548640"/>
+            <a:off x="566928" y="1463040"/>
+            <a:ext cx="11064240" cy="640080"/>
           </a:xfrm>
           <a:prstGeom prst="rect">
             <a:avLst/>
@@ -9317,531 +10902,43 @@
           <a:p>
             <a:pPr indent="0" marL="0">
               <a:lnSpc>
-                <a:spcPts val="1900"/>
+                <a:spcPts val="2100"/>
               </a:lnSpc>
               <a:buNone/>
             </a:pPr>
             <a:r>
-              <a:rPr lang="en-US" sz="1400" b="1" dirty="0">
-                <a:solidFill>
-                  <a:srgbClr val="1B2430"/>
-                </a:solidFill>
-                <a:latin typeface="Calibri" pitchFamily="34" charset="0"/>
-                <a:ea typeface="Calibri" pitchFamily="34" charset="-122"/>
-                <a:cs typeface="Calibri" pitchFamily="34" charset="-120"/>
-              </a:rPr>
-              <a:t>世界経済フォーラム『Future of Jobs 2025』が挙げる“いま最重要の中核スキル”</a:t>
-            </a:r>
-            <a:endParaRPr lang="en-US" sz="1400" dirty="0"/>
-          </a:p>
-        </p:txBody>
-      </p:sp>
-      <p:sp>
-        <p:nvSpPr>
-          <p:cNvPr id="7" name="Text 5"/>
-          <p:cNvSpPr/>
-          <p:nvPr/>
-        </p:nvSpPr>
-        <p:spPr>
-          <a:xfrm>
-            <a:off x="566928" y="2286000"/>
-            <a:ext cx="4572000" cy="292608"/>
-          </a:xfrm>
-          <a:prstGeom prst="rect">
-            <a:avLst/>
-          </a:prstGeom>
-          <a:noFill/>
-          <a:ln/>
-        </p:spPr>
-        <p:txBody>
-          <a:bodyPr wrap="square" lIns="0" tIns="0" rIns="0" bIns="0" rtlCol="0" anchor="ctr"/>
-          <a:lstStyle/>
-          <a:p>
-            <a:pPr indent="0" marL="0">
-              <a:buNone/>
-            </a:pPr>
-            <a:r>
-              <a:rPr lang="en-US" sz="1350" b="1" dirty="0">
-                <a:solidFill>
-                  <a:srgbClr val="1B2430"/>
-                </a:solidFill>
-                <a:latin typeface="Calibri" pitchFamily="34" charset="0"/>
-                <a:ea typeface="Calibri" pitchFamily="34" charset="-122"/>
-                <a:cs typeface="Calibri" pitchFamily="34" charset="-120"/>
-              </a:rPr>
-              <a:t>リーダーシップ・社会的影響力</a:t>
-            </a:r>
-            <a:endParaRPr lang="en-US" sz="1350" dirty="0"/>
-          </a:p>
-        </p:txBody>
-      </p:sp>
-      <p:sp>
-        <p:nvSpPr>
-          <p:cNvPr id="8" name="Text 6"/>
-          <p:cNvSpPr/>
-          <p:nvPr/>
-        </p:nvSpPr>
-        <p:spPr>
-          <a:xfrm>
-            <a:off x="5138928" y="2286000"/>
-            <a:ext cx="822960" cy="292608"/>
-          </a:xfrm>
-          <a:prstGeom prst="rect">
-            <a:avLst/>
-          </a:prstGeom>
-          <a:noFill/>
-          <a:ln/>
-        </p:spPr>
-        <p:txBody>
-          <a:bodyPr wrap="square" lIns="0" tIns="0" rIns="0" bIns="0" rtlCol="0" anchor="ctr"/>
-          <a:lstStyle/>
-          <a:p>
-            <a:pPr algn="r" indent="0" marL="0">
-              <a:buNone/>
-            </a:pPr>
-            <a:r>
-              <a:rPr lang="en-US" sz="1300" b="1" dirty="0">
-                <a:solidFill>
-                  <a:srgbClr val="C9871F"/>
-                </a:solidFill>
-                <a:latin typeface="Calibri" pitchFamily="34" charset="0"/>
-                <a:ea typeface="Calibri" pitchFamily="34" charset="-122"/>
-                <a:cs typeface="Calibri" pitchFamily="34" charset="-120"/>
-              </a:rPr>
-              <a:t>3位</a:t>
-            </a:r>
-            <a:endParaRPr lang="en-US" sz="1300" dirty="0"/>
-          </a:p>
-        </p:txBody>
-      </p:sp>
-      <p:sp>
-        <p:nvSpPr>
-          <p:cNvPr id="9" name="Shape 7"/>
-          <p:cNvSpPr/>
-          <p:nvPr/>
-        </p:nvSpPr>
-        <p:spPr>
-          <a:xfrm>
-            <a:off x="566928" y="2615184"/>
-            <a:ext cx="5394960" cy="201168"/>
+              <a:rPr lang="en-US" sz="1500" dirty="0">
+                <a:solidFill>
+                  <a:srgbClr val="3D4756"/>
+                </a:solidFill>
+                <a:latin typeface="Calibri" pitchFamily="34" charset="0"/>
+                <a:ea typeface="Calibri" pitchFamily="34" charset="-122"/>
+                <a:cs typeface="Calibri" pitchFamily="34" charset="-120"/>
+              </a:rPr>
+              <a:t>分かれ目は「職業名」ではなく仕事の中身が「定型」か「創造性・信頼・交渉を要する対人」か。ここに、危機を“チャンス”に変える鍵がある。</a:t>
+            </a:r>
+            <a:endParaRPr lang="en-US" sz="1500" dirty="0"/>
+          </a:p>
+        </p:txBody>
+      </p:sp>
+      <p:sp>
+        <p:nvSpPr>
+          <p:cNvPr id="7" name="Shape 5"/>
+          <p:cNvSpPr/>
+          <p:nvPr/>
+        </p:nvSpPr>
+        <p:spPr>
+          <a:xfrm>
+            <a:off x="566928" y="2267712"/>
+            <a:ext cx="5440680" cy="3154680"/>
           </a:xfrm>
           <a:prstGeom prst="roundRect">
             <a:avLst>
-              <a:gd name="adj" fmla="val 50000"/>
+              <a:gd name="adj" fmla="val 2609"/>
             </a:avLst>
           </a:prstGeom>
           <a:solidFill>
-            <a:srgbClr val="DCE3EC"/>
-          </a:solidFill>
-          <a:ln/>
-        </p:spPr>
-      </p:sp>
-      <p:sp>
-        <p:nvSpPr>
-          <p:cNvPr id="10" name="Shape 8"/>
-          <p:cNvSpPr/>
-          <p:nvPr/>
-        </p:nvSpPr>
-        <p:spPr>
-          <a:xfrm>
-            <a:off x="566928" y="2615184"/>
-            <a:ext cx="4639666" cy="201168"/>
-          </a:xfrm>
-          <a:prstGeom prst="roundRect">
-            <a:avLst>
-              <a:gd name="adj" fmla="val 50000"/>
-            </a:avLst>
-          </a:prstGeom>
-          <a:solidFill>
-            <a:srgbClr val="1C7293"/>
-          </a:solidFill>
-          <a:ln/>
-        </p:spPr>
-      </p:sp>
-      <p:sp>
-        <p:nvSpPr>
-          <p:cNvPr id="11" name="Text 9"/>
-          <p:cNvSpPr/>
-          <p:nvPr/>
-        </p:nvSpPr>
-        <p:spPr>
-          <a:xfrm>
-            <a:off x="566928" y="3127248"/>
-            <a:ext cx="4572000" cy="292608"/>
-          </a:xfrm>
-          <a:prstGeom prst="rect">
-            <a:avLst/>
-          </a:prstGeom>
-          <a:noFill/>
-          <a:ln/>
-        </p:spPr>
-        <p:txBody>
-          <a:bodyPr wrap="square" lIns="0" tIns="0" rIns="0" bIns="0" rtlCol="0" anchor="ctr"/>
-          <a:lstStyle/>
-          <a:p>
-            <a:pPr indent="0" marL="0">
-              <a:buNone/>
-            </a:pPr>
-            <a:r>
-              <a:rPr lang="en-US" sz="1350" b="1" dirty="0">
-                <a:solidFill>
-                  <a:srgbClr val="1B2430"/>
-                </a:solidFill>
-                <a:latin typeface="Calibri" pitchFamily="34" charset="0"/>
-                <a:ea typeface="Calibri" pitchFamily="34" charset="-122"/>
-                <a:cs typeface="Calibri" pitchFamily="34" charset="-120"/>
-              </a:rPr>
-              <a:t>共感と傾聴</a:t>
-            </a:r>
-            <a:endParaRPr lang="en-US" sz="1350" dirty="0"/>
-          </a:p>
-        </p:txBody>
-      </p:sp>
-      <p:sp>
-        <p:nvSpPr>
-          <p:cNvPr id="12" name="Text 10"/>
-          <p:cNvSpPr/>
-          <p:nvPr/>
-        </p:nvSpPr>
-        <p:spPr>
-          <a:xfrm>
-            <a:off x="5138928" y="3127248"/>
-            <a:ext cx="822960" cy="292608"/>
-          </a:xfrm>
-          <a:prstGeom prst="rect">
-            <a:avLst/>
-          </a:prstGeom>
-          <a:noFill/>
-          <a:ln/>
-        </p:spPr>
-        <p:txBody>
-          <a:bodyPr wrap="square" lIns="0" tIns="0" rIns="0" bIns="0" rtlCol="0" anchor="ctr"/>
-          <a:lstStyle/>
-          <a:p>
-            <a:pPr algn="r" indent="0" marL="0">
-              <a:buNone/>
-            </a:pPr>
-            <a:r>
-              <a:rPr lang="en-US" sz="1300" b="1" dirty="0">
-                <a:solidFill>
-                  <a:srgbClr val="C9871F"/>
-                </a:solidFill>
-                <a:latin typeface="Calibri" pitchFamily="34" charset="0"/>
-                <a:ea typeface="Calibri" pitchFamily="34" charset="-122"/>
-                <a:cs typeface="Calibri" pitchFamily="34" charset="-120"/>
-              </a:rPr>
-              <a:t>7位</a:t>
-            </a:r>
-            <a:endParaRPr lang="en-US" sz="1300" dirty="0"/>
-          </a:p>
-        </p:txBody>
-      </p:sp>
-      <p:sp>
-        <p:nvSpPr>
-          <p:cNvPr id="13" name="Shape 11"/>
-          <p:cNvSpPr/>
-          <p:nvPr/>
-        </p:nvSpPr>
-        <p:spPr>
-          <a:xfrm>
-            <a:off x="566928" y="3456432"/>
-            <a:ext cx="5394960" cy="201168"/>
-          </a:xfrm>
-          <a:prstGeom prst="roundRect">
-            <a:avLst>
-              <a:gd name="adj" fmla="val 50000"/>
-            </a:avLst>
-          </a:prstGeom>
-          <a:solidFill>
-            <a:srgbClr val="DCE3EC"/>
-          </a:solidFill>
-          <a:ln/>
-        </p:spPr>
-      </p:sp>
-      <p:sp>
-        <p:nvSpPr>
-          <p:cNvPr id="14" name="Shape 12"/>
-          <p:cNvSpPr/>
-          <p:nvPr/>
-        </p:nvSpPr>
-        <p:spPr>
-          <a:xfrm>
-            <a:off x="566928" y="3456432"/>
-            <a:ext cx="3884371" cy="201168"/>
-          </a:xfrm>
-          <a:prstGeom prst="roundRect">
-            <a:avLst>
-              <a:gd name="adj" fmla="val 50000"/>
-            </a:avLst>
-          </a:prstGeom>
-          <a:solidFill>
-            <a:srgbClr val="1C7293"/>
-          </a:solidFill>
-          <a:ln/>
-        </p:spPr>
-      </p:sp>
-      <p:sp>
-        <p:nvSpPr>
-          <p:cNvPr id="15" name="Text 13"/>
-          <p:cNvSpPr/>
-          <p:nvPr/>
-        </p:nvSpPr>
-        <p:spPr>
-          <a:xfrm>
-            <a:off x="566928" y="3968496"/>
-            <a:ext cx="4572000" cy="292608"/>
-          </a:xfrm>
-          <a:prstGeom prst="rect">
-            <a:avLst/>
-          </a:prstGeom>
-          <a:noFill/>
-          <a:ln/>
-        </p:spPr>
-        <p:txBody>
-          <a:bodyPr wrap="square" lIns="0" tIns="0" rIns="0" bIns="0" rtlCol="0" anchor="ctr"/>
-          <a:lstStyle/>
-          <a:p>
-            <a:pPr indent="0" marL="0">
-              <a:buNone/>
-            </a:pPr>
-            <a:r>
-              <a:rPr lang="en-US" sz="1350" b="1" dirty="0">
-                <a:solidFill>
-                  <a:srgbClr val="1B2430"/>
-                </a:solidFill>
-                <a:latin typeface="Calibri" pitchFamily="34" charset="0"/>
-                <a:ea typeface="Calibri" pitchFamily="34" charset="-122"/>
-                <a:cs typeface="Calibri" pitchFamily="34" charset="-120"/>
-              </a:rPr>
-              <a:t>サービス志向・顧客対応</a:t>
-            </a:r>
-            <a:endParaRPr lang="en-US" sz="1350" dirty="0"/>
-          </a:p>
-        </p:txBody>
-      </p:sp>
-      <p:sp>
-        <p:nvSpPr>
-          <p:cNvPr id="16" name="Text 14"/>
-          <p:cNvSpPr/>
-          <p:nvPr/>
-        </p:nvSpPr>
-        <p:spPr>
-          <a:xfrm>
-            <a:off x="5138928" y="3968496"/>
-            <a:ext cx="822960" cy="292608"/>
-          </a:xfrm>
-          <a:prstGeom prst="rect">
-            <a:avLst/>
-          </a:prstGeom>
-          <a:noFill/>
-          <a:ln/>
-        </p:spPr>
-        <p:txBody>
-          <a:bodyPr wrap="square" lIns="0" tIns="0" rIns="0" bIns="0" rtlCol="0" anchor="ctr"/>
-          <a:lstStyle/>
-          <a:p>
-            <a:pPr algn="r" indent="0" marL="0">
-              <a:buNone/>
-            </a:pPr>
-            <a:r>
-              <a:rPr lang="en-US" sz="1300" b="1" dirty="0">
-                <a:solidFill>
-                  <a:srgbClr val="C9871F"/>
-                </a:solidFill>
-                <a:latin typeface="Calibri" pitchFamily="34" charset="0"/>
-                <a:ea typeface="Calibri" pitchFamily="34" charset="-122"/>
-                <a:cs typeface="Calibri" pitchFamily="34" charset="-120"/>
-              </a:rPr>
-              <a:t>10位</a:t>
-            </a:r>
-            <a:endParaRPr lang="en-US" sz="1300" dirty="0"/>
-          </a:p>
-        </p:txBody>
-      </p:sp>
-      <p:sp>
-        <p:nvSpPr>
-          <p:cNvPr id="17" name="Shape 15"/>
-          <p:cNvSpPr/>
-          <p:nvPr/>
-        </p:nvSpPr>
-        <p:spPr>
-          <a:xfrm>
-            <a:off x="566928" y="4297680"/>
-            <a:ext cx="5394960" cy="201168"/>
-          </a:xfrm>
-          <a:prstGeom prst="roundRect">
-            <a:avLst>
-              <a:gd name="adj" fmla="val 50000"/>
-            </a:avLst>
-          </a:prstGeom>
-          <a:solidFill>
-            <a:srgbClr val="DCE3EC"/>
-          </a:solidFill>
-          <a:ln/>
-        </p:spPr>
-      </p:sp>
-      <p:sp>
-        <p:nvSpPr>
-          <p:cNvPr id="18" name="Shape 16"/>
-          <p:cNvSpPr/>
-          <p:nvPr/>
-        </p:nvSpPr>
-        <p:spPr>
-          <a:xfrm>
-            <a:off x="566928" y="4297680"/>
-            <a:ext cx="3398825" cy="201168"/>
-          </a:xfrm>
-          <a:prstGeom prst="roundRect">
-            <a:avLst>
-              <a:gd name="adj" fmla="val 50000"/>
-            </a:avLst>
-          </a:prstGeom>
-          <a:solidFill>
-            <a:srgbClr val="1C7293"/>
-          </a:solidFill>
-          <a:ln/>
-        </p:spPr>
-      </p:sp>
-      <p:sp>
-        <p:nvSpPr>
-          <p:cNvPr id="19" name="Text 17"/>
-          <p:cNvSpPr/>
-          <p:nvPr/>
-        </p:nvSpPr>
-        <p:spPr>
-          <a:xfrm>
-            <a:off x="566928" y="4809744"/>
-            <a:ext cx="4572000" cy="292608"/>
-          </a:xfrm>
-          <a:prstGeom prst="rect">
-            <a:avLst/>
-          </a:prstGeom>
-          <a:noFill/>
-          <a:ln/>
-        </p:spPr>
-        <p:txBody>
-          <a:bodyPr wrap="square" lIns="0" tIns="0" rIns="0" bIns="0" rtlCol="0" anchor="ctr"/>
-          <a:lstStyle/>
-          <a:p>
-            <a:pPr indent="0" marL="0">
-              <a:buNone/>
-            </a:pPr>
-            <a:r>
-              <a:rPr lang="en-US" sz="1350" b="1" dirty="0">
-                <a:solidFill>
-                  <a:srgbClr val="1B2430"/>
-                </a:solidFill>
-                <a:latin typeface="Calibri" pitchFamily="34" charset="0"/>
-                <a:ea typeface="Calibri" pitchFamily="34" charset="-122"/>
-                <a:cs typeface="Calibri" pitchFamily="34" charset="-120"/>
-              </a:rPr>
-              <a:t>レジリエンス・柔軟性</a:t>
-            </a:r>
-            <a:endParaRPr lang="en-US" sz="1350" dirty="0"/>
-          </a:p>
-        </p:txBody>
-      </p:sp>
-      <p:sp>
-        <p:nvSpPr>
-          <p:cNvPr id="20" name="Text 18"/>
-          <p:cNvSpPr/>
-          <p:nvPr/>
-        </p:nvSpPr>
-        <p:spPr>
-          <a:xfrm>
-            <a:off x="5138928" y="4809744"/>
-            <a:ext cx="822960" cy="292608"/>
-          </a:xfrm>
-          <a:prstGeom prst="rect">
-            <a:avLst/>
-          </a:prstGeom>
-          <a:noFill/>
-          <a:ln/>
-        </p:spPr>
-        <p:txBody>
-          <a:bodyPr wrap="square" lIns="0" tIns="0" rIns="0" bIns="0" rtlCol="0" anchor="ctr"/>
-          <a:lstStyle/>
-          <a:p>
-            <a:pPr algn="r" indent="0" marL="0">
-              <a:buNone/>
-            </a:pPr>
-            <a:r>
-              <a:rPr lang="en-US" sz="1300" b="1" dirty="0">
-                <a:solidFill>
-                  <a:srgbClr val="C9871F"/>
-                </a:solidFill>
-                <a:latin typeface="Calibri" pitchFamily="34" charset="0"/>
-                <a:ea typeface="Calibri" pitchFamily="34" charset="-122"/>
-                <a:cs typeface="Calibri" pitchFamily="34" charset="-120"/>
-              </a:rPr>
-              <a:t>2位</a:t>
-            </a:r>
-            <a:endParaRPr lang="en-US" sz="1300" dirty="0"/>
-          </a:p>
-        </p:txBody>
-      </p:sp>
-      <p:sp>
-        <p:nvSpPr>
-          <p:cNvPr id="21" name="Shape 19"/>
-          <p:cNvSpPr/>
-          <p:nvPr/>
-        </p:nvSpPr>
-        <p:spPr>
-          <a:xfrm>
-            <a:off x="566928" y="5138928"/>
-            <a:ext cx="5394960" cy="201168"/>
-          </a:xfrm>
-          <a:prstGeom prst="roundRect">
-            <a:avLst>
-              <a:gd name="adj" fmla="val 50000"/>
-            </a:avLst>
-          </a:prstGeom>
-          <a:solidFill>
-            <a:srgbClr val="DCE3EC"/>
-          </a:solidFill>
-          <a:ln/>
-        </p:spPr>
-      </p:sp>
-      <p:sp>
-        <p:nvSpPr>
-          <p:cNvPr id="22" name="Shape 20"/>
-          <p:cNvSpPr/>
-          <p:nvPr/>
-        </p:nvSpPr>
-        <p:spPr>
-          <a:xfrm>
-            <a:off x="566928" y="5138928"/>
-            <a:ext cx="4855464" cy="201168"/>
-          </a:xfrm>
-          <a:prstGeom prst="roundRect">
-            <a:avLst>
-              <a:gd name="adj" fmla="val 50000"/>
-            </a:avLst>
-          </a:prstGeom>
-          <a:solidFill>
-            <a:srgbClr val="1C7293"/>
-          </a:solidFill>
-          <a:ln/>
-        </p:spPr>
-      </p:sp>
-      <p:sp>
-        <p:nvSpPr>
-          <p:cNvPr id="23" name="Shape 21"/>
-          <p:cNvSpPr/>
-          <p:nvPr/>
-        </p:nvSpPr>
-        <p:spPr>
-          <a:xfrm>
-            <a:off x="6355080" y="1874520"/>
-            <a:ext cx="5257800" cy="3840480"/>
-          </a:xfrm>
-          <a:prstGeom prst="roundRect">
-            <a:avLst>
-              <a:gd name="adj" fmla="val 2143"/>
-            </a:avLst>
-          </a:prstGeom>
-          <a:solidFill>
-            <a:srgbClr val="1B2A4A"/>
+            <a:srgbClr val="FFFFFF"/>
           </a:solidFill>
           <a:ln/>
           <a:effectLst>
@@ -9855,14 +10952,556 @@
       </p:sp>
       <p:sp>
         <p:nvSpPr>
+          <p:cNvPr id="8" name="Shape 6"/>
+          <p:cNvSpPr/>
+          <p:nvPr/>
+        </p:nvSpPr>
+        <p:spPr>
+          <a:xfrm>
+            <a:off x="566928" y="2267712"/>
+            <a:ext cx="5440680" cy="566928"/>
+          </a:xfrm>
+          <a:prstGeom prst="roundRect">
+            <a:avLst>
+              <a:gd name="adj" fmla="val 14516"/>
+            </a:avLst>
+          </a:prstGeom>
+          <a:solidFill>
+            <a:srgbClr val="B3524C"/>
+          </a:solidFill>
+          <a:ln/>
+        </p:spPr>
+      </p:sp>
+      <p:sp>
+        <p:nvSpPr>
+          <p:cNvPr id="9" name="Shape 7"/>
+          <p:cNvSpPr/>
+          <p:nvPr/>
+        </p:nvSpPr>
+        <p:spPr>
+          <a:xfrm>
+            <a:off x="566928" y="2551176"/>
+            <a:ext cx="5440680" cy="283464"/>
+          </a:xfrm>
+          <a:prstGeom prst="rect">
+            <a:avLst/>
+          </a:prstGeom>
+          <a:solidFill>
+            <a:srgbClr val="B3524C"/>
+          </a:solidFill>
+          <a:ln/>
+        </p:spPr>
+      </p:sp>
+      <p:sp>
+        <p:nvSpPr>
+          <p:cNvPr id="10" name="Text 8"/>
+          <p:cNvSpPr/>
+          <p:nvPr/>
+        </p:nvSpPr>
+        <p:spPr>
+          <a:xfrm>
+            <a:off x="841248" y="2267712"/>
+            <a:ext cx="4892040" cy="566928"/>
+          </a:xfrm>
+          <a:prstGeom prst="rect">
+            <a:avLst/>
+          </a:prstGeom>
+          <a:noFill/>
+          <a:ln/>
+        </p:spPr>
+        <p:txBody>
+          <a:bodyPr wrap="square" lIns="0" tIns="0" rIns="0" bIns="0" rtlCol="0" anchor="ctr"/>
+          <a:lstStyle/>
+          <a:p>
+            <a:pPr indent="0" marL="0">
+              <a:buNone/>
+            </a:pPr>
+            <a:r>
+              <a:rPr lang="en-US" sz="1600" b="1" dirty="0">
+                <a:solidFill>
+                  <a:srgbClr val="FFFFFF"/>
+                </a:solidFill>
+                <a:latin typeface="Calibri" pitchFamily="34" charset="0"/>
+                <a:ea typeface="Calibri" pitchFamily="34" charset="-122"/>
+                <a:cs typeface="Calibri" pitchFamily="34" charset="-120"/>
+              </a:rPr>
+              <a:t>AIに代替されやすい（高リスク）</a:t>
+            </a:r>
+            <a:endParaRPr lang="en-US" sz="1600" dirty="0"/>
+          </a:p>
+        </p:txBody>
+      </p:sp>
+      <p:sp>
+        <p:nvSpPr>
+          <p:cNvPr id="11" name="Text 9"/>
+          <p:cNvSpPr/>
+          <p:nvPr/>
+        </p:nvSpPr>
+        <p:spPr>
+          <a:xfrm>
+            <a:off x="886968" y="3108960"/>
+            <a:ext cx="3566160" cy="457200"/>
+          </a:xfrm>
+          <a:prstGeom prst="rect">
+            <a:avLst/>
+          </a:prstGeom>
+          <a:noFill/>
+          <a:ln/>
+        </p:spPr>
+        <p:txBody>
+          <a:bodyPr wrap="square" lIns="0" tIns="0" rIns="0" bIns="0" rtlCol="0" anchor="ctr"/>
+          <a:lstStyle/>
+          <a:p>
+            <a:pPr indent="0" marL="0">
+              <a:buNone/>
+            </a:pPr>
+            <a:r>
+              <a:rPr lang="en-US" sz="1400" dirty="0">
+                <a:solidFill>
+                  <a:srgbClr val="1B2430"/>
+                </a:solidFill>
+                <a:latin typeface="Calibri" pitchFamily="34" charset="0"/>
+                <a:ea typeface="Calibri" pitchFamily="34" charset="-122"/>
+                <a:cs typeface="Calibri" pitchFamily="34" charset="-120"/>
+              </a:rPr>
+              <a:t>テレアポ／電話勧誘</a:t>
+            </a:r>
+            <a:endParaRPr lang="en-US" sz="1400" dirty="0"/>
+          </a:p>
+        </p:txBody>
+      </p:sp>
+      <p:sp>
+        <p:nvSpPr>
+          <p:cNvPr id="12" name="Text 10"/>
+          <p:cNvSpPr/>
+          <p:nvPr/>
+        </p:nvSpPr>
+        <p:spPr>
+          <a:xfrm>
+            <a:off x="4361688" y="3108960"/>
+            <a:ext cx="1463040" cy="457200"/>
+          </a:xfrm>
+          <a:prstGeom prst="rect">
+            <a:avLst/>
+          </a:prstGeom>
+          <a:noFill/>
+          <a:ln/>
+        </p:spPr>
+        <p:txBody>
+          <a:bodyPr wrap="square" lIns="0" tIns="0" rIns="0" bIns="0" rtlCol="0" anchor="ctr"/>
+          <a:lstStyle/>
+          <a:p>
+            <a:pPr algn="r" indent="0" marL="0">
+              <a:buNone/>
+            </a:pPr>
+            <a:r>
+              <a:rPr lang="en-US" sz="1250" b="1" dirty="0">
+                <a:solidFill>
+                  <a:srgbClr val="B3524C"/>
+                </a:solidFill>
+                <a:latin typeface="Calibri" pitchFamily="34" charset="0"/>
+                <a:ea typeface="Calibri" pitchFamily="34" charset="-122"/>
+                <a:cs typeface="Calibri" pitchFamily="34" charset="-120"/>
+              </a:rPr>
+              <a:t>代替確率 0.99</a:t>
+            </a:r>
+            <a:endParaRPr lang="en-US" sz="1250" dirty="0"/>
+          </a:p>
+        </p:txBody>
+      </p:sp>
+      <p:sp>
+        <p:nvSpPr>
+          <p:cNvPr id="13" name="Text 11"/>
+          <p:cNvSpPr/>
+          <p:nvPr/>
+        </p:nvSpPr>
+        <p:spPr>
+          <a:xfrm>
+            <a:off x="886968" y="3657600"/>
+            <a:ext cx="3566160" cy="457200"/>
+          </a:xfrm>
+          <a:prstGeom prst="rect">
+            <a:avLst/>
+          </a:prstGeom>
+          <a:noFill/>
+          <a:ln/>
+        </p:spPr>
+        <p:txBody>
+          <a:bodyPr wrap="square" lIns="0" tIns="0" rIns="0" bIns="0" rtlCol="0" anchor="ctr"/>
+          <a:lstStyle/>
+          <a:p>
+            <a:pPr indent="0" marL="0">
+              <a:buNone/>
+            </a:pPr>
+            <a:r>
+              <a:rPr lang="en-US" sz="1400" dirty="0">
+                <a:solidFill>
+                  <a:srgbClr val="1B2430"/>
+                </a:solidFill>
+                <a:latin typeface="Calibri" pitchFamily="34" charset="0"/>
+                <a:ea typeface="Calibri" pitchFamily="34" charset="-122"/>
+                <a:cs typeface="Calibri" pitchFamily="34" charset="-120"/>
+              </a:rPr>
+              <a:t>レジ・定型販売</a:t>
+            </a:r>
+            <a:endParaRPr lang="en-US" sz="1400" dirty="0"/>
+          </a:p>
+        </p:txBody>
+      </p:sp>
+      <p:sp>
+        <p:nvSpPr>
+          <p:cNvPr id="14" name="Text 12"/>
+          <p:cNvSpPr/>
+          <p:nvPr/>
+        </p:nvSpPr>
+        <p:spPr>
+          <a:xfrm>
+            <a:off x="4361688" y="3657600"/>
+            <a:ext cx="1463040" cy="457200"/>
+          </a:xfrm>
+          <a:prstGeom prst="rect">
+            <a:avLst/>
+          </a:prstGeom>
+          <a:noFill/>
+          <a:ln/>
+        </p:spPr>
+        <p:txBody>
+          <a:bodyPr wrap="square" lIns="0" tIns="0" rIns="0" bIns="0" rtlCol="0" anchor="ctr"/>
+          <a:lstStyle/>
+          <a:p>
+            <a:pPr algn="r" indent="0" marL="0">
+              <a:buNone/>
+            </a:pPr>
+            <a:r>
+              <a:rPr lang="en-US" sz="1250" b="1" dirty="0">
+                <a:solidFill>
+                  <a:srgbClr val="B3524C"/>
+                </a:solidFill>
+                <a:latin typeface="Calibri" pitchFamily="34" charset="0"/>
+                <a:ea typeface="Calibri" pitchFamily="34" charset="-122"/>
+                <a:cs typeface="Calibri" pitchFamily="34" charset="-120"/>
+              </a:rPr>
+              <a:t>0.97</a:t>
+            </a:r>
+            <a:endParaRPr lang="en-US" sz="1250" dirty="0"/>
+          </a:p>
+        </p:txBody>
+      </p:sp>
+      <p:sp>
+        <p:nvSpPr>
+          <p:cNvPr id="15" name="Text 13"/>
+          <p:cNvSpPr/>
+          <p:nvPr/>
+        </p:nvSpPr>
+        <p:spPr>
+          <a:xfrm>
+            <a:off x="886968" y="4206240"/>
+            <a:ext cx="3566160" cy="457200"/>
+          </a:xfrm>
+          <a:prstGeom prst="rect">
+            <a:avLst/>
+          </a:prstGeom>
+          <a:noFill/>
+          <a:ln/>
+        </p:spPr>
+        <p:txBody>
+          <a:bodyPr wrap="square" lIns="0" tIns="0" rIns="0" bIns="0" rtlCol="0" anchor="ctr"/>
+          <a:lstStyle/>
+          <a:p>
+            <a:pPr indent="0" marL="0">
+              <a:buNone/>
+            </a:pPr>
+            <a:r>
+              <a:rPr lang="en-US" sz="1400" dirty="0">
+                <a:solidFill>
+                  <a:srgbClr val="1B2430"/>
+                </a:solidFill>
+                <a:latin typeface="Calibri" pitchFamily="34" charset="0"/>
+                <a:ea typeface="Calibri" pitchFamily="34" charset="-122"/>
+                <a:cs typeface="Calibri" pitchFamily="34" charset="-120"/>
+              </a:rPr>
+              <a:t>小売販売員（定型接客）</a:t>
+            </a:r>
+            <a:endParaRPr lang="en-US" sz="1400" dirty="0"/>
+          </a:p>
+        </p:txBody>
+      </p:sp>
+      <p:sp>
+        <p:nvSpPr>
+          <p:cNvPr id="16" name="Text 14"/>
+          <p:cNvSpPr/>
+          <p:nvPr/>
+        </p:nvSpPr>
+        <p:spPr>
+          <a:xfrm>
+            <a:off x="4361688" y="4206240"/>
+            <a:ext cx="1463040" cy="457200"/>
+          </a:xfrm>
+          <a:prstGeom prst="rect">
+            <a:avLst/>
+          </a:prstGeom>
+          <a:noFill/>
+          <a:ln/>
+        </p:spPr>
+        <p:txBody>
+          <a:bodyPr wrap="square" lIns="0" tIns="0" rIns="0" bIns="0" rtlCol="0" anchor="ctr"/>
+          <a:lstStyle/>
+          <a:p>
+            <a:pPr algn="r" indent="0" marL="0">
+              <a:buNone/>
+            </a:pPr>
+            <a:r>
+              <a:rPr lang="en-US" sz="1250" b="1" dirty="0">
+                <a:solidFill>
+                  <a:srgbClr val="B3524C"/>
+                </a:solidFill>
+                <a:latin typeface="Calibri" pitchFamily="34" charset="0"/>
+                <a:ea typeface="Calibri" pitchFamily="34" charset="-122"/>
+                <a:cs typeface="Calibri" pitchFamily="34" charset="-120"/>
+              </a:rPr>
+              <a:t>0.92</a:t>
+            </a:r>
+            <a:endParaRPr lang="en-US" sz="1250" dirty="0"/>
+          </a:p>
+        </p:txBody>
+      </p:sp>
+      <p:sp>
+        <p:nvSpPr>
+          <p:cNvPr id="17" name="Text 15"/>
+          <p:cNvSpPr/>
+          <p:nvPr/>
+        </p:nvSpPr>
+        <p:spPr>
+          <a:xfrm>
+            <a:off x="886968" y="4754880"/>
+            <a:ext cx="3566160" cy="457200"/>
+          </a:xfrm>
+          <a:prstGeom prst="rect">
+            <a:avLst/>
+          </a:prstGeom>
+          <a:noFill/>
+          <a:ln/>
+        </p:spPr>
+        <p:txBody>
+          <a:bodyPr wrap="square" lIns="0" tIns="0" rIns="0" bIns="0" rtlCol="0" anchor="ctr"/>
+          <a:lstStyle/>
+          <a:p>
+            <a:pPr indent="0" marL="0">
+              <a:buNone/>
+            </a:pPr>
+            <a:r>
+              <a:rPr lang="en-US" sz="1400" dirty="0">
+                <a:solidFill>
+                  <a:srgbClr val="1B2430"/>
+                </a:solidFill>
+                <a:latin typeface="Calibri" pitchFamily="34" charset="0"/>
+                <a:ea typeface="Calibri" pitchFamily="34" charset="-122"/>
+                <a:cs typeface="Calibri" pitchFamily="34" charset="-120"/>
+              </a:rPr>
+              <a:t>定型的な事務・データ入力</a:t>
+            </a:r>
+            <a:endParaRPr lang="en-US" sz="1400" dirty="0"/>
+          </a:p>
+        </p:txBody>
+      </p:sp>
+      <p:sp>
+        <p:nvSpPr>
+          <p:cNvPr id="18" name="Text 16"/>
+          <p:cNvSpPr/>
+          <p:nvPr/>
+        </p:nvSpPr>
+        <p:spPr>
+          <a:xfrm>
+            <a:off x="4361688" y="4754880"/>
+            <a:ext cx="1463040" cy="457200"/>
+          </a:xfrm>
+          <a:prstGeom prst="rect">
+            <a:avLst/>
+          </a:prstGeom>
+          <a:noFill/>
+          <a:ln/>
+        </p:spPr>
+        <p:txBody>
+          <a:bodyPr wrap="square" lIns="0" tIns="0" rIns="0" bIns="0" rtlCol="0" anchor="ctr"/>
+          <a:lstStyle/>
+          <a:p>
+            <a:pPr algn="r" indent="0" marL="0">
+              <a:buNone/>
+            </a:pPr>
+            <a:r>
+              <a:rPr lang="en-US" sz="1250" b="1" dirty="0">
+                <a:solidFill>
+                  <a:srgbClr val="B3524C"/>
+                </a:solidFill>
+                <a:latin typeface="Calibri" pitchFamily="34" charset="0"/>
+                <a:ea typeface="Calibri" pitchFamily="34" charset="-122"/>
+                <a:cs typeface="Calibri" pitchFamily="34" charset="-120"/>
+              </a:rPr>
+              <a:t>高リスク</a:t>
+            </a:r>
+            <a:endParaRPr lang="en-US" sz="1250" dirty="0"/>
+          </a:p>
+        </p:txBody>
+      </p:sp>
+      <p:sp>
+        <p:nvSpPr>
+          <p:cNvPr id="19" name="Shape 17"/>
+          <p:cNvSpPr/>
+          <p:nvPr/>
+        </p:nvSpPr>
+        <p:spPr>
+          <a:xfrm>
+            <a:off x="6190488" y="2267712"/>
+            <a:ext cx="5440680" cy="3154680"/>
+          </a:xfrm>
+          <a:prstGeom prst="roundRect">
+            <a:avLst>
+              <a:gd name="adj" fmla="val 2609"/>
+            </a:avLst>
+          </a:prstGeom>
+          <a:solidFill>
+            <a:srgbClr val="FFFFFF"/>
+          </a:solidFill>
+          <a:ln/>
+          <a:effectLst>
+            <a:outerShdw sx="100000" sy="100000" kx="0" ky="0" algn="bl" rotWithShape="0" blurRad="114300" dist="38100" dir="5400000">
+              <a:srgbClr val="9AA6B8">
+                <a:alpha val="35000"/>
+              </a:srgbClr>
+            </a:outerShdw>
+          </a:effectLst>
+        </p:spPr>
+      </p:sp>
+      <p:sp>
+        <p:nvSpPr>
+          <p:cNvPr id="20" name="Shape 18"/>
+          <p:cNvSpPr/>
+          <p:nvPr/>
+        </p:nvSpPr>
+        <p:spPr>
+          <a:xfrm>
+            <a:off x="6190488" y="2267712"/>
+            <a:ext cx="5440680" cy="566928"/>
+          </a:xfrm>
+          <a:prstGeom prst="roundRect">
+            <a:avLst>
+              <a:gd name="adj" fmla="val 14516"/>
+            </a:avLst>
+          </a:prstGeom>
+          <a:solidFill>
+            <a:srgbClr val="2E7D57"/>
+          </a:solidFill>
+          <a:ln/>
+        </p:spPr>
+      </p:sp>
+      <p:sp>
+        <p:nvSpPr>
+          <p:cNvPr id="21" name="Shape 19"/>
+          <p:cNvSpPr/>
+          <p:nvPr/>
+        </p:nvSpPr>
+        <p:spPr>
+          <a:xfrm>
+            <a:off x="6190488" y="2551176"/>
+            <a:ext cx="5440680" cy="283464"/>
+          </a:xfrm>
+          <a:prstGeom prst="rect">
+            <a:avLst/>
+          </a:prstGeom>
+          <a:solidFill>
+            <a:srgbClr val="2E7D57"/>
+          </a:solidFill>
+          <a:ln/>
+        </p:spPr>
+      </p:sp>
+      <p:sp>
+        <p:nvSpPr>
+          <p:cNvPr id="22" name="Text 20"/>
+          <p:cNvSpPr/>
+          <p:nvPr/>
+        </p:nvSpPr>
+        <p:spPr>
+          <a:xfrm>
+            <a:off x="6464808" y="2267712"/>
+            <a:ext cx="4892040" cy="566928"/>
+          </a:xfrm>
+          <a:prstGeom prst="rect">
+            <a:avLst/>
+          </a:prstGeom>
+          <a:noFill/>
+          <a:ln/>
+        </p:spPr>
+        <p:txBody>
+          <a:bodyPr wrap="square" lIns="0" tIns="0" rIns="0" bIns="0" rtlCol="0" anchor="ctr"/>
+          <a:lstStyle/>
+          <a:p>
+            <a:pPr indent="0" marL="0">
+              <a:buNone/>
+            </a:pPr>
+            <a:r>
+              <a:rPr lang="en-US" sz="1600" b="1" dirty="0">
+                <a:solidFill>
+                  <a:srgbClr val="FFFFFF"/>
+                </a:solidFill>
+                <a:latin typeface="Calibri" pitchFamily="34" charset="0"/>
+                <a:ea typeface="Calibri" pitchFamily="34" charset="-122"/>
+                <a:cs typeface="Calibri" pitchFamily="34" charset="-120"/>
+              </a:rPr>
+              <a:t>残る＝価値が上がる（低リスク）</a:t>
+            </a:r>
+            <a:endParaRPr lang="en-US" sz="1600" dirty="0"/>
+          </a:p>
+        </p:txBody>
+      </p:sp>
+      <p:sp>
+        <p:nvSpPr>
+          <p:cNvPr id="23" name="Text 21"/>
+          <p:cNvSpPr/>
+          <p:nvPr/>
+        </p:nvSpPr>
+        <p:spPr>
+          <a:xfrm>
+            <a:off x="6510528" y="3108960"/>
+            <a:ext cx="3931920" cy="457200"/>
+          </a:xfrm>
+          <a:prstGeom prst="rect">
+            <a:avLst/>
+          </a:prstGeom>
+          <a:noFill/>
+          <a:ln/>
+        </p:spPr>
+        <p:txBody>
+          <a:bodyPr wrap="square" lIns="0" tIns="0" rIns="0" bIns="0" rtlCol="0" anchor="ctr"/>
+          <a:lstStyle/>
+          <a:p>
+            <a:pPr indent="0" marL="0">
+              <a:buNone/>
+            </a:pPr>
+            <a:r>
+              <a:rPr lang="en-US" sz="1400" dirty="0">
+                <a:solidFill>
+                  <a:srgbClr val="1B2430"/>
+                </a:solidFill>
+                <a:latin typeface="Calibri" pitchFamily="34" charset="0"/>
+                <a:ea typeface="Calibri" pitchFamily="34" charset="-122"/>
+                <a:cs typeface="Calibri" pitchFamily="34" charset="-120"/>
+              </a:rPr>
+              <a:t>創造性・提案力を要する仕事</a:t>
+            </a:r>
+            <a:endParaRPr lang="en-US" sz="1400" dirty="0"/>
+          </a:p>
+        </p:txBody>
+      </p:sp>
+      <p:sp>
+        <p:nvSpPr>
           <p:cNvPr id="24" name="Text 22"/>
           <p:cNvSpPr/>
           <p:nvPr/>
         </p:nvSpPr>
         <p:spPr>
           <a:xfrm>
-            <a:off x="6720840" y="2103120"/>
-            <a:ext cx="4526280" cy="365760"/>
+            <a:off x="6510528" y="3657600"/>
+            <a:ext cx="3931920" cy="457200"/>
           </a:xfrm>
           <a:prstGeom prst="rect">
             <a:avLst/>
@@ -9878,17 +11517,17 @@
               <a:buNone/>
             </a:pPr>
             <a:r>
-              <a:rPr lang="en-US" sz="1500" b="1" dirty="0">
-                <a:solidFill>
-                  <a:srgbClr val="E8A33D"/>
-                </a:solidFill>
-                <a:latin typeface="Calibri" pitchFamily="34" charset="0"/>
-                <a:ea typeface="Calibri" pitchFamily="34" charset="-122"/>
-                <a:cs typeface="Calibri" pitchFamily="34" charset="-120"/>
-              </a:rPr>
-              <a:t>いまのAIが“届いていない”領域</a:t>
-            </a:r>
-            <a:endParaRPr lang="en-US" sz="1500" dirty="0"/>
+              <a:rPr lang="en-US" sz="1400" dirty="0">
+                <a:solidFill>
+                  <a:srgbClr val="1B2430"/>
+                </a:solidFill>
+                <a:latin typeface="Calibri" pitchFamily="34" charset="0"/>
+                <a:ea typeface="Calibri" pitchFamily="34" charset="-122"/>
+                <a:cs typeface="Calibri" pitchFamily="34" charset="-120"/>
+              </a:rPr>
+              <a:t>社会的知性・信頼構築</a:t>
+            </a:r>
+            <a:endParaRPr lang="en-US" sz="1400" dirty="0"/>
           </a:p>
         </p:txBody>
       </p:sp>
@@ -9900,134 +11539,74 @@
         </p:nvSpPr>
         <p:spPr>
           <a:xfrm>
-            <a:off x="6720840" y="2514600"/>
-            <a:ext cx="4526280" cy="822960"/>
-          </a:xfrm>
-          <a:prstGeom prst="rect">
-            <a:avLst/>
-          </a:prstGeom>
-          <a:noFill/>
-          <a:ln/>
-        </p:spPr>
-        <p:txBody>
-          <a:bodyPr wrap="square" lIns="0" tIns="0" rIns="0" bIns="0" rtlCol="0" anchor="t"/>
+            <a:off x="6510528" y="4206240"/>
+            <a:ext cx="3931920" cy="457200"/>
+          </a:xfrm>
+          <a:prstGeom prst="rect">
+            <a:avLst/>
+          </a:prstGeom>
+          <a:noFill/>
+          <a:ln/>
+        </p:spPr>
+        <p:txBody>
+          <a:bodyPr wrap="square" lIns="0" tIns="0" rIns="0" bIns="0" rtlCol="0" anchor="ctr"/>
           <a:lstStyle/>
           <a:p>
             <a:pPr indent="0" marL="0">
-              <a:lnSpc>
-                <a:spcPts val="2000"/>
-              </a:lnSpc>
+              <a:buNone/>
+            </a:pPr>
+            <a:r>
+              <a:rPr lang="en-US" sz="1400" dirty="0">
+                <a:solidFill>
+                  <a:srgbClr val="1B2430"/>
+                </a:solidFill>
+                <a:latin typeface="Calibri" pitchFamily="34" charset="0"/>
+                <a:ea typeface="Calibri" pitchFamily="34" charset="-122"/>
+                <a:cs typeface="Calibri" pitchFamily="34" charset="-120"/>
+              </a:rPr>
+              <a:t>交渉・折衝を伴う対人商談</a:t>
+            </a:r>
+            <a:endParaRPr lang="en-US" sz="1400" dirty="0"/>
+          </a:p>
+        </p:txBody>
+      </p:sp>
+      <p:sp>
+        <p:nvSpPr>
+          <p:cNvPr id="26" name="Text 24"/>
+          <p:cNvSpPr/>
+          <p:nvPr/>
+        </p:nvSpPr>
+        <p:spPr>
+          <a:xfrm>
+            <a:off x="6510528" y="4754880"/>
+            <a:ext cx="3931920" cy="457200"/>
+          </a:xfrm>
+          <a:prstGeom prst="rect">
+            <a:avLst/>
+          </a:prstGeom>
+          <a:noFill/>
+          <a:ln/>
+        </p:spPr>
+        <p:txBody>
+          <a:bodyPr wrap="square" lIns="0" tIns="0" rIns="0" bIns="0" rtlCol="0" anchor="ctr"/>
+          <a:lstStyle/>
+          <a:p>
+            <a:pPr indent="0" marL="0">
               <a:buNone/>
             </a:pPr>
             <a:r>
               <a:rPr lang="en-US" sz="1400" b="1" dirty="0">
                 <a:solidFill>
-                  <a:srgbClr val="FFFFFF"/>
-                </a:solidFill>
-                <a:latin typeface="Calibri" pitchFamily="34" charset="0"/>
-                <a:ea typeface="Calibri" pitchFamily="34" charset="-122"/>
-                <a:cs typeface="Calibri" pitchFamily="34" charset="-120"/>
-              </a:rPr>
-              <a:t>AI利用は「コンピュータ・数学」タスクに集中。</a:t>
+                  <a:srgbClr val="2E7D57"/>
+                </a:solidFill>
+                <a:latin typeface="Calibri" pitchFamily="34" charset="0"/>
+                <a:ea typeface="Calibri" pitchFamily="34" charset="-122"/>
+                <a:cs typeface="Calibri" pitchFamily="34" charset="-120"/>
+              </a:rPr>
+              <a:t>＝住宅の高額・対面コンサル営業</a:t>
             </a:r>
             <a:endParaRPr lang="en-US" sz="1400" dirty="0"/>
           </a:p>
-          <a:p>
-            <a:pPr indent="0" marL="0">
-              <a:lnSpc>
-                <a:spcPts val="2000"/>
-              </a:lnSpc>
-              <a:buNone/>
-            </a:pPr>
-            <a:r>
-              <a:rPr lang="en-US" sz="1400" dirty="0">
-                <a:solidFill>
-                  <a:srgbClr val="CADCFC"/>
-                </a:solidFill>
-                <a:latin typeface="Calibri" pitchFamily="34" charset="0"/>
-                <a:ea typeface="Calibri" pitchFamily="34" charset="-122"/>
-                <a:cs typeface="Calibri" pitchFamily="34" charset="-120"/>
-              </a:rPr>
-              <a:t>身体・対面・関係性を要する仕事の利用は極端に低い。</a:t>
-            </a:r>
-            <a:endParaRPr lang="en-US" sz="1400" dirty="0"/>
-          </a:p>
-        </p:txBody>
-      </p:sp>
-      <p:sp>
-        <p:nvSpPr>
-          <p:cNvPr id="26" name="Text 24"/>
-          <p:cNvSpPr/>
-          <p:nvPr/>
-        </p:nvSpPr>
-        <p:spPr>
-          <a:xfrm>
-            <a:off x="6720840" y="3429000"/>
-            <a:ext cx="4526280" cy="914400"/>
-          </a:xfrm>
-          <a:prstGeom prst="rect">
-            <a:avLst/>
-          </a:prstGeom>
-          <a:noFill/>
-          <a:ln/>
-        </p:spPr>
-        <p:txBody>
-          <a:bodyPr wrap="square" lIns="0" tIns="0" rIns="0" bIns="0" rtlCol="0" anchor="ctr"/>
-          <a:lstStyle/>
-          <a:p>
-            <a:pPr indent="0" marL="0">
-              <a:lnSpc>
-                <a:spcPts val="2400"/>
-              </a:lnSpc>
-              <a:buNone/>
-            </a:pPr>
-            <a:r>
-              <a:rPr lang="en-US" sz="1700" i="1" dirty="0">
-                <a:solidFill>
-                  <a:srgbClr val="FFFFFF"/>
-                </a:solidFill>
-                <a:latin typeface="Cambria" pitchFamily="34" charset="0"/>
-                <a:ea typeface="Cambria" pitchFamily="34" charset="-122"/>
-                <a:cs typeface="Cambria" pitchFamily="34" charset="-120"/>
-              </a:rPr>
-              <a:t>「</a:t>
-            </a:r>
-            <a:pPr indent="0" marL="0">
-              <a:lnSpc>
-                <a:spcPts val="2400"/>
-              </a:lnSpc>
-              <a:buNone/>
-            </a:pPr>
-            <a:r>
-              <a:rPr lang="en-US" sz="1700" b="1" i="1" dirty="0">
-                <a:solidFill>
-                  <a:srgbClr val="E8A33D"/>
-                </a:solidFill>
-                <a:latin typeface="Cambria" pitchFamily="34" charset="0"/>
-                <a:ea typeface="Cambria" pitchFamily="34" charset="-122"/>
-                <a:cs typeface="Cambria" pitchFamily="34" charset="-120"/>
-              </a:rPr>
-              <a:t>信頼構築や人間関係のマネジメントは、AIが再現しにくい</a:t>
-            </a:r>
-            <a:pPr indent="0" marL="0">
-              <a:lnSpc>
-                <a:spcPts val="2400"/>
-              </a:lnSpc>
-              <a:buNone/>
-            </a:pPr>
-            <a:r>
-              <a:rPr lang="en-US" sz="1700" i="1" dirty="0">
-                <a:solidFill>
-                  <a:srgbClr val="FFFFFF"/>
-                </a:solidFill>
-                <a:latin typeface="Cambria" pitchFamily="34" charset="0"/>
-                <a:ea typeface="Cambria" pitchFamily="34" charset="-122"/>
-                <a:cs typeface="Cambria" pitchFamily="34" charset="-120"/>
-              </a:rPr>
-              <a:t>」</a:t>
-            </a:r>
-            <a:endParaRPr lang="en-US" sz="1700" dirty="0"/>
-          </a:p>
         </p:txBody>
       </p:sp>
       <p:sp>
@@ -10038,37 +11617,34 @@
         </p:nvSpPr>
         <p:spPr>
           <a:xfrm>
-            <a:off x="6720840" y="4709160"/>
-            <a:ext cx="4526280" cy="822960"/>
-          </a:xfrm>
-          <a:prstGeom prst="rect">
-            <a:avLst/>
-          </a:prstGeom>
-          <a:noFill/>
-          <a:ln/>
-        </p:spPr>
-        <p:txBody>
-          <a:bodyPr wrap="square" lIns="0" tIns="0" rIns="0" bIns="0" rtlCol="0" anchor="t"/>
-          <a:lstStyle/>
-          <a:p>
-            <a:pPr indent="0" marL="0">
-              <a:lnSpc>
-                <a:spcPts val="1600"/>
-              </a:lnSpc>
-              <a:buNone/>
-            </a:pPr>
-            <a:r>
-              <a:rPr lang="en-US" sz="1150" i="1" dirty="0">
-                <a:solidFill>
-                  <a:srgbClr val="9FB0CC"/>
-                </a:solidFill>
-                <a:latin typeface="Calibri" pitchFamily="34" charset="0"/>
-                <a:ea typeface="Calibri" pitchFamily="34" charset="-122"/>
-                <a:cs typeface="Calibri" pitchFamily="34" charset="-120"/>
-              </a:rPr>
-              <a:t>― Anthropic Economic Index / OpenAI「GPTs are GPTs」より（対人・身体を伴う仕事ほどAIの影響・利用が小さい）</a:t>
-            </a:r>
-            <a:endParaRPr lang="en-US" sz="1150" dirty="0"/>
+            <a:off x="10305288" y="4754880"/>
+            <a:ext cx="1005840" cy="457200"/>
+          </a:xfrm>
+          <a:prstGeom prst="rect">
+            <a:avLst/>
+          </a:prstGeom>
+          <a:noFill/>
+          <a:ln/>
+        </p:spPr>
+        <p:txBody>
+          <a:bodyPr wrap="square" lIns="0" tIns="0" rIns="0" bIns="0" rtlCol="0" anchor="ctr"/>
+          <a:lstStyle/>
+          <a:p>
+            <a:pPr algn="r" indent="0" marL="0">
+              <a:buNone/>
+            </a:pPr>
+            <a:r>
+              <a:rPr lang="en-US" sz="1100" b="1" dirty="0">
+                <a:solidFill>
+                  <a:srgbClr val="C9871F"/>
+                </a:solidFill>
+                <a:latin typeface="Calibri" pitchFamily="34" charset="0"/>
+                <a:ea typeface="Calibri" pitchFamily="34" charset="-122"/>
+                <a:cs typeface="Calibri" pitchFamily="34" charset="-120"/>
+              </a:rPr>
+              <a:t>★当社</a:t>
+            </a:r>
+            <a:endParaRPr lang="en-US" sz="1100" dirty="0"/>
           </a:p>
         </p:txBody>
       </p:sp>
@@ -10105,7 +11681,7 @@
                 <a:ea typeface="Calibri" pitchFamily="34" charset="-122"/>
                 <a:cs typeface="Calibri" pitchFamily="34" charset="-120"/>
               </a:rPr>
-              <a:t>出典：WEF Future of Jobs Report 2025 ／ Anthropic Economic Index (2025-) ／ OpenAI (2023)。</a:t>
+              <a:t>出典：Frey &amp; Osborne (2013) / 野村総合研究所×オックスフォード大学 (2015)。確率は米国O*NETベース・要現物確認。</a:t>
             </a:r>
             <a:endParaRPr lang="en-US" sz="850" dirty="0"/>
           </a:p>
@@ -10274,7 +11850,7 @@
                 <a:ea typeface="Calibri" pitchFamily="34" charset="-122"/>
                 <a:cs typeface="Calibri" pitchFamily="34" charset="-120"/>
               </a:rPr>
-              <a:t>THE MARKET ／ 事業の土台</a:t>
+              <a:t>THE SKILL ／ 伸びる力</a:t>
             </a:r>
             <a:endParaRPr lang="en-US" sz="1250" dirty="0"/>
           </a:p>
@@ -10313,7 +11889,7 @@
                 <a:ea typeface="Cambria" pitchFamily="34" charset="-122"/>
                 <a:cs typeface="Cambria" pitchFamily="34" charset="-120"/>
               </a:rPr>
-              <a:t>住宅は“人生最大の買い物”。だから最後は人に相談する</a:t>
+              <a:t>AI時代に“需要が伸びるスキル”の上位は、営業の力そのもの</a:t>
             </a:r>
             <a:endParaRPr lang="en-US" sz="2800" dirty="0"/>
           </a:p>
@@ -10321,22 +11897,552 @@
       </p:sp>
       <p:sp>
         <p:nvSpPr>
-          <p:cNvPr id="6" name="Shape 4"/>
-          <p:cNvSpPr/>
-          <p:nvPr/>
-        </p:nvSpPr>
-        <p:spPr>
-          <a:xfrm>
-            <a:off x="566928" y="1600200"/>
-            <a:ext cx="3566160" cy="2148840"/>
+          <p:cNvPr id="6" name="Text 4"/>
+          <p:cNvSpPr/>
+          <p:nvPr/>
+        </p:nvSpPr>
+        <p:spPr>
+          <a:xfrm>
+            <a:off x="566928" y="1536192"/>
+            <a:ext cx="5852160" cy="548640"/>
+          </a:xfrm>
+          <a:prstGeom prst="rect">
+            <a:avLst/>
+          </a:prstGeom>
+          <a:noFill/>
+          <a:ln/>
+        </p:spPr>
+        <p:txBody>
+          <a:bodyPr wrap="square" lIns="0" tIns="0" rIns="0" bIns="0" rtlCol="0" anchor="t"/>
+          <a:lstStyle/>
+          <a:p>
+            <a:pPr indent="0" marL="0">
+              <a:lnSpc>
+                <a:spcPts val="1900"/>
+              </a:lnSpc>
+              <a:buNone/>
+            </a:pPr>
+            <a:r>
+              <a:rPr lang="en-US" sz="1400" b="1" dirty="0">
+                <a:solidFill>
+                  <a:srgbClr val="1B2430"/>
+                </a:solidFill>
+                <a:latin typeface="Calibri" pitchFamily="34" charset="0"/>
+                <a:ea typeface="Calibri" pitchFamily="34" charset="-122"/>
+                <a:cs typeface="Calibri" pitchFamily="34" charset="-120"/>
+              </a:rPr>
+              <a:t>世界経済フォーラム『Future of Jobs 2025』が挙げる“いま最重要の中核スキル”</a:t>
+            </a:r>
+            <a:endParaRPr lang="en-US" sz="1400" dirty="0"/>
+          </a:p>
+        </p:txBody>
+      </p:sp>
+      <p:sp>
+        <p:nvSpPr>
+          <p:cNvPr id="7" name="Text 5"/>
+          <p:cNvSpPr/>
+          <p:nvPr/>
+        </p:nvSpPr>
+        <p:spPr>
+          <a:xfrm>
+            <a:off x="566928" y="2286000"/>
+            <a:ext cx="4572000" cy="292608"/>
+          </a:xfrm>
+          <a:prstGeom prst="rect">
+            <a:avLst/>
+          </a:prstGeom>
+          <a:noFill/>
+          <a:ln/>
+        </p:spPr>
+        <p:txBody>
+          <a:bodyPr wrap="square" lIns="0" tIns="0" rIns="0" bIns="0" rtlCol="0" anchor="ctr"/>
+          <a:lstStyle/>
+          <a:p>
+            <a:pPr indent="0" marL="0">
+              <a:buNone/>
+            </a:pPr>
+            <a:r>
+              <a:rPr lang="en-US" sz="1350" b="1" dirty="0">
+                <a:solidFill>
+                  <a:srgbClr val="1B2430"/>
+                </a:solidFill>
+                <a:latin typeface="Calibri" pitchFamily="34" charset="0"/>
+                <a:ea typeface="Calibri" pitchFamily="34" charset="-122"/>
+                <a:cs typeface="Calibri" pitchFamily="34" charset="-120"/>
+              </a:rPr>
+              <a:t>リーダーシップ・社会的影響力</a:t>
+            </a:r>
+            <a:endParaRPr lang="en-US" sz="1350" dirty="0"/>
+          </a:p>
+        </p:txBody>
+      </p:sp>
+      <p:sp>
+        <p:nvSpPr>
+          <p:cNvPr id="8" name="Text 6"/>
+          <p:cNvSpPr/>
+          <p:nvPr/>
+        </p:nvSpPr>
+        <p:spPr>
+          <a:xfrm>
+            <a:off x="5138928" y="2286000"/>
+            <a:ext cx="822960" cy="292608"/>
+          </a:xfrm>
+          <a:prstGeom prst="rect">
+            <a:avLst/>
+          </a:prstGeom>
+          <a:noFill/>
+          <a:ln/>
+        </p:spPr>
+        <p:txBody>
+          <a:bodyPr wrap="square" lIns="0" tIns="0" rIns="0" bIns="0" rtlCol="0" anchor="ctr"/>
+          <a:lstStyle/>
+          <a:p>
+            <a:pPr algn="r" indent="0" marL="0">
+              <a:buNone/>
+            </a:pPr>
+            <a:r>
+              <a:rPr lang="en-US" sz="1300" b="1" dirty="0">
+                <a:solidFill>
+                  <a:srgbClr val="C9871F"/>
+                </a:solidFill>
+                <a:latin typeface="Calibri" pitchFamily="34" charset="0"/>
+                <a:ea typeface="Calibri" pitchFamily="34" charset="-122"/>
+                <a:cs typeface="Calibri" pitchFamily="34" charset="-120"/>
+              </a:rPr>
+              <a:t>3位</a:t>
+            </a:r>
+            <a:endParaRPr lang="en-US" sz="1300" dirty="0"/>
+          </a:p>
+        </p:txBody>
+      </p:sp>
+      <p:sp>
+        <p:nvSpPr>
+          <p:cNvPr id="9" name="Shape 7"/>
+          <p:cNvSpPr/>
+          <p:nvPr/>
+        </p:nvSpPr>
+        <p:spPr>
+          <a:xfrm>
+            <a:off x="566928" y="2615184"/>
+            <a:ext cx="5394960" cy="201168"/>
           </a:xfrm>
           <a:prstGeom prst="roundRect">
             <a:avLst>
-              <a:gd name="adj" fmla="val 3830"/>
+              <a:gd name="adj" fmla="val 50000"/>
             </a:avLst>
           </a:prstGeom>
           <a:solidFill>
-            <a:srgbClr val="FFFFFF"/>
+            <a:srgbClr val="DCE3EC"/>
+          </a:solidFill>
+          <a:ln/>
+        </p:spPr>
+      </p:sp>
+      <p:sp>
+        <p:nvSpPr>
+          <p:cNvPr id="10" name="Shape 8"/>
+          <p:cNvSpPr/>
+          <p:nvPr/>
+        </p:nvSpPr>
+        <p:spPr>
+          <a:xfrm>
+            <a:off x="566928" y="2615184"/>
+            <a:ext cx="4639666" cy="201168"/>
+          </a:xfrm>
+          <a:prstGeom prst="roundRect">
+            <a:avLst>
+              <a:gd name="adj" fmla="val 50000"/>
+            </a:avLst>
+          </a:prstGeom>
+          <a:solidFill>
+            <a:srgbClr val="1C7293"/>
+          </a:solidFill>
+          <a:ln/>
+        </p:spPr>
+      </p:sp>
+      <p:sp>
+        <p:nvSpPr>
+          <p:cNvPr id="11" name="Text 9"/>
+          <p:cNvSpPr/>
+          <p:nvPr/>
+        </p:nvSpPr>
+        <p:spPr>
+          <a:xfrm>
+            <a:off x="566928" y="3127248"/>
+            <a:ext cx="4572000" cy="292608"/>
+          </a:xfrm>
+          <a:prstGeom prst="rect">
+            <a:avLst/>
+          </a:prstGeom>
+          <a:noFill/>
+          <a:ln/>
+        </p:spPr>
+        <p:txBody>
+          <a:bodyPr wrap="square" lIns="0" tIns="0" rIns="0" bIns="0" rtlCol="0" anchor="ctr"/>
+          <a:lstStyle/>
+          <a:p>
+            <a:pPr indent="0" marL="0">
+              <a:buNone/>
+            </a:pPr>
+            <a:r>
+              <a:rPr lang="en-US" sz="1350" b="1" dirty="0">
+                <a:solidFill>
+                  <a:srgbClr val="1B2430"/>
+                </a:solidFill>
+                <a:latin typeface="Calibri" pitchFamily="34" charset="0"/>
+                <a:ea typeface="Calibri" pitchFamily="34" charset="-122"/>
+                <a:cs typeface="Calibri" pitchFamily="34" charset="-120"/>
+              </a:rPr>
+              <a:t>共感と傾聴</a:t>
+            </a:r>
+            <a:endParaRPr lang="en-US" sz="1350" dirty="0"/>
+          </a:p>
+        </p:txBody>
+      </p:sp>
+      <p:sp>
+        <p:nvSpPr>
+          <p:cNvPr id="12" name="Text 10"/>
+          <p:cNvSpPr/>
+          <p:nvPr/>
+        </p:nvSpPr>
+        <p:spPr>
+          <a:xfrm>
+            <a:off x="5138928" y="3127248"/>
+            <a:ext cx="822960" cy="292608"/>
+          </a:xfrm>
+          <a:prstGeom prst="rect">
+            <a:avLst/>
+          </a:prstGeom>
+          <a:noFill/>
+          <a:ln/>
+        </p:spPr>
+        <p:txBody>
+          <a:bodyPr wrap="square" lIns="0" tIns="0" rIns="0" bIns="0" rtlCol="0" anchor="ctr"/>
+          <a:lstStyle/>
+          <a:p>
+            <a:pPr algn="r" indent="0" marL="0">
+              <a:buNone/>
+            </a:pPr>
+            <a:r>
+              <a:rPr lang="en-US" sz="1300" b="1" dirty="0">
+                <a:solidFill>
+                  <a:srgbClr val="C9871F"/>
+                </a:solidFill>
+                <a:latin typeface="Calibri" pitchFamily="34" charset="0"/>
+                <a:ea typeface="Calibri" pitchFamily="34" charset="-122"/>
+                <a:cs typeface="Calibri" pitchFamily="34" charset="-120"/>
+              </a:rPr>
+              <a:t>7位</a:t>
+            </a:r>
+            <a:endParaRPr lang="en-US" sz="1300" dirty="0"/>
+          </a:p>
+        </p:txBody>
+      </p:sp>
+      <p:sp>
+        <p:nvSpPr>
+          <p:cNvPr id="13" name="Shape 11"/>
+          <p:cNvSpPr/>
+          <p:nvPr/>
+        </p:nvSpPr>
+        <p:spPr>
+          <a:xfrm>
+            <a:off x="566928" y="3456432"/>
+            <a:ext cx="5394960" cy="201168"/>
+          </a:xfrm>
+          <a:prstGeom prst="roundRect">
+            <a:avLst>
+              <a:gd name="adj" fmla="val 50000"/>
+            </a:avLst>
+          </a:prstGeom>
+          <a:solidFill>
+            <a:srgbClr val="DCE3EC"/>
+          </a:solidFill>
+          <a:ln/>
+        </p:spPr>
+      </p:sp>
+      <p:sp>
+        <p:nvSpPr>
+          <p:cNvPr id="14" name="Shape 12"/>
+          <p:cNvSpPr/>
+          <p:nvPr/>
+        </p:nvSpPr>
+        <p:spPr>
+          <a:xfrm>
+            <a:off x="566928" y="3456432"/>
+            <a:ext cx="3884371" cy="201168"/>
+          </a:xfrm>
+          <a:prstGeom prst="roundRect">
+            <a:avLst>
+              <a:gd name="adj" fmla="val 50000"/>
+            </a:avLst>
+          </a:prstGeom>
+          <a:solidFill>
+            <a:srgbClr val="1C7293"/>
+          </a:solidFill>
+          <a:ln/>
+        </p:spPr>
+      </p:sp>
+      <p:sp>
+        <p:nvSpPr>
+          <p:cNvPr id="15" name="Text 13"/>
+          <p:cNvSpPr/>
+          <p:nvPr/>
+        </p:nvSpPr>
+        <p:spPr>
+          <a:xfrm>
+            <a:off x="566928" y="3968496"/>
+            <a:ext cx="4572000" cy="292608"/>
+          </a:xfrm>
+          <a:prstGeom prst="rect">
+            <a:avLst/>
+          </a:prstGeom>
+          <a:noFill/>
+          <a:ln/>
+        </p:spPr>
+        <p:txBody>
+          <a:bodyPr wrap="square" lIns="0" tIns="0" rIns="0" bIns="0" rtlCol="0" anchor="ctr"/>
+          <a:lstStyle/>
+          <a:p>
+            <a:pPr indent="0" marL="0">
+              <a:buNone/>
+            </a:pPr>
+            <a:r>
+              <a:rPr lang="en-US" sz="1350" b="1" dirty="0">
+                <a:solidFill>
+                  <a:srgbClr val="1B2430"/>
+                </a:solidFill>
+                <a:latin typeface="Calibri" pitchFamily="34" charset="0"/>
+                <a:ea typeface="Calibri" pitchFamily="34" charset="-122"/>
+                <a:cs typeface="Calibri" pitchFamily="34" charset="-120"/>
+              </a:rPr>
+              <a:t>サービス志向・顧客対応</a:t>
+            </a:r>
+            <a:endParaRPr lang="en-US" sz="1350" dirty="0"/>
+          </a:p>
+        </p:txBody>
+      </p:sp>
+      <p:sp>
+        <p:nvSpPr>
+          <p:cNvPr id="16" name="Text 14"/>
+          <p:cNvSpPr/>
+          <p:nvPr/>
+        </p:nvSpPr>
+        <p:spPr>
+          <a:xfrm>
+            <a:off x="5138928" y="3968496"/>
+            <a:ext cx="822960" cy="292608"/>
+          </a:xfrm>
+          <a:prstGeom prst="rect">
+            <a:avLst/>
+          </a:prstGeom>
+          <a:noFill/>
+          <a:ln/>
+        </p:spPr>
+        <p:txBody>
+          <a:bodyPr wrap="square" lIns="0" tIns="0" rIns="0" bIns="0" rtlCol="0" anchor="ctr"/>
+          <a:lstStyle/>
+          <a:p>
+            <a:pPr algn="r" indent="0" marL="0">
+              <a:buNone/>
+            </a:pPr>
+            <a:r>
+              <a:rPr lang="en-US" sz="1300" b="1" dirty="0">
+                <a:solidFill>
+                  <a:srgbClr val="C9871F"/>
+                </a:solidFill>
+                <a:latin typeface="Calibri" pitchFamily="34" charset="0"/>
+                <a:ea typeface="Calibri" pitchFamily="34" charset="-122"/>
+                <a:cs typeface="Calibri" pitchFamily="34" charset="-120"/>
+              </a:rPr>
+              <a:t>10位</a:t>
+            </a:r>
+            <a:endParaRPr lang="en-US" sz="1300" dirty="0"/>
+          </a:p>
+        </p:txBody>
+      </p:sp>
+      <p:sp>
+        <p:nvSpPr>
+          <p:cNvPr id="17" name="Shape 15"/>
+          <p:cNvSpPr/>
+          <p:nvPr/>
+        </p:nvSpPr>
+        <p:spPr>
+          <a:xfrm>
+            <a:off x="566928" y="4297680"/>
+            <a:ext cx="5394960" cy="201168"/>
+          </a:xfrm>
+          <a:prstGeom prst="roundRect">
+            <a:avLst>
+              <a:gd name="adj" fmla="val 50000"/>
+            </a:avLst>
+          </a:prstGeom>
+          <a:solidFill>
+            <a:srgbClr val="DCE3EC"/>
+          </a:solidFill>
+          <a:ln/>
+        </p:spPr>
+      </p:sp>
+      <p:sp>
+        <p:nvSpPr>
+          <p:cNvPr id="18" name="Shape 16"/>
+          <p:cNvSpPr/>
+          <p:nvPr/>
+        </p:nvSpPr>
+        <p:spPr>
+          <a:xfrm>
+            <a:off x="566928" y="4297680"/>
+            <a:ext cx="3398825" cy="201168"/>
+          </a:xfrm>
+          <a:prstGeom prst="roundRect">
+            <a:avLst>
+              <a:gd name="adj" fmla="val 50000"/>
+            </a:avLst>
+          </a:prstGeom>
+          <a:solidFill>
+            <a:srgbClr val="1C7293"/>
+          </a:solidFill>
+          <a:ln/>
+        </p:spPr>
+      </p:sp>
+      <p:sp>
+        <p:nvSpPr>
+          <p:cNvPr id="19" name="Text 17"/>
+          <p:cNvSpPr/>
+          <p:nvPr/>
+        </p:nvSpPr>
+        <p:spPr>
+          <a:xfrm>
+            <a:off x="566928" y="4809744"/>
+            <a:ext cx="4572000" cy="292608"/>
+          </a:xfrm>
+          <a:prstGeom prst="rect">
+            <a:avLst/>
+          </a:prstGeom>
+          <a:noFill/>
+          <a:ln/>
+        </p:spPr>
+        <p:txBody>
+          <a:bodyPr wrap="square" lIns="0" tIns="0" rIns="0" bIns="0" rtlCol="0" anchor="ctr"/>
+          <a:lstStyle/>
+          <a:p>
+            <a:pPr indent="0" marL="0">
+              <a:buNone/>
+            </a:pPr>
+            <a:r>
+              <a:rPr lang="en-US" sz="1350" b="1" dirty="0">
+                <a:solidFill>
+                  <a:srgbClr val="1B2430"/>
+                </a:solidFill>
+                <a:latin typeface="Calibri" pitchFamily="34" charset="0"/>
+                <a:ea typeface="Calibri" pitchFamily="34" charset="-122"/>
+                <a:cs typeface="Calibri" pitchFamily="34" charset="-120"/>
+              </a:rPr>
+              <a:t>レジリエンス・柔軟性</a:t>
+            </a:r>
+            <a:endParaRPr lang="en-US" sz="1350" dirty="0"/>
+          </a:p>
+        </p:txBody>
+      </p:sp>
+      <p:sp>
+        <p:nvSpPr>
+          <p:cNvPr id="20" name="Text 18"/>
+          <p:cNvSpPr/>
+          <p:nvPr/>
+        </p:nvSpPr>
+        <p:spPr>
+          <a:xfrm>
+            <a:off x="5138928" y="4809744"/>
+            <a:ext cx="822960" cy="292608"/>
+          </a:xfrm>
+          <a:prstGeom prst="rect">
+            <a:avLst/>
+          </a:prstGeom>
+          <a:noFill/>
+          <a:ln/>
+        </p:spPr>
+        <p:txBody>
+          <a:bodyPr wrap="square" lIns="0" tIns="0" rIns="0" bIns="0" rtlCol="0" anchor="ctr"/>
+          <a:lstStyle/>
+          <a:p>
+            <a:pPr algn="r" indent="0" marL="0">
+              <a:buNone/>
+            </a:pPr>
+            <a:r>
+              <a:rPr lang="en-US" sz="1300" b="1" dirty="0">
+                <a:solidFill>
+                  <a:srgbClr val="C9871F"/>
+                </a:solidFill>
+                <a:latin typeface="Calibri" pitchFamily="34" charset="0"/>
+                <a:ea typeface="Calibri" pitchFamily="34" charset="-122"/>
+                <a:cs typeface="Calibri" pitchFamily="34" charset="-120"/>
+              </a:rPr>
+              <a:t>2位</a:t>
+            </a:r>
+            <a:endParaRPr lang="en-US" sz="1300" dirty="0"/>
+          </a:p>
+        </p:txBody>
+      </p:sp>
+      <p:sp>
+        <p:nvSpPr>
+          <p:cNvPr id="21" name="Shape 19"/>
+          <p:cNvSpPr/>
+          <p:nvPr/>
+        </p:nvSpPr>
+        <p:spPr>
+          <a:xfrm>
+            <a:off x="566928" y="5138928"/>
+            <a:ext cx="5394960" cy="201168"/>
+          </a:xfrm>
+          <a:prstGeom prst="roundRect">
+            <a:avLst>
+              <a:gd name="adj" fmla="val 50000"/>
+            </a:avLst>
+          </a:prstGeom>
+          <a:solidFill>
+            <a:srgbClr val="DCE3EC"/>
+          </a:solidFill>
+          <a:ln/>
+        </p:spPr>
+      </p:sp>
+      <p:sp>
+        <p:nvSpPr>
+          <p:cNvPr id="22" name="Shape 20"/>
+          <p:cNvSpPr/>
+          <p:nvPr/>
+        </p:nvSpPr>
+        <p:spPr>
+          <a:xfrm>
+            <a:off x="566928" y="5138928"/>
+            <a:ext cx="4855464" cy="201168"/>
+          </a:xfrm>
+          <a:prstGeom prst="roundRect">
+            <a:avLst>
+              <a:gd name="adj" fmla="val 50000"/>
+            </a:avLst>
+          </a:prstGeom>
+          <a:solidFill>
+            <a:srgbClr val="1C7293"/>
+          </a:solidFill>
+          <a:ln/>
+        </p:spPr>
+      </p:sp>
+      <p:sp>
+        <p:nvSpPr>
+          <p:cNvPr id="23" name="Shape 21"/>
+          <p:cNvSpPr/>
+          <p:nvPr/>
+        </p:nvSpPr>
+        <p:spPr>
+          <a:xfrm>
+            <a:off x="6355080" y="1874520"/>
+            <a:ext cx="5257800" cy="3840480"/>
+          </a:xfrm>
+          <a:prstGeom prst="roundRect">
+            <a:avLst>
+              <a:gd name="adj" fmla="val 2143"/>
+            </a:avLst>
+          </a:prstGeom>
+          <a:solidFill>
+            <a:srgbClr val="1B2A4A"/>
           </a:solidFill>
           <a:ln/>
           <a:effectLst>
@@ -10350,509 +12456,53 @@
       </p:sp>
       <p:sp>
         <p:nvSpPr>
-          <p:cNvPr id="7" name="Text 5"/>
-          <p:cNvSpPr/>
-          <p:nvPr/>
-        </p:nvSpPr>
-        <p:spPr>
-          <a:xfrm>
-            <a:off x="841248" y="1828800"/>
-            <a:ext cx="3017520" cy="868680"/>
-          </a:xfrm>
-          <a:prstGeom prst="rect">
-            <a:avLst/>
-          </a:prstGeom>
-          <a:noFill/>
-          <a:ln/>
-        </p:spPr>
-        <p:txBody>
-          <a:bodyPr wrap="square" lIns="0" tIns="0" rIns="0" bIns="0" rtlCol="0" anchor="ctr"/>
-          <a:lstStyle/>
-          <a:p>
-            <a:pPr algn="l" indent="0" marL="0">
-              <a:buNone/>
-            </a:pPr>
-            <a:r>
-              <a:rPr lang="en-US" sz="4400" b="1" dirty="0">
-                <a:solidFill>
-                  <a:srgbClr val="1C7293"/>
-                </a:solidFill>
-                <a:latin typeface="Cambria" pitchFamily="34" charset="0"/>
-                <a:ea typeface="Cambria" pitchFamily="34" charset="-122"/>
-                <a:cs typeface="Cambria" pitchFamily="34" charset="-120"/>
-              </a:rPr>
-              <a:t>約2.2倍</a:t>
-            </a:r>
-            <a:endParaRPr lang="en-US" sz="4400" dirty="0"/>
-          </a:p>
-        </p:txBody>
-      </p:sp>
-      <p:sp>
-        <p:nvSpPr>
-          <p:cNvPr id="8" name="Text 6"/>
-          <p:cNvSpPr/>
-          <p:nvPr/>
-        </p:nvSpPr>
-        <p:spPr>
-          <a:xfrm>
-            <a:off x="841248" y="2697480"/>
-            <a:ext cx="3017520" cy="457200"/>
-          </a:xfrm>
-          <a:prstGeom prst="rect">
-            <a:avLst/>
-          </a:prstGeom>
-          <a:noFill/>
-          <a:ln/>
-        </p:spPr>
-        <p:txBody>
-          <a:bodyPr wrap="square" lIns="0" tIns="0" rIns="0" bIns="0" rtlCol="0" anchor="t"/>
+          <p:cNvPr id="24" name="Text 22"/>
+          <p:cNvSpPr/>
+          <p:nvPr/>
+        </p:nvSpPr>
+        <p:spPr>
+          <a:xfrm>
+            <a:off x="6720840" y="2103120"/>
+            <a:ext cx="4526280" cy="365760"/>
+          </a:xfrm>
+          <a:prstGeom prst="rect">
+            <a:avLst/>
+          </a:prstGeom>
+          <a:noFill/>
+          <a:ln/>
+        </p:spPr>
+        <p:txBody>
+          <a:bodyPr wrap="square" lIns="0" tIns="0" rIns="0" bIns="0" rtlCol="0" anchor="ctr"/>
           <a:lstStyle/>
           <a:p>
             <a:pPr indent="0" marL="0">
-              <a:lnSpc>
-                <a:spcPts val="1700"/>
-              </a:lnSpc>
-              <a:buNone/>
-            </a:pPr>
-            <a:r>
-              <a:rPr lang="en-US" sz="1400" b="1" dirty="0">
-                <a:solidFill>
-                  <a:srgbClr val="1B2430"/>
-                </a:solidFill>
-                <a:latin typeface="Calibri" pitchFamily="34" charset="0"/>
-                <a:ea typeface="Calibri" pitchFamily="34" charset="-122"/>
-                <a:cs typeface="Calibri" pitchFamily="34" charset="-120"/>
-              </a:rPr>
-              <a:t>販売職の有効求人倍率</a:t>
-            </a:r>
-            <a:endParaRPr lang="en-US" sz="1400" dirty="0"/>
-          </a:p>
-        </p:txBody>
-      </p:sp>
-      <p:sp>
-        <p:nvSpPr>
-          <p:cNvPr id="9" name="Text 7"/>
-          <p:cNvSpPr/>
-          <p:nvPr/>
-        </p:nvSpPr>
-        <p:spPr>
-          <a:xfrm>
-            <a:off x="841248" y="3172968"/>
-            <a:ext cx="3017520" cy="457200"/>
-          </a:xfrm>
-          <a:prstGeom prst="rect">
-            <a:avLst/>
-          </a:prstGeom>
-          <a:noFill/>
-          <a:ln/>
-        </p:spPr>
-        <p:txBody>
-          <a:bodyPr wrap="square" lIns="0" tIns="0" rIns="0" bIns="0" rtlCol="0" anchor="t"/>
-          <a:lstStyle/>
-          <a:p>
-            <a:pPr indent="0" marL="0">
-              <a:lnSpc>
-                <a:spcPts val="1500"/>
-              </a:lnSpc>
-              <a:buNone/>
-            </a:pPr>
-            <a:r>
-              <a:rPr lang="en-US" sz="1150" dirty="0">
-                <a:solidFill>
-                  <a:srgbClr val="3D4756"/>
-                </a:solidFill>
-                <a:latin typeface="Calibri" pitchFamily="34" charset="0"/>
-                <a:ea typeface="Calibri" pitchFamily="34" charset="-122"/>
-                <a:cs typeface="Calibri" pitchFamily="34" charset="-120"/>
-              </a:rPr>
-              <a:t>全職種平均1.2倍の約2倍＝人材の希少性</a:t>
-            </a:r>
-            <a:endParaRPr lang="en-US" sz="1150" dirty="0"/>
-          </a:p>
-        </p:txBody>
-      </p:sp>
-      <p:sp>
-        <p:nvSpPr>
-          <p:cNvPr id="10" name="Shape 8"/>
-          <p:cNvSpPr/>
-          <p:nvPr/>
-        </p:nvSpPr>
-        <p:spPr>
-          <a:xfrm>
-            <a:off x="4315968" y="1600200"/>
-            <a:ext cx="3566160" cy="2148840"/>
-          </a:xfrm>
-          <a:prstGeom prst="roundRect">
-            <a:avLst>
-              <a:gd name="adj" fmla="val 3830"/>
-            </a:avLst>
-          </a:prstGeom>
-          <a:solidFill>
-            <a:srgbClr val="FFFFFF"/>
-          </a:solidFill>
-          <a:ln/>
-          <a:effectLst>
-            <a:outerShdw sx="100000" sy="100000" kx="0" ky="0" algn="bl" rotWithShape="0" blurRad="114300" dist="38100" dir="5400000">
-              <a:srgbClr val="9AA6B8">
-                <a:alpha val="35000"/>
-              </a:srgbClr>
-            </a:outerShdw>
-          </a:effectLst>
-        </p:spPr>
-      </p:sp>
-      <p:sp>
-        <p:nvSpPr>
-          <p:cNvPr id="11" name="Text 9"/>
-          <p:cNvSpPr/>
-          <p:nvPr/>
-        </p:nvSpPr>
-        <p:spPr>
-          <a:xfrm>
-            <a:off x="4590288" y="1828800"/>
-            <a:ext cx="3017520" cy="868680"/>
-          </a:xfrm>
-          <a:prstGeom prst="rect">
-            <a:avLst/>
-          </a:prstGeom>
-          <a:noFill/>
-          <a:ln/>
-        </p:spPr>
-        <p:txBody>
-          <a:bodyPr wrap="square" lIns="0" tIns="0" rIns="0" bIns="0" rtlCol="0" anchor="ctr"/>
-          <a:lstStyle/>
-          <a:p>
-            <a:pPr algn="l" indent="0" marL="0">
-              <a:buNone/>
-            </a:pPr>
-            <a:r>
-              <a:rPr lang="en-US" sz="4400" b="1" dirty="0">
-                <a:solidFill>
-                  <a:srgbClr val="C9871F"/>
-                </a:solidFill>
-                <a:latin typeface="Cambria" pitchFamily="34" charset="0"/>
-                <a:ea typeface="Cambria" pitchFamily="34" charset="-122"/>
-                <a:cs typeface="Cambria" pitchFamily="34" charset="-120"/>
-              </a:rPr>
-              <a:t>12万人超</a:t>
-            </a:r>
-            <a:endParaRPr lang="en-US" sz="4400" dirty="0"/>
-          </a:p>
-        </p:txBody>
-      </p:sp>
-      <p:sp>
-        <p:nvSpPr>
-          <p:cNvPr id="12" name="Text 10"/>
-          <p:cNvSpPr/>
-          <p:nvPr/>
-        </p:nvSpPr>
-        <p:spPr>
-          <a:xfrm>
-            <a:off x="4590288" y="2697480"/>
-            <a:ext cx="3017520" cy="457200"/>
-          </a:xfrm>
-          <a:prstGeom prst="rect">
-            <a:avLst/>
-          </a:prstGeom>
-          <a:noFill/>
-          <a:ln/>
-        </p:spPr>
-        <p:txBody>
-          <a:bodyPr wrap="square" lIns="0" tIns="0" rIns="0" bIns="0" rtlCol="0" anchor="t"/>
-          <a:lstStyle/>
-          <a:p>
-            <a:pPr indent="0" marL="0">
-              <a:lnSpc>
-                <a:spcPts val="1700"/>
-              </a:lnSpc>
-              <a:buNone/>
-            </a:pPr>
-            <a:r>
-              <a:rPr lang="en-US" sz="1400" b="1" dirty="0">
-                <a:solidFill>
-                  <a:srgbClr val="1B2430"/>
-                </a:solidFill>
-                <a:latin typeface="Calibri" pitchFamily="34" charset="0"/>
-                <a:ea typeface="Calibri" pitchFamily="34" charset="-122"/>
-                <a:cs typeface="Calibri" pitchFamily="34" charset="-120"/>
-              </a:rPr>
-              <a:t>東京圏への転入超過（2025年）</a:t>
-            </a:r>
-            <a:endParaRPr lang="en-US" sz="1400" dirty="0"/>
-          </a:p>
-        </p:txBody>
-      </p:sp>
-      <p:sp>
-        <p:nvSpPr>
-          <p:cNvPr id="13" name="Text 11"/>
-          <p:cNvSpPr/>
-          <p:nvPr/>
-        </p:nvSpPr>
-        <p:spPr>
-          <a:xfrm>
-            <a:off x="4590288" y="3172968"/>
-            <a:ext cx="3017520" cy="457200"/>
-          </a:xfrm>
-          <a:prstGeom prst="rect">
-            <a:avLst/>
-          </a:prstGeom>
-          <a:noFill/>
-          <a:ln/>
-        </p:spPr>
-        <p:txBody>
-          <a:bodyPr wrap="square" lIns="0" tIns="0" rIns="0" bIns="0" rtlCol="0" anchor="t"/>
-          <a:lstStyle/>
-          <a:p>
-            <a:pPr indent="0" marL="0">
-              <a:lnSpc>
-                <a:spcPts val="1500"/>
-              </a:lnSpc>
-              <a:buNone/>
-            </a:pPr>
-            <a:r>
-              <a:rPr lang="en-US" sz="1150" dirty="0">
-                <a:solidFill>
-                  <a:srgbClr val="3D4756"/>
-                </a:solidFill>
-                <a:latin typeface="Calibri" pitchFamily="34" charset="0"/>
-                <a:ea typeface="Calibri" pitchFamily="34" charset="-122"/>
-                <a:cs typeface="Calibri" pitchFamily="34" charset="-120"/>
-              </a:rPr>
-              <a:t>当社商圏に人と世帯が集まり続ける</a:t>
-            </a:r>
-            <a:endParaRPr lang="en-US" sz="1150" dirty="0"/>
-          </a:p>
-        </p:txBody>
-      </p:sp>
-      <p:sp>
-        <p:nvSpPr>
-          <p:cNvPr id="14" name="Shape 12"/>
-          <p:cNvSpPr/>
-          <p:nvPr/>
-        </p:nvSpPr>
-        <p:spPr>
-          <a:xfrm>
-            <a:off x="8065008" y="1600200"/>
-            <a:ext cx="3566160" cy="2148840"/>
-          </a:xfrm>
-          <a:prstGeom prst="roundRect">
-            <a:avLst>
-              <a:gd name="adj" fmla="val 3830"/>
-            </a:avLst>
-          </a:prstGeom>
-          <a:solidFill>
-            <a:srgbClr val="FBEFD9"/>
-          </a:solidFill>
-          <a:ln/>
-          <a:effectLst>
-            <a:outerShdw sx="100000" sy="100000" kx="0" ky="0" algn="bl" rotWithShape="0" blurRad="114300" dist="38100" dir="5400000">
-              <a:srgbClr val="9AA6B8">
-                <a:alpha val="35000"/>
-              </a:srgbClr>
-            </a:outerShdw>
-          </a:effectLst>
-        </p:spPr>
-      </p:sp>
-      <p:sp>
-        <p:nvSpPr>
-          <p:cNvPr id="15" name="Text 13"/>
-          <p:cNvSpPr/>
-          <p:nvPr/>
-        </p:nvSpPr>
-        <p:spPr>
-          <a:xfrm>
-            <a:off x="8339328" y="1828800"/>
-            <a:ext cx="3017520" cy="868680"/>
-          </a:xfrm>
-          <a:prstGeom prst="rect">
-            <a:avLst/>
-          </a:prstGeom>
-          <a:noFill/>
-          <a:ln/>
-        </p:spPr>
-        <p:txBody>
-          <a:bodyPr wrap="square" lIns="0" tIns="0" rIns="0" bIns="0" rtlCol="0" anchor="ctr"/>
-          <a:lstStyle/>
-          <a:p>
-            <a:pPr algn="l" indent="0" marL="0">
-              <a:buNone/>
-            </a:pPr>
-            <a:r>
-              <a:rPr lang="en-US" sz="4400" b="1" dirty="0">
-                <a:solidFill>
-                  <a:srgbClr val="2E7D57"/>
-                </a:solidFill>
-                <a:latin typeface="Cambria" pitchFamily="34" charset="0"/>
-                <a:ea typeface="Cambria" pitchFamily="34" charset="-122"/>
-                <a:cs typeface="Cambria" pitchFamily="34" charset="-120"/>
-              </a:rPr>
-              <a:t>約55%</a:t>
-            </a:r>
-            <a:endParaRPr lang="en-US" sz="4400" dirty="0"/>
-          </a:p>
-        </p:txBody>
-      </p:sp>
-      <p:sp>
-        <p:nvSpPr>
-          <p:cNvPr id="16" name="Text 14"/>
-          <p:cNvSpPr/>
-          <p:nvPr/>
-        </p:nvSpPr>
-        <p:spPr>
-          <a:xfrm>
-            <a:off x="8339328" y="2697480"/>
-            <a:ext cx="3017520" cy="457200"/>
-          </a:xfrm>
-          <a:prstGeom prst="rect">
-            <a:avLst/>
-          </a:prstGeom>
-          <a:noFill/>
-          <a:ln/>
-        </p:spPr>
-        <p:txBody>
-          <a:bodyPr wrap="square" lIns="0" tIns="0" rIns="0" bIns="0" rtlCol="0" anchor="t"/>
-          <a:lstStyle/>
-          <a:p>
-            <a:pPr indent="0" marL="0">
-              <a:lnSpc>
-                <a:spcPts val="1700"/>
-              </a:lnSpc>
-              <a:buNone/>
-            </a:pPr>
-            <a:r>
-              <a:rPr lang="en-US" sz="1400" b="1" dirty="0">
-                <a:solidFill>
-                  <a:srgbClr val="1B2430"/>
-                </a:solidFill>
-                <a:latin typeface="Calibri" pitchFamily="34" charset="0"/>
-                <a:ea typeface="Calibri" pitchFamily="34" charset="-122"/>
-                <a:cs typeface="Calibri" pitchFamily="34" charset="-120"/>
-              </a:rPr>
-              <a:t>注文住宅の事業者選択理由 第1位</a:t>
-            </a:r>
-            <a:endParaRPr lang="en-US" sz="1400" dirty="0"/>
-          </a:p>
-        </p:txBody>
-      </p:sp>
-      <p:sp>
-        <p:nvSpPr>
-          <p:cNvPr id="17" name="Text 15"/>
-          <p:cNvSpPr/>
-          <p:nvPr/>
-        </p:nvSpPr>
-        <p:spPr>
-          <a:xfrm>
-            <a:off x="8339328" y="3172968"/>
-            <a:ext cx="3017520" cy="457200"/>
-          </a:xfrm>
-          <a:prstGeom prst="rect">
-            <a:avLst/>
-          </a:prstGeom>
-          <a:noFill/>
-          <a:ln/>
-        </p:spPr>
-        <p:txBody>
-          <a:bodyPr wrap="square" lIns="0" tIns="0" rIns="0" bIns="0" rtlCol="0" anchor="t"/>
-          <a:lstStyle/>
-          <a:p>
-            <a:pPr indent="0" marL="0">
-              <a:lnSpc>
-                <a:spcPts val="1500"/>
-              </a:lnSpc>
-              <a:buNone/>
-            </a:pPr>
-            <a:r>
-              <a:rPr lang="en-US" sz="1150" dirty="0">
-                <a:solidFill>
-                  <a:srgbClr val="3D4756"/>
-                </a:solidFill>
-                <a:latin typeface="Calibri" pitchFamily="34" charset="0"/>
-                <a:ea typeface="Calibri" pitchFamily="34" charset="-122"/>
-                <a:cs typeface="Calibri" pitchFamily="34" charset="-120"/>
-              </a:rPr>
-              <a:t>「信頼できる住宅メーカー／不動産業者」</a:t>
-            </a:r>
-            <a:endParaRPr lang="en-US" sz="1150" dirty="0"/>
-          </a:p>
-        </p:txBody>
-      </p:sp>
-      <p:sp>
-        <p:nvSpPr>
-          <p:cNvPr id="18" name="Shape 16"/>
-          <p:cNvSpPr/>
-          <p:nvPr/>
-        </p:nvSpPr>
-        <p:spPr>
-          <a:xfrm>
-            <a:off x="566928" y="4023360"/>
-            <a:ext cx="11064240" cy="1600200"/>
-          </a:xfrm>
-          <a:prstGeom prst="roundRect">
-            <a:avLst>
-              <a:gd name="adj" fmla="val 5143"/>
-            </a:avLst>
-          </a:prstGeom>
-          <a:solidFill>
-            <a:srgbClr val="1B2A4A"/>
-          </a:solidFill>
-          <a:ln/>
-          <a:effectLst>
-            <a:outerShdw sx="100000" sy="100000" kx="0" ky="0" algn="bl" rotWithShape="0" blurRad="114300" dist="38100" dir="5400000">
-              <a:srgbClr val="9AA6B8">
-                <a:alpha val="35000"/>
-              </a:srgbClr>
-            </a:outerShdw>
-          </a:effectLst>
-        </p:spPr>
-      </p:sp>
-      <p:sp>
-        <p:nvSpPr>
-          <p:cNvPr id="19" name="Text 17"/>
-          <p:cNvSpPr/>
-          <p:nvPr/>
-        </p:nvSpPr>
-        <p:spPr>
-          <a:xfrm>
-            <a:off x="978408" y="4206240"/>
-            <a:ext cx="10241280" cy="457200"/>
-          </a:xfrm>
-          <a:prstGeom prst="rect">
-            <a:avLst/>
-          </a:prstGeom>
-          <a:noFill/>
-          <a:ln/>
-        </p:spPr>
-        <p:txBody>
-          <a:bodyPr wrap="square" lIns="0" tIns="0" rIns="0" bIns="0" rtlCol="0" anchor="ctr"/>
-          <a:lstStyle/>
-          <a:p>
-            <a:pPr indent="0" marL="0">
-              <a:buNone/>
-            </a:pPr>
-            <a:r>
-              <a:rPr lang="en-US" sz="2000" b="1" dirty="0">
-                <a:solidFill>
-                  <a:srgbClr val="FFFFFF"/>
-                </a:solidFill>
-                <a:latin typeface="Cambria" pitchFamily="34" charset="0"/>
-                <a:ea typeface="Cambria" pitchFamily="34" charset="-122"/>
-                <a:cs typeface="Cambria" pitchFamily="34" charset="-120"/>
-              </a:rPr>
-              <a:t>情報収集は「ネット」。でも最終判断は「人（担当者）」。</a:t>
-            </a:r>
-            <a:endParaRPr lang="en-US" sz="2000" dirty="0"/>
-          </a:p>
-        </p:txBody>
-      </p:sp>
-      <p:sp>
-        <p:nvSpPr>
-          <p:cNvPr id="20" name="Text 18"/>
-          <p:cNvSpPr/>
-          <p:nvPr/>
-        </p:nvSpPr>
-        <p:spPr>
-          <a:xfrm>
-            <a:off x="978408" y="4709160"/>
-            <a:ext cx="10241280" cy="822960"/>
+              <a:buNone/>
+            </a:pPr>
+            <a:r>
+              <a:rPr lang="en-US" sz="1500" b="1" dirty="0">
+                <a:solidFill>
+                  <a:srgbClr val="E8A33D"/>
+                </a:solidFill>
+                <a:latin typeface="Calibri" pitchFamily="34" charset="0"/>
+                <a:ea typeface="Calibri" pitchFamily="34" charset="-122"/>
+                <a:cs typeface="Calibri" pitchFamily="34" charset="-120"/>
+              </a:rPr>
+              <a:t>いまのAIが“届いていない”領域</a:t>
+            </a:r>
+            <a:endParaRPr lang="en-US" sz="1500" dirty="0"/>
+          </a:p>
+        </p:txBody>
+      </p:sp>
+      <p:sp>
+        <p:nvSpPr>
+          <p:cNvPr id="25" name="Text 23"/>
+          <p:cNvSpPr/>
+          <p:nvPr/>
+        </p:nvSpPr>
+        <p:spPr>
+          <a:xfrm>
+            <a:off x="6720840" y="2514600"/>
+            <a:ext cx="4526280" cy="822960"/>
           </a:xfrm>
           <a:prstGeom prst="rect">
             <a:avLst/>
@@ -10871,6 +12521,26 @@
               <a:buNone/>
             </a:pPr>
             <a:r>
+              <a:rPr lang="en-US" sz="1400" b="1" dirty="0">
+                <a:solidFill>
+                  <a:srgbClr val="FFFFFF"/>
+                </a:solidFill>
+                <a:latin typeface="Calibri" pitchFamily="34" charset="0"/>
+                <a:ea typeface="Calibri" pitchFamily="34" charset="-122"/>
+                <a:cs typeface="Calibri" pitchFamily="34" charset="-120"/>
+              </a:rPr>
+              <a:t>AI利用は「コンピュータ・数学」タスクに集中。</a:t>
+            </a:r>
+            <a:endParaRPr lang="en-US" sz="1400" dirty="0"/>
+          </a:p>
+          <a:p>
+            <a:pPr indent="0" marL="0">
+              <a:lnSpc>
+                <a:spcPts val="2000"/>
+              </a:lnSpc>
+              <a:buNone/>
+            </a:pPr>
+            <a:r>
               <a:rPr lang="en-US" sz="1400" dirty="0">
                 <a:solidFill>
                   <a:srgbClr val="CADCFC"/>
@@ -10879,7 +12549,7 @@
                 <a:ea typeface="Calibri" pitchFamily="34" charset="-122"/>
                 <a:cs typeface="Calibri" pitchFamily="34" charset="-120"/>
               </a:rPr>
-              <a:t>数千万円・一生に一度・一件ごとに条件が違う買い物では、AIやネットで調べ尽くした人ほど、最後は「この人から買いたい」で決める。この“決めさせる力”こそ住宅営業の中核価値。</a:t>
+              <a:t>身体・対面・関係性を要する仕事の利用は極端に低い。</a:t>
             </a:r>
             <a:endParaRPr lang="en-US" sz="1400" dirty="0"/>
           </a:p>
@@ -10887,7 +12557,125 @@
       </p:sp>
       <p:sp>
         <p:nvSpPr>
-          <p:cNvPr id="21" name="Text 19"/>
+          <p:cNvPr id="26" name="Text 24"/>
+          <p:cNvSpPr/>
+          <p:nvPr/>
+        </p:nvSpPr>
+        <p:spPr>
+          <a:xfrm>
+            <a:off x="6720840" y="3429000"/>
+            <a:ext cx="4526280" cy="914400"/>
+          </a:xfrm>
+          <a:prstGeom prst="rect">
+            <a:avLst/>
+          </a:prstGeom>
+          <a:noFill/>
+          <a:ln/>
+        </p:spPr>
+        <p:txBody>
+          <a:bodyPr wrap="square" lIns="0" tIns="0" rIns="0" bIns="0" rtlCol="0" anchor="ctr"/>
+          <a:lstStyle/>
+          <a:p>
+            <a:pPr indent="0" marL="0">
+              <a:lnSpc>
+                <a:spcPts val="2400"/>
+              </a:lnSpc>
+              <a:buNone/>
+            </a:pPr>
+            <a:r>
+              <a:rPr lang="en-US" sz="1700" i="1" dirty="0">
+                <a:solidFill>
+                  <a:srgbClr val="FFFFFF"/>
+                </a:solidFill>
+                <a:latin typeface="Cambria" pitchFamily="34" charset="0"/>
+                <a:ea typeface="Cambria" pitchFamily="34" charset="-122"/>
+                <a:cs typeface="Cambria" pitchFamily="34" charset="-120"/>
+              </a:rPr>
+              <a:t>「</a:t>
+            </a:r>
+            <a:pPr indent="0" marL="0">
+              <a:lnSpc>
+                <a:spcPts val="2400"/>
+              </a:lnSpc>
+              <a:buNone/>
+            </a:pPr>
+            <a:r>
+              <a:rPr lang="en-US" sz="1700" b="1" i="1" dirty="0">
+                <a:solidFill>
+                  <a:srgbClr val="E8A33D"/>
+                </a:solidFill>
+                <a:latin typeface="Cambria" pitchFamily="34" charset="0"/>
+                <a:ea typeface="Cambria" pitchFamily="34" charset="-122"/>
+                <a:cs typeface="Cambria" pitchFamily="34" charset="-120"/>
+              </a:rPr>
+              <a:t>信頼構築や人間関係のマネジメントは、AIが再現しにくい</a:t>
+            </a:r>
+            <a:pPr indent="0" marL="0">
+              <a:lnSpc>
+                <a:spcPts val="2400"/>
+              </a:lnSpc>
+              <a:buNone/>
+            </a:pPr>
+            <a:r>
+              <a:rPr lang="en-US" sz="1700" i="1" dirty="0">
+                <a:solidFill>
+                  <a:srgbClr val="FFFFFF"/>
+                </a:solidFill>
+                <a:latin typeface="Cambria" pitchFamily="34" charset="0"/>
+                <a:ea typeface="Cambria" pitchFamily="34" charset="-122"/>
+                <a:cs typeface="Cambria" pitchFamily="34" charset="-120"/>
+              </a:rPr>
+              <a:t>」</a:t>
+            </a:r>
+            <a:endParaRPr lang="en-US" sz="1700" dirty="0"/>
+          </a:p>
+        </p:txBody>
+      </p:sp>
+      <p:sp>
+        <p:nvSpPr>
+          <p:cNvPr id="27" name="Text 25"/>
+          <p:cNvSpPr/>
+          <p:nvPr/>
+        </p:nvSpPr>
+        <p:spPr>
+          <a:xfrm>
+            <a:off x="6720840" y="4709160"/>
+            <a:ext cx="4526280" cy="822960"/>
+          </a:xfrm>
+          <a:prstGeom prst="rect">
+            <a:avLst/>
+          </a:prstGeom>
+          <a:noFill/>
+          <a:ln/>
+        </p:spPr>
+        <p:txBody>
+          <a:bodyPr wrap="square" lIns="0" tIns="0" rIns="0" bIns="0" rtlCol="0" anchor="t"/>
+          <a:lstStyle/>
+          <a:p>
+            <a:pPr indent="0" marL="0">
+              <a:lnSpc>
+                <a:spcPts val="1600"/>
+              </a:lnSpc>
+              <a:buNone/>
+            </a:pPr>
+            <a:r>
+              <a:rPr lang="en-US" sz="1150" i="1" dirty="0">
+                <a:solidFill>
+                  <a:srgbClr val="9FB0CC"/>
+                </a:solidFill>
+                <a:latin typeface="Calibri" pitchFamily="34" charset="0"/>
+                <a:ea typeface="Calibri" pitchFamily="34" charset="-122"/>
+                <a:cs typeface="Calibri" pitchFamily="34" charset="-120"/>
+              </a:rPr>
+              <a:t>― Anthropic Economic Index / OpenAI「GPTs are GPTs」より（対人・身体を伴う仕事ほどAIの影響・利用が小さい）</a:t>
+            </a:r>
+            <a:endParaRPr lang="en-US" sz="1150" dirty="0"/>
+          </a:p>
+        </p:txBody>
+      </p:sp>
+      <p:sp>
+        <p:nvSpPr>
+          <p:cNvPr id="28" name="Text 26"/>
           <p:cNvSpPr/>
           <p:nvPr/>
         </p:nvSpPr>
@@ -10918,7 +12706,7 @@
                 <a:ea typeface="Calibri" pitchFamily="34" charset="-122"/>
                 <a:cs typeface="Calibri" pitchFamily="34" charset="-120"/>
               </a:rPr>
-              <a:t>出典：厚労省 一般職業紹介状況 ／ 総務省 住民基本台帳人口移動報告2025 ／ 国交省 住宅市場動向調査 令和6年度。</a:t>
+              <a:t>出典：WEF Future of Jobs Report 2025 ／ Anthropic Economic Index (2025-) ／ OpenAI (2023)。</a:t>
             </a:r>
             <a:endParaRPr lang="en-US" sz="850" dirty="0"/>
           </a:p>
@@ -10926,7 +12714,7 @@
       </p:sp>
       <p:sp>
         <p:nvSpPr>
-          <p:cNvPr id="22" name="Text 20"/>
+          <p:cNvPr id="29" name="Text 27"/>
           <p:cNvSpPr/>
           <p:nvPr/>
         </p:nvSpPr>
@@ -11087,7 +12875,7 @@
                 <a:ea typeface="Calibri" pitchFamily="34" charset="-122"/>
                 <a:cs typeface="Calibri" pitchFamily="34" charset="-120"/>
               </a:rPr>
-              <a:t>OUR WAY ／ AIは敵ではなく武器</a:t>
+              <a:t>THE MARKET ／ 事業の土台</a:t>
             </a:r>
             <a:endParaRPr lang="en-US" sz="1250" dirty="0"/>
           </a:p>
@@ -11126,7 +12914,7 @@
                 <a:ea typeface="Cambria" pitchFamily="34" charset="-122"/>
                 <a:cs typeface="Cambria" pitchFamily="34" charset="-120"/>
               </a:rPr>
-              <a:t>AIが“雑務”を巻き取り、人は「商談」に集中する</a:t>
+              <a:t>住宅は“人生最大の買い物”。だから最後は人に相談する</a:t>
             </a:r>
             <a:endParaRPr lang="en-US" sz="2800" dirty="0"/>
           </a:p>
@@ -11134,177 +12922,18 @@
       </p:sp>
       <p:sp>
         <p:nvSpPr>
-          <p:cNvPr id="6" name="Text 4"/>
-          <p:cNvSpPr/>
-          <p:nvPr/>
-        </p:nvSpPr>
-        <p:spPr>
-          <a:xfrm>
-            <a:off x="566928" y="1554480"/>
-            <a:ext cx="10972800" cy="365760"/>
-          </a:xfrm>
-          <a:prstGeom prst="rect">
-            <a:avLst/>
-          </a:prstGeom>
-          <a:noFill/>
-          <a:ln/>
-        </p:spPr>
-        <p:txBody>
-          <a:bodyPr wrap="square" lIns="0" tIns="0" rIns="0" bIns="0" rtlCol="0" anchor="ctr"/>
-          <a:lstStyle/>
-          <a:p>
-            <a:pPr indent="0" marL="0">
-              <a:buNone/>
-            </a:pPr>
-            <a:r>
-              <a:rPr lang="en-US" sz="1500" b="1" dirty="0">
-                <a:solidFill>
-                  <a:srgbClr val="1B2430"/>
-                </a:solidFill>
-                <a:latin typeface="Calibri" pitchFamily="34" charset="0"/>
-                <a:ea typeface="Calibri" pitchFamily="34" charset="-122"/>
-                <a:cs typeface="Calibri" pitchFamily="34" charset="-120"/>
-              </a:rPr>
-              <a:t>営業担当者が実際に「売る」ことに使えている時間</a:t>
-            </a:r>
-            <a:endParaRPr lang="en-US" sz="1500" dirty="0"/>
-          </a:p>
-        </p:txBody>
-      </p:sp>
-      <p:sp>
-        <p:nvSpPr>
-          <p:cNvPr id="7" name="Shape 5"/>
-          <p:cNvSpPr/>
-          <p:nvPr/>
-        </p:nvSpPr>
-        <p:spPr>
-          <a:xfrm>
-            <a:off x="566928" y="2057400"/>
-            <a:ext cx="11064240" cy="868680"/>
+          <p:cNvPr id="6" name="Shape 4"/>
+          <p:cNvSpPr/>
+          <p:nvPr/>
+        </p:nvSpPr>
+        <p:spPr>
+          <a:xfrm>
+            <a:off x="566928" y="1600200"/>
+            <a:ext cx="3566160" cy="2148840"/>
           </a:xfrm>
           <a:prstGeom prst="roundRect">
             <a:avLst>
-              <a:gd name="adj" fmla="val 6316"/>
-            </a:avLst>
-          </a:prstGeom>
-          <a:solidFill>
-            <a:srgbClr val="DCE3EC"/>
-          </a:solidFill>
-          <a:ln/>
-        </p:spPr>
-      </p:sp>
-      <p:sp>
-        <p:nvSpPr>
-          <p:cNvPr id="8" name="Shape 6"/>
-          <p:cNvSpPr/>
-          <p:nvPr/>
-        </p:nvSpPr>
-        <p:spPr>
-          <a:xfrm>
-            <a:off x="566928" y="2057400"/>
-            <a:ext cx="4425696" cy="868680"/>
-          </a:xfrm>
-          <a:prstGeom prst="rect">
-            <a:avLst/>
-          </a:prstGeom>
-          <a:solidFill>
-            <a:srgbClr val="1C7293"/>
-          </a:solidFill>
-          <a:ln/>
-        </p:spPr>
-      </p:sp>
-      <p:sp>
-        <p:nvSpPr>
-          <p:cNvPr id="9" name="Text 7"/>
-          <p:cNvSpPr/>
-          <p:nvPr/>
-        </p:nvSpPr>
-        <p:spPr>
-          <a:xfrm>
-            <a:off x="749808" y="2057400"/>
-            <a:ext cx="4151376" cy="868680"/>
-          </a:xfrm>
-          <a:prstGeom prst="rect">
-            <a:avLst/>
-          </a:prstGeom>
-          <a:noFill/>
-          <a:ln/>
-        </p:spPr>
-        <p:txBody>
-          <a:bodyPr wrap="square" lIns="0" tIns="0" rIns="0" bIns="0" rtlCol="0" anchor="ctr"/>
-          <a:lstStyle/>
-          <a:p>
-            <a:pPr indent="0" marL="0">
-              <a:buNone/>
-            </a:pPr>
-            <a:r>
-              <a:rPr lang="en-US" sz="1500" b="1" dirty="0">
-                <a:solidFill>
-                  <a:srgbClr val="FFFFFF"/>
-                </a:solidFill>
-                <a:latin typeface="Calibri" pitchFamily="34" charset="0"/>
-                <a:ea typeface="Calibri" pitchFamily="34" charset="-122"/>
-                <a:cs typeface="Calibri" pitchFamily="34" charset="-120"/>
-              </a:rPr>
-              <a:t>売る時間 40%</a:t>
-            </a:r>
-            <a:endParaRPr lang="en-US" sz="1500" dirty="0"/>
-          </a:p>
-        </p:txBody>
-      </p:sp>
-      <p:sp>
-        <p:nvSpPr>
-          <p:cNvPr id="10" name="Text 8"/>
-          <p:cNvSpPr/>
-          <p:nvPr/>
-        </p:nvSpPr>
-        <p:spPr>
-          <a:xfrm>
-            <a:off x="5221224" y="2057400"/>
-            <a:ext cx="6272784" cy="868680"/>
-          </a:xfrm>
-          <a:prstGeom prst="rect">
-            <a:avLst/>
-          </a:prstGeom>
-          <a:noFill/>
-          <a:ln/>
-        </p:spPr>
-        <p:txBody>
-          <a:bodyPr wrap="square" lIns="0" tIns="0" rIns="0" bIns="0" rtlCol="0" anchor="ctr"/>
-          <a:lstStyle/>
-          <a:p>
-            <a:pPr indent="0" marL="0">
-              <a:buNone/>
-            </a:pPr>
-            <a:r>
-              <a:rPr lang="en-US" sz="1400" b="1" dirty="0">
-                <a:solidFill>
-                  <a:srgbClr val="3D4756"/>
-                </a:solidFill>
-                <a:latin typeface="Calibri" pitchFamily="34" charset="0"/>
-                <a:ea typeface="Calibri" pitchFamily="34" charset="-122"/>
-                <a:cs typeface="Calibri" pitchFamily="34" charset="-120"/>
-              </a:rPr>
-              <a:t>残り 60% ＝ 事務・データ入力・社内会議など“非営業業務”</a:t>
-            </a:r>
-            <a:endParaRPr lang="en-US" sz="1400" dirty="0"/>
-          </a:p>
-        </p:txBody>
-      </p:sp>
-      <p:sp>
-        <p:nvSpPr>
-          <p:cNvPr id="11" name="Shape 9"/>
-          <p:cNvSpPr/>
-          <p:nvPr/>
-        </p:nvSpPr>
-        <p:spPr>
-          <a:xfrm>
-            <a:off x="566928" y="3429000"/>
-            <a:ext cx="3566160" cy="1371600"/>
-          </a:xfrm>
-          <a:prstGeom prst="roundRect">
-            <a:avLst>
-              <a:gd name="adj" fmla="val 6000"/>
+              <a:gd name="adj" fmla="val 3830"/>
             </a:avLst>
           </a:prstGeom>
           <a:solidFill>
@@ -11322,30 +12951,30 @@
       </p:sp>
       <p:sp>
         <p:nvSpPr>
-          <p:cNvPr id="12" name="Text 10"/>
-          <p:cNvSpPr/>
-          <p:nvPr/>
-        </p:nvSpPr>
-        <p:spPr>
-          <a:xfrm>
-            <a:off x="841248" y="3611880"/>
-            <a:ext cx="3017520" cy="502920"/>
-          </a:xfrm>
-          <a:prstGeom prst="rect">
-            <a:avLst/>
-          </a:prstGeom>
-          <a:noFill/>
-          <a:ln/>
-        </p:spPr>
-        <p:txBody>
-          <a:bodyPr wrap="square" lIns="0" tIns="0" rIns="0" bIns="0" rtlCol="0" anchor="ctr"/>
-          <a:lstStyle/>
-          <a:p>
-            <a:pPr indent="0" marL="0">
-              <a:buNone/>
-            </a:pPr>
-            <a:r>
-              <a:rPr lang="en-US" sz="3000" b="1" dirty="0">
+          <p:cNvPr id="7" name="Text 5"/>
+          <p:cNvSpPr/>
+          <p:nvPr/>
+        </p:nvSpPr>
+        <p:spPr>
+          <a:xfrm>
+            <a:off x="841248" y="1828800"/>
+            <a:ext cx="3017520" cy="868680"/>
+          </a:xfrm>
+          <a:prstGeom prst="rect">
+            <a:avLst/>
+          </a:prstGeom>
+          <a:noFill/>
+          <a:ln/>
+        </p:spPr>
+        <p:txBody>
+          <a:bodyPr wrap="square" lIns="0" tIns="0" rIns="0" bIns="0" rtlCol="0" anchor="ctr"/>
+          <a:lstStyle/>
+          <a:p>
+            <a:pPr algn="l" indent="0" marL="0">
+              <a:buNone/>
+            </a:pPr>
+            <a:r>
+              <a:rPr lang="en-US" sz="4400" b="1" dirty="0">
                 <a:solidFill>
                   <a:srgbClr val="1C7293"/>
                 </a:solidFill>
@@ -11353,22 +12982,64 @@
                 <a:ea typeface="Cambria" pitchFamily="34" charset="-122"/>
                 <a:cs typeface="Cambria" pitchFamily="34" charset="-120"/>
               </a:rPr>
-              <a:t>-34% / -36%</a:t>
-            </a:r>
-            <a:endParaRPr lang="en-US" sz="3000" dirty="0"/>
-          </a:p>
-        </p:txBody>
-      </p:sp>
-      <p:sp>
-        <p:nvSpPr>
-          <p:cNvPr id="13" name="Text 11"/>
-          <p:cNvSpPr/>
-          <p:nvPr/>
-        </p:nvSpPr>
-        <p:spPr>
-          <a:xfrm>
-            <a:off x="841248" y="4142232"/>
-            <a:ext cx="3017520" cy="594360"/>
+              <a:t>約2.2倍</a:t>
+            </a:r>
+            <a:endParaRPr lang="en-US" sz="4400" dirty="0"/>
+          </a:p>
+        </p:txBody>
+      </p:sp>
+      <p:sp>
+        <p:nvSpPr>
+          <p:cNvPr id="8" name="Text 6"/>
+          <p:cNvSpPr/>
+          <p:nvPr/>
+        </p:nvSpPr>
+        <p:spPr>
+          <a:xfrm>
+            <a:off x="841248" y="2697480"/>
+            <a:ext cx="3017520" cy="457200"/>
+          </a:xfrm>
+          <a:prstGeom prst="rect">
+            <a:avLst/>
+          </a:prstGeom>
+          <a:noFill/>
+          <a:ln/>
+        </p:spPr>
+        <p:txBody>
+          <a:bodyPr wrap="square" lIns="0" tIns="0" rIns="0" bIns="0" rtlCol="0" anchor="t"/>
+          <a:lstStyle/>
+          <a:p>
+            <a:pPr indent="0" marL="0">
+              <a:lnSpc>
+                <a:spcPts val="1700"/>
+              </a:lnSpc>
+              <a:buNone/>
+            </a:pPr>
+            <a:r>
+              <a:rPr lang="en-US" sz="1400" b="1" dirty="0">
+                <a:solidFill>
+                  <a:srgbClr val="1B2430"/>
+                </a:solidFill>
+                <a:latin typeface="Calibri" pitchFamily="34" charset="0"/>
+                <a:ea typeface="Calibri" pitchFamily="34" charset="-122"/>
+                <a:cs typeface="Calibri" pitchFamily="34" charset="-120"/>
+              </a:rPr>
+              <a:t>販売職の有効求人倍率</a:t>
+            </a:r>
+            <a:endParaRPr lang="en-US" sz="1400" dirty="0"/>
+          </a:p>
+        </p:txBody>
+      </p:sp>
+      <p:sp>
+        <p:nvSpPr>
+          <p:cNvPr id="9" name="Text 7"/>
+          <p:cNvSpPr/>
+          <p:nvPr/>
+        </p:nvSpPr>
+        <p:spPr>
+          <a:xfrm>
+            <a:off x="841248" y="3172968"/>
+            <a:ext cx="3017520" cy="457200"/>
           </a:xfrm>
           <a:prstGeom prst="rect">
             <a:avLst/>
@@ -11395,7 +13066,7 @@
                 <a:ea typeface="Calibri" pitchFamily="34" charset="-122"/>
                 <a:cs typeface="Calibri" pitchFamily="34" charset="-120"/>
               </a:rPr>
-              <a:t>AIで見込み客リサーチ・メール作成の時間を削減できると営業が期待</a:t>
+              <a:t>全職種平均1.2倍の約2倍＝人材の希少性</a:t>
             </a:r>
             <a:endParaRPr lang="en-US" sz="1150" dirty="0"/>
           </a:p>
@@ -11403,18 +13074,18 @@
       </p:sp>
       <p:sp>
         <p:nvSpPr>
-          <p:cNvPr id="14" name="Shape 12"/>
-          <p:cNvSpPr/>
-          <p:nvPr/>
-        </p:nvSpPr>
-        <p:spPr>
-          <a:xfrm>
-            <a:off x="4315968" y="3429000"/>
-            <a:ext cx="3566160" cy="1371600"/>
+          <p:cNvPr id="10" name="Shape 8"/>
+          <p:cNvSpPr/>
+          <p:nvPr/>
+        </p:nvSpPr>
+        <p:spPr>
+          <a:xfrm>
+            <a:off x="4315968" y="1600200"/>
+            <a:ext cx="3566160" cy="2148840"/>
           </a:xfrm>
           <a:prstGeom prst="roundRect">
             <a:avLst>
-              <a:gd name="adj" fmla="val 6000"/>
+              <a:gd name="adj" fmla="val 3830"/>
             </a:avLst>
           </a:prstGeom>
           <a:solidFill>
@@ -11432,30 +13103,30 @@
       </p:sp>
       <p:sp>
         <p:nvSpPr>
-          <p:cNvPr id="15" name="Text 13"/>
-          <p:cNvSpPr/>
-          <p:nvPr/>
-        </p:nvSpPr>
-        <p:spPr>
-          <a:xfrm>
-            <a:off x="4590288" y="3611880"/>
-            <a:ext cx="3017520" cy="502920"/>
-          </a:xfrm>
-          <a:prstGeom prst="rect">
-            <a:avLst/>
-          </a:prstGeom>
-          <a:noFill/>
-          <a:ln/>
-        </p:spPr>
-        <p:txBody>
-          <a:bodyPr wrap="square" lIns="0" tIns="0" rIns="0" bIns="0" rtlCol="0" anchor="ctr"/>
-          <a:lstStyle/>
-          <a:p>
-            <a:pPr indent="0" marL="0">
-              <a:buNone/>
-            </a:pPr>
-            <a:r>
-              <a:rPr lang="en-US" sz="3000" b="1" dirty="0">
+          <p:cNvPr id="11" name="Text 9"/>
+          <p:cNvSpPr/>
+          <p:nvPr/>
+        </p:nvSpPr>
+        <p:spPr>
+          <a:xfrm>
+            <a:off x="4590288" y="1828800"/>
+            <a:ext cx="3017520" cy="868680"/>
+          </a:xfrm>
+          <a:prstGeom prst="rect">
+            <a:avLst/>
+          </a:prstGeom>
+          <a:noFill/>
+          <a:ln/>
+        </p:spPr>
+        <p:txBody>
+          <a:bodyPr wrap="square" lIns="0" tIns="0" rIns="0" bIns="0" rtlCol="0" anchor="ctr"/>
+          <a:lstStyle/>
+          <a:p>
+            <a:pPr algn="l" indent="0" marL="0">
+              <a:buNone/>
+            </a:pPr>
+            <a:r>
+              <a:rPr lang="en-US" sz="4400" b="1" dirty="0">
                 <a:solidFill>
                   <a:srgbClr val="C9871F"/>
                 </a:solidFill>
@@ -11463,22 +13134,64 @@
                 <a:ea typeface="Cambria" pitchFamily="34" charset="-122"/>
                 <a:cs typeface="Cambria" pitchFamily="34" charset="-120"/>
               </a:rPr>
-              <a:t>54%</a:t>
-            </a:r>
-            <a:endParaRPr lang="en-US" sz="3000" dirty="0"/>
-          </a:p>
-        </p:txBody>
-      </p:sp>
-      <p:sp>
-        <p:nvSpPr>
-          <p:cNvPr id="16" name="Text 14"/>
-          <p:cNvSpPr/>
-          <p:nvPr/>
-        </p:nvSpPr>
-        <p:spPr>
-          <a:xfrm>
-            <a:off x="4590288" y="4142232"/>
-            <a:ext cx="3017520" cy="594360"/>
+              <a:t>12万人超</a:t>
+            </a:r>
+            <a:endParaRPr lang="en-US" sz="4400" dirty="0"/>
+          </a:p>
+        </p:txBody>
+      </p:sp>
+      <p:sp>
+        <p:nvSpPr>
+          <p:cNvPr id="12" name="Text 10"/>
+          <p:cNvSpPr/>
+          <p:nvPr/>
+        </p:nvSpPr>
+        <p:spPr>
+          <a:xfrm>
+            <a:off x="4590288" y="2697480"/>
+            <a:ext cx="3017520" cy="457200"/>
+          </a:xfrm>
+          <a:prstGeom prst="rect">
+            <a:avLst/>
+          </a:prstGeom>
+          <a:noFill/>
+          <a:ln/>
+        </p:spPr>
+        <p:txBody>
+          <a:bodyPr wrap="square" lIns="0" tIns="0" rIns="0" bIns="0" rtlCol="0" anchor="t"/>
+          <a:lstStyle/>
+          <a:p>
+            <a:pPr indent="0" marL="0">
+              <a:lnSpc>
+                <a:spcPts val="1700"/>
+              </a:lnSpc>
+              <a:buNone/>
+            </a:pPr>
+            <a:r>
+              <a:rPr lang="en-US" sz="1400" b="1" dirty="0">
+                <a:solidFill>
+                  <a:srgbClr val="1B2430"/>
+                </a:solidFill>
+                <a:latin typeface="Calibri" pitchFamily="34" charset="0"/>
+                <a:ea typeface="Calibri" pitchFamily="34" charset="-122"/>
+                <a:cs typeface="Calibri" pitchFamily="34" charset="-120"/>
+              </a:rPr>
+              <a:t>東京圏への転入超過（2025年）</a:t>
+            </a:r>
+            <a:endParaRPr lang="en-US" sz="1400" dirty="0"/>
+          </a:p>
+        </p:txBody>
+      </p:sp>
+      <p:sp>
+        <p:nvSpPr>
+          <p:cNvPr id="13" name="Text 11"/>
+          <p:cNvSpPr/>
+          <p:nvPr/>
+        </p:nvSpPr>
+        <p:spPr>
+          <a:xfrm>
+            <a:off x="4590288" y="3172968"/>
+            <a:ext cx="3017520" cy="457200"/>
           </a:xfrm>
           <a:prstGeom prst="rect">
             <a:avLst/>
@@ -11505,7 +13218,7 @@
                 <a:ea typeface="Calibri" pitchFamily="34" charset="-122"/>
                 <a:cs typeface="Calibri" pitchFamily="34" charset="-120"/>
               </a:rPr>
-              <a:t>国内営業が顧客対応に使えている業務時間。「もっと商談に時間を使いたい」が本音</a:t>
+              <a:t>当社商圏に人と世帯が集まり続ける</a:t>
             </a:r>
             <a:endParaRPr lang="en-US" sz="1150" dirty="0"/>
           </a:p>
@@ -11513,22 +13226,22 @@
       </p:sp>
       <p:sp>
         <p:nvSpPr>
-          <p:cNvPr id="17" name="Shape 15"/>
-          <p:cNvSpPr/>
-          <p:nvPr/>
-        </p:nvSpPr>
-        <p:spPr>
-          <a:xfrm>
-            <a:off x="8065008" y="3429000"/>
-            <a:ext cx="3566160" cy="1371600"/>
+          <p:cNvPr id="14" name="Shape 12"/>
+          <p:cNvSpPr/>
+          <p:nvPr/>
+        </p:nvSpPr>
+        <p:spPr>
+          <a:xfrm>
+            <a:off x="8065008" y="1600200"/>
+            <a:ext cx="3566160" cy="2148840"/>
           </a:xfrm>
           <a:prstGeom prst="roundRect">
             <a:avLst>
-              <a:gd name="adj" fmla="val 6000"/>
+              <a:gd name="adj" fmla="val 3830"/>
             </a:avLst>
           </a:prstGeom>
           <a:solidFill>
-            <a:srgbClr val="E9F1F4"/>
+            <a:srgbClr val="FBEFD9"/>
           </a:solidFill>
           <a:ln/>
           <a:effectLst>
@@ -11542,53 +13255,95 @@
       </p:sp>
       <p:sp>
         <p:nvSpPr>
-          <p:cNvPr id="18" name="Text 16"/>
-          <p:cNvSpPr/>
-          <p:nvPr/>
-        </p:nvSpPr>
-        <p:spPr>
-          <a:xfrm>
-            <a:off x="8339328" y="3611880"/>
-            <a:ext cx="3017520" cy="365760"/>
-          </a:xfrm>
-          <a:prstGeom prst="rect">
-            <a:avLst/>
-          </a:prstGeom>
-          <a:noFill/>
-          <a:ln/>
-        </p:spPr>
-        <p:txBody>
-          <a:bodyPr wrap="square" lIns="0" tIns="0" rIns="0" bIns="0" rtlCol="0" anchor="ctr"/>
+          <p:cNvPr id="15" name="Text 13"/>
+          <p:cNvSpPr/>
+          <p:nvPr/>
+        </p:nvSpPr>
+        <p:spPr>
+          <a:xfrm>
+            <a:off x="8339328" y="1828800"/>
+            <a:ext cx="3017520" cy="868680"/>
+          </a:xfrm>
+          <a:prstGeom prst="rect">
+            <a:avLst/>
+          </a:prstGeom>
+          <a:noFill/>
+          <a:ln/>
+        </p:spPr>
+        <p:txBody>
+          <a:bodyPr wrap="square" lIns="0" tIns="0" rIns="0" bIns="0" rtlCol="0" anchor="ctr"/>
+          <a:lstStyle/>
+          <a:p>
+            <a:pPr algn="l" indent="0" marL="0">
+              <a:buNone/>
+            </a:pPr>
+            <a:r>
+              <a:rPr lang="en-US" sz="4400" b="1" dirty="0">
+                <a:solidFill>
+                  <a:srgbClr val="2E7D57"/>
+                </a:solidFill>
+                <a:latin typeface="Cambria" pitchFamily="34" charset="0"/>
+                <a:ea typeface="Cambria" pitchFamily="34" charset="-122"/>
+                <a:cs typeface="Cambria" pitchFamily="34" charset="-120"/>
+              </a:rPr>
+              <a:t>約55%</a:t>
+            </a:r>
+            <a:endParaRPr lang="en-US" sz="4400" dirty="0"/>
+          </a:p>
+        </p:txBody>
+      </p:sp>
+      <p:sp>
+        <p:nvSpPr>
+          <p:cNvPr id="16" name="Text 14"/>
+          <p:cNvSpPr/>
+          <p:nvPr/>
+        </p:nvSpPr>
+        <p:spPr>
+          <a:xfrm>
+            <a:off x="8339328" y="2697480"/>
+            <a:ext cx="3017520" cy="457200"/>
+          </a:xfrm>
+          <a:prstGeom prst="rect">
+            <a:avLst/>
+          </a:prstGeom>
+          <a:noFill/>
+          <a:ln/>
+        </p:spPr>
+        <p:txBody>
+          <a:bodyPr wrap="square" lIns="0" tIns="0" rIns="0" bIns="0" rtlCol="0" anchor="t"/>
           <a:lstStyle/>
           <a:p>
             <a:pPr indent="0" marL="0">
-              <a:buNone/>
-            </a:pPr>
-            <a:r>
-              <a:rPr lang="en-US" sz="1350" b="1" dirty="0">
-                <a:solidFill>
-                  <a:srgbClr val="1C7293"/>
-                </a:solidFill>
-                <a:latin typeface="Calibri" pitchFamily="34" charset="0"/>
-                <a:ea typeface="Calibri" pitchFamily="34" charset="-122"/>
-                <a:cs typeface="Calibri" pitchFamily="34" charset="-120"/>
-              </a:rPr>
-              <a:t>【差し込み】当社のAI活用の実例</a:t>
-            </a:r>
-            <a:endParaRPr lang="en-US" sz="1350" dirty="0"/>
-          </a:p>
-        </p:txBody>
-      </p:sp>
-      <p:sp>
-        <p:nvSpPr>
-          <p:cNvPr id="19" name="Text 17"/>
-          <p:cNvSpPr/>
-          <p:nvPr/>
-        </p:nvSpPr>
-        <p:spPr>
-          <a:xfrm>
-            <a:off x="8339328" y="3995928"/>
-            <a:ext cx="3017520" cy="731520"/>
+              <a:lnSpc>
+                <a:spcPts val="1700"/>
+              </a:lnSpc>
+              <a:buNone/>
+            </a:pPr>
+            <a:r>
+              <a:rPr lang="en-US" sz="1400" b="1" dirty="0">
+                <a:solidFill>
+                  <a:srgbClr val="1B2430"/>
+                </a:solidFill>
+                <a:latin typeface="Calibri" pitchFamily="34" charset="0"/>
+                <a:ea typeface="Calibri" pitchFamily="34" charset="-122"/>
+                <a:cs typeface="Calibri" pitchFamily="34" charset="-120"/>
+              </a:rPr>
+              <a:t>注文住宅の事業者選択理由 第1位</a:t>
+            </a:r>
+            <a:endParaRPr lang="en-US" sz="1400" dirty="0"/>
+          </a:p>
+        </p:txBody>
+      </p:sp>
+      <p:sp>
+        <p:nvSpPr>
+          <p:cNvPr id="17" name="Text 15"/>
+          <p:cNvSpPr/>
+          <p:nvPr/>
+        </p:nvSpPr>
+        <p:spPr>
+          <a:xfrm>
+            <a:off x="8339328" y="3172968"/>
+            <a:ext cx="3017520" cy="457200"/>
           </a:xfrm>
           <a:prstGeom prst="rect">
             <a:avLst/>
@@ -11615,7 +13370,7 @@
                 <a:ea typeface="Calibri" pitchFamily="34" charset="-122"/>
                 <a:cs typeface="Calibri" pitchFamily="34" charset="-120"/>
               </a:rPr>
-              <a:t>反響一次対応・提案資料作成・追客・図面/パース生成 等、自社で実際に使っている場面を1つ以上ここに（実態のある事例のみ）。</a:t>
+              <a:t>「信頼できる住宅メーカー／不動産業者」</a:t>
             </a:r>
             <a:endParaRPr lang="en-US" sz="1150" dirty="0"/>
           </a:p>
@@ -11623,14 +13378,43 @@
       </p:sp>
       <p:sp>
         <p:nvSpPr>
-          <p:cNvPr id="20" name="Text 18"/>
-          <p:cNvSpPr/>
-          <p:nvPr/>
-        </p:nvSpPr>
-        <p:spPr>
-          <a:xfrm>
-            <a:off x="566928" y="5074920"/>
-            <a:ext cx="11064240" cy="548640"/>
+          <p:cNvPr id="18" name="Shape 16"/>
+          <p:cNvSpPr/>
+          <p:nvPr/>
+        </p:nvSpPr>
+        <p:spPr>
+          <a:xfrm>
+            <a:off x="566928" y="4023360"/>
+            <a:ext cx="11064240" cy="1600200"/>
+          </a:xfrm>
+          <a:prstGeom prst="roundRect">
+            <a:avLst>
+              <a:gd name="adj" fmla="val 5143"/>
+            </a:avLst>
+          </a:prstGeom>
+          <a:solidFill>
+            <a:srgbClr val="1B2A4A"/>
+          </a:solidFill>
+          <a:ln/>
+          <a:effectLst>
+            <a:outerShdw sx="100000" sy="100000" kx="0" ky="0" algn="bl" rotWithShape="0" blurRad="114300" dist="38100" dir="5400000">
+              <a:srgbClr val="9AA6B8">
+                <a:alpha val="35000"/>
+              </a:srgbClr>
+            </a:outerShdw>
+          </a:effectLst>
+        </p:spPr>
+      </p:sp>
+      <p:sp>
+        <p:nvSpPr>
+          <p:cNvPr id="19" name="Text 17"/>
+          <p:cNvSpPr/>
+          <p:nvPr/>
+        </p:nvSpPr>
+        <p:spPr>
+          <a:xfrm>
+            <a:off x="978408" y="4206240"/>
+            <a:ext cx="10241280" cy="457200"/>
           </a:xfrm>
           <a:prstGeom prst="rect">
             <a:avLst/>
@@ -11646,17 +13430,59 @@
               <a:buNone/>
             </a:pPr>
             <a:r>
-              <a:rPr lang="en-US" sz="1600" b="1" i="1" dirty="0">
-                <a:solidFill>
-                  <a:srgbClr val="1B2A4A"/>
+              <a:rPr lang="en-US" sz="2000" b="1" dirty="0">
+                <a:solidFill>
+                  <a:srgbClr val="FFFFFF"/>
                 </a:solidFill>
                 <a:latin typeface="Cambria" pitchFamily="34" charset="0"/>
                 <a:ea typeface="Cambria" pitchFamily="34" charset="-122"/>
                 <a:cs typeface="Cambria" pitchFamily="34" charset="-120"/>
               </a:rPr>
-              <a:t>AIは営業を“消す”のではなく、営業から“雑務を消す”。空いた時間はすべて、人にしかできない商談と信頼構築へ。</a:t>
-            </a:r>
-            <a:endParaRPr lang="en-US" sz="1600" dirty="0"/>
+              <a:t>情報収集は「ネット」。でも最終判断は「人（担当者）」。</a:t>
+            </a:r>
+            <a:endParaRPr lang="en-US" sz="2000" dirty="0"/>
+          </a:p>
+        </p:txBody>
+      </p:sp>
+      <p:sp>
+        <p:nvSpPr>
+          <p:cNvPr id="20" name="Text 18"/>
+          <p:cNvSpPr/>
+          <p:nvPr/>
+        </p:nvSpPr>
+        <p:spPr>
+          <a:xfrm>
+            <a:off x="978408" y="4709160"/>
+            <a:ext cx="10241280" cy="822960"/>
+          </a:xfrm>
+          <a:prstGeom prst="rect">
+            <a:avLst/>
+          </a:prstGeom>
+          <a:noFill/>
+          <a:ln/>
+        </p:spPr>
+        <p:txBody>
+          <a:bodyPr wrap="square" lIns="0" tIns="0" rIns="0" bIns="0" rtlCol="0" anchor="t"/>
+          <a:lstStyle/>
+          <a:p>
+            <a:pPr indent="0" marL="0">
+              <a:lnSpc>
+                <a:spcPts val="2000"/>
+              </a:lnSpc>
+              <a:buNone/>
+            </a:pPr>
+            <a:r>
+              <a:rPr lang="en-US" sz="1400" dirty="0">
+                <a:solidFill>
+                  <a:srgbClr val="CADCFC"/>
+                </a:solidFill>
+                <a:latin typeface="Calibri" pitchFamily="34" charset="0"/>
+                <a:ea typeface="Calibri" pitchFamily="34" charset="-122"/>
+                <a:cs typeface="Calibri" pitchFamily="34" charset="-120"/>
+              </a:rPr>
+              <a:t>数千万円・一生に一度・一件ごとに条件が違う買い物では、AIやネットで調べ尽くした人ほど、最後は「この人から買いたい」で決める。この“決めさせる力”こそ住宅営業の中核価値。</a:t>
+            </a:r>
+            <a:endParaRPr lang="en-US" sz="1400" dirty="0"/>
           </a:p>
         </p:txBody>
       </p:sp>
@@ -11693,7 +13519,7 @@
                 <a:ea typeface="Calibri" pitchFamily="34" charset="-122"/>
                 <a:cs typeface="Calibri" pitchFamily="34" charset="-120"/>
               </a:rPr>
-              <a:t>出典：Salesforce「State of Sales」第7版(2026) ／ HubSpot「日本の営業実態調査」2024。</a:t>
+              <a:t>出典：厚労省 一般職業紹介状況 ／ 総務省 住民基本台帳人口移動報告2025 ／ 国交省 住宅市場動向調査 令和6年度。</a:t>
             </a:r>
             <a:endParaRPr lang="en-US" sz="850" dirty="0"/>
           </a:p>
